--- a/skills/overview-deck/assets/skeletons/team.pptx
+++ b/skills/overview-deck/assets/skeletons/team.pptx
@@ -8,7 +8,7 @@
   <p:sldIdLst>
     <p:sldId id="256" r:id="rId8"/>
   </p:sldIdLst>
-  <p:sldSz cx="9144000" cy="5143500" type="screen4x3"/>
+  <p:sldSz cx="12191695" cy="6858000" type="screen4x3"/>
   <p:notesSz cx="6858000" cy="9144000"/>
   <p:defaultTextStyle>
     <a:defPPr>
@@ -727,8 +727,8 @@
         </p:nvSpPr>
         <p:spPr>
           <a:xfrm>
-            <a:off x="342900" y="4767263"/>
-            <a:ext cx="1600200" cy="273844"/>
+            <a:off x="457189" y="6356192"/>
+            <a:ext cx="2133547" cy="365116"/>
           </a:xfrm>
           <a:prstGeom prst="rect">
             <a:avLst/>
@@ -739,7 +739,7 @@
           </a:ln>
         </p:spPr>
         <p:txBody>
-          <a:bodyPr anchorCtr="0" anchor="ctr" bIns="45700" lIns="91425" spcFirstLastPara="1" rIns="91425" wrap="square" tIns="45700">
+          <a:bodyPr anchorCtr="0" anchor="ctr" bIns="60932" lIns="121897" spcFirstLastPara="1" rIns="121897" wrap="square" tIns="60932">
             <a:noAutofit/>
           </a:bodyPr>
           <a:lstStyle>
@@ -756,7 +756,7 @@
               <a:buClr>
                 <a:srgbClr val="888888"/>
               </a:buClr>
-              <a:buSzPts val="1800"/>
+              <a:buSzPts val="2400"/>
               <a:buNone/>
               <a:defRPr/>
             </a:lvl1pPr>
@@ -773,7 +773,7 @@
               <a:buClr>
                 <a:schemeClr val="accent2"/>
               </a:buClr>
-              <a:buSzPts val="1800"/>
+              <a:buSzPts val="2400"/>
               <a:buNone/>
               <a:defRPr/>
             </a:lvl2pPr>
@@ -790,7 +790,7 @@
               <a:buClr>
                 <a:schemeClr val="accent2"/>
               </a:buClr>
-              <a:buSzPts val="1800"/>
+              <a:buSzPts val="2400"/>
               <a:buNone/>
               <a:defRPr/>
             </a:lvl3pPr>
@@ -807,7 +807,7 @@
               <a:buClr>
                 <a:schemeClr val="accent2"/>
               </a:buClr>
-              <a:buSzPts val="1800"/>
+              <a:buSzPts val="2400"/>
               <a:buNone/>
               <a:defRPr/>
             </a:lvl4pPr>
@@ -824,7 +824,7 @@
               <a:buClr>
                 <a:schemeClr val="accent2"/>
               </a:buClr>
-              <a:buSzPts val="1800"/>
+              <a:buSzPts val="2400"/>
               <a:buNone/>
               <a:defRPr/>
             </a:lvl5pPr>
@@ -841,7 +841,7 @@
               <a:buClr>
                 <a:schemeClr val="accent2"/>
               </a:buClr>
-              <a:buSzPts val="1800"/>
+              <a:buSzPts val="2400"/>
               <a:buNone/>
               <a:defRPr/>
             </a:lvl6pPr>
@@ -858,7 +858,7 @@
               <a:buClr>
                 <a:schemeClr val="accent2"/>
               </a:buClr>
-              <a:buSzPts val="1800"/>
+              <a:buSzPts val="2400"/>
               <a:buNone/>
               <a:defRPr/>
             </a:lvl7pPr>
@@ -875,7 +875,7 @@
               <a:buClr>
                 <a:schemeClr val="accent2"/>
               </a:buClr>
-              <a:buSzPts val="1800"/>
+              <a:buSzPts val="2400"/>
               <a:buNone/>
               <a:defRPr/>
             </a:lvl8pPr>
@@ -892,7 +892,7 @@
               <a:buClr>
                 <a:schemeClr val="accent2"/>
               </a:buClr>
-              <a:buSzPts val="1800"/>
+              <a:buSzPts val="2400"/>
               <a:buNone/>
               <a:defRPr/>
             </a:lvl9pPr>
@@ -910,8 +910,8 @@
         </p:nvSpPr>
         <p:spPr>
           <a:xfrm>
-            <a:off x="2343150" y="4767263"/>
-            <a:ext cx="2171700" cy="273844"/>
+            <a:off x="3124122" y="6356192"/>
+            <a:ext cx="2895528" cy="365116"/>
           </a:xfrm>
           <a:prstGeom prst="rect">
             <a:avLst/>
@@ -922,7 +922,7 @@
           </a:ln>
         </p:spPr>
         <p:txBody>
-          <a:bodyPr anchorCtr="0" anchor="ctr" bIns="45700" lIns="91425" spcFirstLastPara="1" rIns="91425" wrap="square" tIns="45700">
+          <a:bodyPr anchorCtr="0" anchor="ctr" bIns="60932" lIns="121897" spcFirstLastPara="1" rIns="121897" wrap="square" tIns="60932">
             <a:noAutofit/>
           </a:bodyPr>
           <a:lstStyle>
@@ -939,7 +939,7 @@
               <a:buClr>
                 <a:srgbClr val="888888"/>
               </a:buClr>
-              <a:buSzPts val="1800"/>
+              <a:buSzPts val="2400"/>
               <a:buNone/>
               <a:defRPr/>
             </a:lvl1pPr>
@@ -956,7 +956,7 @@
               <a:buClr>
                 <a:schemeClr val="accent2"/>
               </a:buClr>
-              <a:buSzPts val="1800"/>
+              <a:buSzPts val="2400"/>
               <a:buNone/>
               <a:defRPr/>
             </a:lvl2pPr>
@@ -973,7 +973,7 @@
               <a:buClr>
                 <a:schemeClr val="accent2"/>
               </a:buClr>
-              <a:buSzPts val="1800"/>
+              <a:buSzPts val="2400"/>
               <a:buNone/>
               <a:defRPr/>
             </a:lvl3pPr>
@@ -990,7 +990,7 @@
               <a:buClr>
                 <a:schemeClr val="accent2"/>
               </a:buClr>
-              <a:buSzPts val="1800"/>
+              <a:buSzPts val="2400"/>
               <a:buNone/>
               <a:defRPr/>
             </a:lvl4pPr>
@@ -1007,7 +1007,7 @@
               <a:buClr>
                 <a:schemeClr val="accent2"/>
               </a:buClr>
-              <a:buSzPts val="1800"/>
+              <a:buSzPts val="2400"/>
               <a:buNone/>
               <a:defRPr/>
             </a:lvl5pPr>
@@ -1024,7 +1024,7 @@
               <a:buClr>
                 <a:schemeClr val="accent2"/>
               </a:buClr>
-              <a:buSzPts val="1800"/>
+              <a:buSzPts val="2400"/>
               <a:buNone/>
               <a:defRPr/>
             </a:lvl6pPr>
@@ -1041,7 +1041,7 @@
               <a:buClr>
                 <a:schemeClr val="accent2"/>
               </a:buClr>
-              <a:buSzPts val="1800"/>
+              <a:buSzPts val="2400"/>
               <a:buNone/>
               <a:defRPr/>
             </a:lvl7pPr>
@@ -1058,7 +1058,7 @@
               <a:buClr>
                 <a:schemeClr val="accent2"/>
               </a:buClr>
-              <a:buSzPts val="1800"/>
+              <a:buSzPts val="2400"/>
               <a:buNone/>
               <a:defRPr/>
             </a:lvl8pPr>
@@ -1075,7 +1075,7 @@
               <a:buClr>
                 <a:schemeClr val="accent2"/>
               </a:buClr>
-              <a:buSzPts val="1800"/>
+              <a:buSzPts val="2400"/>
               <a:buNone/>
               <a:defRPr/>
             </a:lvl9pPr>
@@ -1093,8 +1093,8 @@
         </p:nvSpPr>
         <p:spPr>
           <a:xfrm>
-            <a:off x="4914900" y="4767263"/>
-            <a:ext cx="1600200" cy="273844"/>
+            <a:off x="6553036" y="6356192"/>
+            <a:ext cx="2133547" cy="365116"/>
           </a:xfrm>
           <a:prstGeom prst="rect">
             <a:avLst/>
@@ -1105,7 +1105,7 @@
           </a:ln>
         </p:spPr>
         <p:txBody>
-          <a:bodyPr anchorCtr="0" anchor="ctr" bIns="45700" lIns="91425" spcFirstLastPara="1" rIns="91425" wrap="square" tIns="45700">
+          <a:bodyPr anchorCtr="0" anchor="ctr" bIns="60932" lIns="121897" spcFirstLastPara="1" rIns="121897" wrap="square" tIns="60932">
             <a:noAutofit/>
           </a:bodyPr>
           <a:lstStyle>
@@ -1122,7 +1122,7 @@
               <a:buClr>
                 <a:srgbClr val="888888"/>
               </a:buClr>
-              <a:buSzPts val="900"/>
+              <a:buSzPts val="1200"/>
               <a:buFont typeface="Calibri"/>
               <a:buNone/>
               <a:defRPr/>
@@ -1140,7 +1140,7 @@
               <a:buClr>
                 <a:srgbClr val="888888"/>
               </a:buClr>
-              <a:buSzPts val="900"/>
+              <a:buSzPts val="1200"/>
               <a:buFont typeface="Calibri"/>
               <a:buNone/>
               <a:defRPr/>
@@ -1158,7 +1158,7 @@
               <a:buClr>
                 <a:srgbClr val="888888"/>
               </a:buClr>
-              <a:buSzPts val="900"/>
+              <a:buSzPts val="1200"/>
               <a:buFont typeface="Calibri"/>
               <a:buNone/>
               <a:defRPr/>
@@ -1176,7 +1176,7 @@
               <a:buClr>
                 <a:srgbClr val="888888"/>
               </a:buClr>
-              <a:buSzPts val="900"/>
+              <a:buSzPts val="1200"/>
               <a:buFont typeface="Calibri"/>
               <a:buNone/>
               <a:defRPr/>
@@ -1194,7 +1194,7 @@
               <a:buClr>
                 <a:srgbClr val="888888"/>
               </a:buClr>
-              <a:buSzPts val="900"/>
+              <a:buSzPts val="1200"/>
               <a:buFont typeface="Calibri"/>
               <a:buNone/>
               <a:defRPr/>
@@ -1212,7 +1212,7 @@
               <a:buClr>
                 <a:srgbClr val="888888"/>
               </a:buClr>
-              <a:buSzPts val="900"/>
+              <a:buSzPts val="1200"/>
               <a:buFont typeface="Calibri"/>
               <a:buNone/>
               <a:defRPr/>
@@ -1230,7 +1230,7 @@
               <a:buClr>
                 <a:srgbClr val="888888"/>
               </a:buClr>
-              <a:buSzPts val="900"/>
+              <a:buSzPts val="1200"/>
               <a:buFont typeface="Calibri"/>
               <a:buNone/>
               <a:defRPr/>
@@ -1248,7 +1248,7 @@
               <a:buClr>
                 <a:srgbClr val="888888"/>
               </a:buClr>
-              <a:buSzPts val="900"/>
+              <a:buSzPts val="1200"/>
               <a:buFont typeface="Calibri"/>
               <a:buNone/>
               <a:defRPr/>
@@ -1266,7 +1266,7 @@
               <a:buClr>
                 <a:srgbClr val="888888"/>
               </a:buClr>
-              <a:buSzPts val="900"/>
+              <a:buSzPts val="1200"/>
               <a:buFont typeface="Calibri"/>
               <a:buNone/>
               <a:defRPr/>
@@ -1325,8 +1325,8 @@
         </p:nvSpPr>
         <p:spPr>
           <a:xfrm>
-            <a:off x="1344216" y="3600450"/>
-            <a:ext cx="4114800" cy="425054"/>
+            <a:off x="1792243" y="4800480"/>
+            <a:ext cx="5486263" cy="566724"/>
           </a:xfrm>
           <a:prstGeom prst="rect">
             <a:avLst/>
@@ -1337,7 +1337,7 @@
           </a:ln>
         </p:spPr>
         <p:txBody>
-          <a:bodyPr anchorCtr="0" anchor="b" bIns="45700" lIns="91425" spcFirstLastPara="1" rIns="91425" wrap="square" tIns="45700">
+          <a:bodyPr anchorCtr="0" anchor="b" bIns="60932" lIns="121897" spcFirstLastPara="1" rIns="121897" wrap="square" tIns="60932">
             <a:normAutofit/>
           </a:bodyPr>
           <a:lstStyle>
@@ -1351,10 +1351,10 @@
               <a:buClr>
                 <a:schemeClr val="dk1"/>
               </a:buClr>
-              <a:buSzPts val="1500"/>
+              <a:buSzPts val="2000"/>
               <a:buFont typeface="Calibri"/>
               <a:buNone/>
-              <a:defRPr b="1" sz="1500"/>
+              <a:defRPr b="1" sz="2000"/>
             </a:lvl1pPr>
             <a:lvl2pPr lvl="1">
               <a:spcBef>
@@ -1363,7 +1363,7 @@
               <a:spcAft>
                 <a:spcPts val="0"/>
               </a:spcAft>
-              <a:buSzPts val="1400"/>
+              <a:buSzPts val="1867"/>
               <a:buNone/>
               <a:defRPr/>
             </a:lvl2pPr>
@@ -1374,7 +1374,7 @@
               <a:spcAft>
                 <a:spcPts val="0"/>
               </a:spcAft>
-              <a:buSzPts val="1400"/>
+              <a:buSzPts val="1867"/>
               <a:buNone/>
               <a:defRPr/>
             </a:lvl3pPr>
@@ -1385,7 +1385,7 @@
               <a:spcAft>
                 <a:spcPts val="0"/>
               </a:spcAft>
-              <a:buSzPts val="1400"/>
+              <a:buSzPts val="1867"/>
               <a:buNone/>
               <a:defRPr/>
             </a:lvl4pPr>
@@ -1396,7 +1396,7 @@
               <a:spcAft>
                 <a:spcPts val="0"/>
               </a:spcAft>
-              <a:buSzPts val="1400"/>
+              <a:buSzPts val="1867"/>
               <a:buNone/>
               <a:defRPr/>
             </a:lvl5pPr>
@@ -1407,7 +1407,7 @@
               <a:spcAft>
                 <a:spcPts val="0"/>
               </a:spcAft>
-              <a:buSzPts val="1400"/>
+              <a:buSzPts val="1867"/>
               <a:buNone/>
               <a:defRPr/>
             </a:lvl6pPr>
@@ -1418,7 +1418,7 @@
               <a:spcAft>
                 <a:spcPts val="0"/>
               </a:spcAft>
-              <a:buSzPts val="1400"/>
+              <a:buSzPts val="1867"/>
               <a:buNone/>
               <a:defRPr/>
             </a:lvl7pPr>
@@ -1429,7 +1429,7 @@
               <a:spcAft>
                 <a:spcPts val="0"/>
               </a:spcAft>
-              <a:buSzPts val="1400"/>
+              <a:buSzPts val="1867"/>
               <a:buNone/>
               <a:defRPr/>
             </a:lvl8pPr>
@@ -1440,7 +1440,7 @@
               <a:spcAft>
                 <a:spcPts val="0"/>
               </a:spcAft>
-              <a:buSzPts val="1400"/>
+              <a:buSzPts val="1867"/>
               <a:buNone/>
               <a:defRPr/>
             </a:lvl9pPr>
@@ -1458,8 +1458,8 @@
         </p:nvSpPr>
         <p:spPr>
           <a:xfrm>
-            <a:off x="1344216" y="459581"/>
-            <a:ext cx="4114800" cy="3086100"/>
+            <a:off x="1792243" y="612759"/>
+            <a:ext cx="5486263" cy="4114697"/>
           </a:xfrm>
           <a:prstGeom prst="rect">
             <a:avLst/>
@@ -1480,8 +1480,8 @@
         </p:nvSpPr>
         <p:spPr>
           <a:xfrm>
-            <a:off x="1344216" y="4025503"/>
-            <a:ext cx="4114800" cy="603647"/>
+            <a:off x="1792243" y="5367203"/>
+            <a:ext cx="5486263" cy="804843"/>
           </a:xfrm>
           <a:prstGeom prst="rect">
             <a:avLst/>
@@ -1492,13 +1492,13 @@
           </a:ln>
         </p:spPr>
         <p:txBody>
-          <a:bodyPr anchorCtr="0" anchor="t" bIns="45700" lIns="91425" spcFirstLastPara="1" rIns="91425" wrap="square" tIns="45700">
+          <a:bodyPr anchorCtr="0" anchor="t" bIns="60932" lIns="121897" spcFirstLastPara="1" rIns="121897" wrap="square" tIns="60932">
             <a:normAutofit/>
           </a:bodyPr>
           <a:lstStyle>
             <a:lvl1pPr indent="-228600" lvl="0" marL="457200" algn="l">
               <a:spcBef>
-                <a:spcPts val="210"/>
+                <a:spcPts val="280"/>
               </a:spcBef>
               <a:spcAft>
                 <a:spcPts val="0"/>
@@ -1506,13 +1506,13 @@
               <a:buClr>
                 <a:schemeClr val="dk1"/>
               </a:buClr>
-              <a:buSzPts val="1050"/>
-              <a:buNone/>
-              <a:defRPr sz="1050"/>
+              <a:buSzPts val="1400"/>
+              <a:buNone/>
+              <a:defRPr sz="1400"/>
             </a:lvl1pPr>
             <a:lvl2pPr indent="-228600" lvl="1" marL="914400" algn="l">
               <a:spcBef>
-                <a:spcPts val="180"/>
+                <a:spcPts val="240"/>
               </a:spcBef>
               <a:spcAft>
                 <a:spcPts val="0"/>
@@ -1520,13 +1520,13 @@
               <a:buClr>
                 <a:schemeClr val="dk1"/>
               </a:buClr>
-              <a:buSzPts val="900"/>
-              <a:buNone/>
-              <a:defRPr sz="900"/>
+              <a:buSzPts val="1200"/>
+              <a:buNone/>
+              <a:defRPr sz="1200"/>
             </a:lvl2pPr>
             <a:lvl3pPr indent="-228600" lvl="2" marL="1371600" algn="l">
               <a:spcBef>
-                <a:spcPts val="150"/>
+                <a:spcPts val="200"/>
               </a:spcBef>
               <a:spcAft>
                 <a:spcPts val="0"/>
@@ -1534,13 +1534,13 @@
               <a:buClr>
                 <a:schemeClr val="dk1"/>
               </a:buClr>
-              <a:buSzPts val="750"/>
-              <a:buNone/>
-              <a:defRPr sz="750"/>
+              <a:buSzPts val="1000"/>
+              <a:buNone/>
+              <a:defRPr sz="1000"/>
             </a:lvl3pPr>
             <a:lvl4pPr indent="-228600" lvl="3" marL="1828800" algn="l">
               <a:spcBef>
-                <a:spcPts val="135"/>
+                <a:spcPts val="180"/>
               </a:spcBef>
               <a:spcAft>
                 <a:spcPts val="0"/>
@@ -1548,13 +1548,13 @@
               <a:buClr>
                 <a:schemeClr val="dk1"/>
               </a:buClr>
-              <a:buSzPts val="675"/>
-              <a:buNone/>
-              <a:defRPr sz="675"/>
+              <a:buSzPts val="900"/>
+              <a:buNone/>
+              <a:defRPr sz="900"/>
             </a:lvl4pPr>
             <a:lvl5pPr indent="-228600" lvl="4" marL="2286000" algn="l">
               <a:spcBef>
-                <a:spcPts val="135"/>
+                <a:spcPts val="180"/>
               </a:spcBef>
               <a:spcAft>
                 <a:spcPts val="0"/>
@@ -1562,13 +1562,13 @@
               <a:buClr>
                 <a:schemeClr val="dk1"/>
               </a:buClr>
-              <a:buSzPts val="675"/>
-              <a:buNone/>
-              <a:defRPr sz="675"/>
+              <a:buSzPts val="900"/>
+              <a:buNone/>
+              <a:defRPr sz="900"/>
             </a:lvl5pPr>
             <a:lvl6pPr indent="-228600" lvl="5" marL="2743200" algn="l">
               <a:spcBef>
-                <a:spcPts val="135"/>
+                <a:spcPts val="180"/>
               </a:spcBef>
               <a:spcAft>
                 <a:spcPts val="0"/>
@@ -1576,13 +1576,13 @@
               <a:buClr>
                 <a:schemeClr val="dk1"/>
               </a:buClr>
-              <a:buSzPts val="675"/>
-              <a:buNone/>
-              <a:defRPr sz="675"/>
+              <a:buSzPts val="900"/>
+              <a:buNone/>
+              <a:defRPr sz="900"/>
             </a:lvl6pPr>
             <a:lvl7pPr indent="-228600" lvl="6" marL="3200400" algn="l">
               <a:spcBef>
-                <a:spcPts val="135"/>
+                <a:spcPts val="180"/>
               </a:spcBef>
               <a:spcAft>
                 <a:spcPts val="0"/>
@@ -1590,13 +1590,13 @@
               <a:buClr>
                 <a:schemeClr val="dk1"/>
               </a:buClr>
-              <a:buSzPts val="675"/>
-              <a:buNone/>
-              <a:defRPr sz="675"/>
+              <a:buSzPts val="900"/>
+              <a:buNone/>
+              <a:defRPr sz="900"/>
             </a:lvl7pPr>
             <a:lvl8pPr indent="-228600" lvl="7" marL="3657600" algn="l">
               <a:spcBef>
-                <a:spcPts val="135"/>
+                <a:spcPts val="180"/>
               </a:spcBef>
               <a:spcAft>
                 <a:spcPts val="0"/>
@@ -1604,13 +1604,13 @@
               <a:buClr>
                 <a:schemeClr val="dk1"/>
               </a:buClr>
-              <a:buSzPts val="675"/>
-              <a:buNone/>
-              <a:defRPr sz="675"/>
+              <a:buSzPts val="900"/>
+              <a:buNone/>
+              <a:defRPr sz="900"/>
             </a:lvl8pPr>
             <a:lvl9pPr indent="-228600" lvl="8" marL="4114800" algn="l">
               <a:spcBef>
-                <a:spcPts val="135"/>
+                <a:spcPts val="180"/>
               </a:spcBef>
               <a:spcAft>
                 <a:spcPts val="0"/>
@@ -1618,9 +1618,9 @@
               <a:buClr>
                 <a:schemeClr val="dk1"/>
               </a:buClr>
-              <a:buSzPts val="675"/>
-              <a:buNone/>
-              <a:defRPr sz="675"/>
+              <a:buSzPts val="900"/>
+              <a:buNone/>
+              <a:defRPr sz="900"/>
             </a:lvl9pPr>
           </a:lstStyle>
           <a:p/>
@@ -1636,8 +1636,8 @@
         </p:nvSpPr>
         <p:spPr>
           <a:xfrm>
-            <a:off x="342900" y="4767263"/>
-            <a:ext cx="1600200" cy="273844"/>
+            <a:off x="457189" y="6356192"/>
+            <a:ext cx="2133547" cy="365116"/>
           </a:xfrm>
           <a:prstGeom prst="rect">
             <a:avLst/>
@@ -1648,7 +1648,7 @@
           </a:ln>
         </p:spPr>
         <p:txBody>
-          <a:bodyPr anchorCtr="0" anchor="ctr" bIns="45700" lIns="91425" spcFirstLastPara="1" rIns="91425" wrap="square" tIns="45700">
+          <a:bodyPr anchorCtr="0" anchor="ctr" bIns="60932" lIns="121897" spcFirstLastPara="1" rIns="121897" wrap="square" tIns="60932">
             <a:noAutofit/>
           </a:bodyPr>
           <a:lstStyle>
@@ -1665,7 +1665,7 @@
               <a:buClr>
                 <a:srgbClr val="888888"/>
               </a:buClr>
-              <a:buSzPts val="1800"/>
+              <a:buSzPts val="2400"/>
               <a:buNone/>
               <a:defRPr/>
             </a:lvl1pPr>
@@ -1682,7 +1682,7 @@
               <a:buClr>
                 <a:schemeClr val="accent2"/>
               </a:buClr>
-              <a:buSzPts val="1800"/>
+              <a:buSzPts val="2400"/>
               <a:buNone/>
               <a:defRPr/>
             </a:lvl2pPr>
@@ -1699,7 +1699,7 @@
               <a:buClr>
                 <a:schemeClr val="accent2"/>
               </a:buClr>
-              <a:buSzPts val="1800"/>
+              <a:buSzPts val="2400"/>
               <a:buNone/>
               <a:defRPr/>
             </a:lvl3pPr>
@@ -1716,7 +1716,7 @@
               <a:buClr>
                 <a:schemeClr val="accent2"/>
               </a:buClr>
-              <a:buSzPts val="1800"/>
+              <a:buSzPts val="2400"/>
               <a:buNone/>
               <a:defRPr/>
             </a:lvl4pPr>
@@ -1733,7 +1733,7 @@
               <a:buClr>
                 <a:schemeClr val="accent2"/>
               </a:buClr>
-              <a:buSzPts val="1800"/>
+              <a:buSzPts val="2400"/>
               <a:buNone/>
               <a:defRPr/>
             </a:lvl5pPr>
@@ -1750,7 +1750,7 @@
               <a:buClr>
                 <a:schemeClr val="accent2"/>
               </a:buClr>
-              <a:buSzPts val="1800"/>
+              <a:buSzPts val="2400"/>
               <a:buNone/>
               <a:defRPr/>
             </a:lvl6pPr>
@@ -1767,7 +1767,7 @@
               <a:buClr>
                 <a:schemeClr val="accent2"/>
               </a:buClr>
-              <a:buSzPts val="1800"/>
+              <a:buSzPts val="2400"/>
               <a:buNone/>
               <a:defRPr/>
             </a:lvl7pPr>
@@ -1784,7 +1784,7 @@
               <a:buClr>
                 <a:schemeClr val="accent2"/>
               </a:buClr>
-              <a:buSzPts val="1800"/>
+              <a:buSzPts val="2400"/>
               <a:buNone/>
               <a:defRPr/>
             </a:lvl8pPr>
@@ -1801,7 +1801,7 @@
               <a:buClr>
                 <a:schemeClr val="accent2"/>
               </a:buClr>
-              <a:buSzPts val="1800"/>
+              <a:buSzPts val="2400"/>
               <a:buNone/>
               <a:defRPr/>
             </a:lvl9pPr>
@@ -1819,8 +1819,8 @@
         </p:nvSpPr>
         <p:spPr>
           <a:xfrm>
-            <a:off x="2343150" y="4767263"/>
-            <a:ext cx="2171700" cy="273844"/>
+            <a:off x="3124122" y="6356192"/>
+            <a:ext cx="2895528" cy="365116"/>
           </a:xfrm>
           <a:prstGeom prst="rect">
             <a:avLst/>
@@ -1831,7 +1831,7 @@
           </a:ln>
         </p:spPr>
         <p:txBody>
-          <a:bodyPr anchorCtr="0" anchor="ctr" bIns="45700" lIns="91425" spcFirstLastPara="1" rIns="91425" wrap="square" tIns="45700">
+          <a:bodyPr anchorCtr="0" anchor="ctr" bIns="60932" lIns="121897" spcFirstLastPara="1" rIns="121897" wrap="square" tIns="60932">
             <a:noAutofit/>
           </a:bodyPr>
           <a:lstStyle>
@@ -1848,7 +1848,7 @@
               <a:buClr>
                 <a:srgbClr val="888888"/>
               </a:buClr>
-              <a:buSzPts val="1800"/>
+              <a:buSzPts val="2400"/>
               <a:buNone/>
               <a:defRPr/>
             </a:lvl1pPr>
@@ -1865,7 +1865,7 @@
               <a:buClr>
                 <a:schemeClr val="accent2"/>
               </a:buClr>
-              <a:buSzPts val="1800"/>
+              <a:buSzPts val="2400"/>
               <a:buNone/>
               <a:defRPr/>
             </a:lvl2pPr>
@@ -1882,7 +1882,7 @@
               <a:buClr>
                 <a:schemeClr val="accent2"/>
               </a:buClr>
-              <a:buSzPts val="1800"/>
+              <a:buSzPts val="2400"/>
               <a:buNone/>
               <a:defRPr/>
             </a:lvl3pPr>
@@ -1899,7 +1899,7 @@
               <a:buClr>
                 <a:schemeClr val="accent2"/>
               </a:buClr>
-              <a:buSzPts val="1800"/>
+              <a:buSzPts val="2400"/>
               <a:buNone/>
               <a:defRPr/>
             </a:lvl4pPr>
@@ -1916,7 +1916,7 @@
               <a:buClr>
                 <a:schemeClr val="accent2"/>
               </a:buClr>
-              <a:buSzPts val="1800"/>
+              <a:buSzPts val="2400"/>
               <a:buNone/>
               <a:defRPr/>
             </a:lvl5pPr>
@@ -1933,7 +1933,7 @@
               <a:buClr>
                 <a:schemeClr val="accent2"/>
               </a:buClr>
-              <a:buSzPts val="1800"/>
+              <a:buSzPts val="2400"/>
               <a:buNone/>
               <a:defRPr/>
             </a:lvl6pPr>
@@ -1950,7 +1950,7 @@
               <a:buClr>
                 <a:schemeClr val="accent2"/>
               </a:buClr>
-              <a:buSzPts val="1800"/>
+              <a:buSzPts val="2400"/>
               <a:buNone/>
               <a:defRPr/>
             </a:lvl7pPr>
@@ -1967,7 +1967,7 @@
               <a:buClr>
                 <a:schemeClr val="accent2"/>
               </a:buClr>
-              <a:buSzPts val="1800"/>
+              <a:buSzPts val="2400"/>
               <a:buNone/>
               <a:defRPr/>
             </a:lvl8pPr>
@@ -1984,7 +1984,7 @@
               <a:buClr>
                 <a:schemeClr val="accent2"/>
               </a:buClr>
-              <a:buSzPts val="1800"/>
+              <a:buSzPts val="2400"/>
               <a:buNone/>
               <a:defRPr/>
             </a:lvl9pPr>
@@ -2002,8 +2002,8 @@
         </p:nvSpPr>
         <p:spPr>
           <a:xfrm>
-            <a:off x="4914900" y="4767263"/>
-            <a:ext cx="1600200" cy="273844"/>
+            <a:off x="6553036" y="6356192"/>
+            <a:ext cx="2133547" cy="365116"/>
           </a:xfrm>
           <a:prstGeom prst="rect">
             <a:avLst/>
@@ -2014,7 +2014,7 @@
           </a:ln>
         </p:spPr>
         <p:txBody>
-          <a:bodyPr anchorCtr="0" anchor="ctr" bIns="45700" lIns="91425" spcFirstLastPara="1" rIns="91425" wrap="square" tIns="45700">
+          <a:bodyPr anchorCtr="0" anchor="ctr" bIns="60932" lIns="121897" spcFirstLastPara="1" rIns="121897" wrap="square" tIns="60932">
             <a:noAutofit/>
           </a:bodyPr>
           <a:lstStyle>
@@ -2031,7 +2031,7 @@
               <a:buClr>
                 <a:srgbClr val="888888"/>
               </a:buClr>
-              <a:buSzPts val="900"/>
+              <a:buSzPts val="1200"/>
               <a:buFont typeface="Calibri"/>
               <a:buNone/>
               <a:defRPr/>
@@ -2049,7 +2049,7 @@
               <a:buClr>
                 <a:srgbClr val="888888"/>
               </a:buClr>
-              <a:buSzPts val="900"/>
+              <a:buSzPts val="1200"/>
               <a:buFont typeface="Calibri"/>
               <a:buNone/>
               <a:defRPr/>
@@ -2067,7 +2067,7 @@
               <a:buClr>
                 <a:srgbClr val="888888"/>
               </a:buClr>
-              <a:buSzPts val="900"/>
+              <a:buSzPts val="1200"/>
               <a:buFont typeface="Calibri"/>
               <a:buNone/>
               <a:defRPr/>
@@ -2085,7 +2085,7 @@
               <a:buClr>
                 <a:srgbClr val="888888"/>
               </a:buClr>
-              <a:buSzPts val="900"/>
+              <a:buSzPts val="1200"/>
               <a:buFont typeface="Calibri"/>
               <a:buNone/>
               <a:defRPr/>
@@ -2103,7 +2103,7 @@
               <a:buClr>
                 <a:srgbClr val="888888"/>
               </a:buClr>
-              <a:buSzPts val="900"/>
+              <a:buSzPts val="1200"/>
               <a:buFont typeface="Calibri"/>
               <a:buNone/>
               <a:defRPr/>
@@ -2121,7 +2121,7 @@
               <a:buClr>
                 <a:srgbClr val="888888"/>
               </a:buClr>
-              <a:buSzPts val="900"/>
+              <a:buSzPts val="1200"/>
               <a:buFont typeface="Calibri"/>
               <a:buNone/>
               <a:defRPr/>
@@ -2139,7 +2139,7 @@
               <a:buClr>
                 <a:srgbClr val="888888"/>
               </a:buClr>
-              <a:buSzPts val="900"/>
+              <a:buSzPts val="1200"/>
               <a:buFont typeface="Calibri"/>
               <a:buNone/>
               <a:defRPr/>
@@ -2157,7 +2157,7 @@
               <a:buClr>
                 <a:srgbClr val="888888"/>
               </a:buClr>
-              <a:buSzPts val="900"/>
+              <a:buSzPts val="1200"/>
               <a:buFont typeface="Calibri"/>
               <a:buNone/>
               <a:defRPr/>
@@ -2175,7 +2175,7 @@
               <a:buClr>
                 <a:srgbClr val="888888"/>
               </a:buClr>
-              <a:buSzPts val="900"/>
+              <a:buSzPts val="1200"/>
               <a:buFont typeface="Calibri"/>
               <a:buNone/>
               <a:defRPr/>
@@ -2234,8 +2234,8 @@
         </p:nvSpPr>
         <p:spPr>
           <a:xfrm>
-            <a:off x="342900" y="205978"/>
-            <a:ext cx="6172200" cy="857250"/>
+            <a:off x="457189" y="274630"/>
+            <a:ext cx="8229394" cy="1142971"/>
           </a:xfrm>
           <a:prstGeom prst="rect">
             <a:avLst/>
@@ -2246,7 +2246,7 @@
           </a:ln>
         </p:spPr>
         <p:txBody>
-          <a:bodyPr anchorCtr="0" anchor="ctr" bIns="45700" lIns="91425" spcFirstLastPara="1" rIns="91425" wrap="square" tIns="45700">
+          <a:bodyPr anchorCtr="0" anchor="ctr" bIns="60932" lIns="121897" spcFirstLastPara="1" rIns="121897" wrap="square" tIns="60932">
             <a:normAutofit/>
           </a:bodyPr>
           <a:lstStyle>
@@ -2260,7 +2260,7 @@
               <a:buClr>
                 <a:schemeClr val="dk1"/>
               </a:buClr>
-              <a:buSzPts val="1800"/>
+              <a:buSzPts val="2400"/>
               <a:buNone/>
               <a:defRPr/>
             </a:lvl1pPr>
@@ -2271,7 +2271,7 @@
               <a:spcAft>
                 <a:spcPts val="0"/>
               </a:spcAft>
-              <a:buSzPts val="1400"/>
+              <a:buSzPts val="1867"/>
               <a:buNone/>
               <a:defRPr/>
             </a:lvl2pPr>
@@ -2282,7 +2282,7 @@
               <a:spcAft>
                 <a:spcPts val="0"/>
               </a:spcAft>
-              <a:buSzPts val="1400"/>
+              <a:buSzPts val="1867"/>
               <a:buNone/>
               <a:defRPr/>
             </a:lvl3pPr>
@@ -2293,7 +2293,7 @@
               <a:spcAft>
                 <a:spcPts val="0"/>
               </a:spcAft>
-              <a:buSzPts val="1400"/>
+              <a:buSzPts val="1867"/>
               <a:buNone/>
               <a:defRPr/>
             </a:lvl4pPr>
@@ -2304,7 +2304,7 @@
               <a:spcAft>
                 <a:spcPts val="0"/>
               </a:spcAft>
-              <a:buSzPts val="1400"/>
+              <a:buSzPts val="1867"/>
               <a:buNone/>
               <a:defRPr/>
             </a:lvl5pPr>
@@ -2315,7 +2315,7 @@
               <a:spcAft>
                 <a:spcPts val="0"/>
               </a:spcAft>
-              <a:buSzPts val="1400"/>
+              <a:buSzPts val="1867"/>
               <a:buNone/>
               <a:defRPr/>
             </a:lvl6pPr>
@@ -2326,7 +2326,7 @@
               <a:spcAft>
                 <a:spcPts val="0"/>
               </a:spcAft>
-              <a:buSzPts val="1400"/>
+              <a:buSzPts val="1867"/>
               <a:buNone/>
               <a:defRPr/>
             </a:lvl7pPr>
@@ -2337,7 +2337,7 @@
               <a:spcAft>
                 <a:spcPts val="0"/>
               </a:spcAft>
-              <a:buSzPts val="1400"/>
+              <a:buSzPts val="1867"/>
               <a:buNone/>
               <a:defRPr/>
             </a:lvl8pPr>
@@ -2348,7 +2348,7 @@
               <a:spcAft>
                 <a:spcPts val="0"/>
               </a:spcAft>
-              <a:buSzPts val="1400"/>
+              <a:buSzPts val="1867"/>
               <a:buNone/>
               <a:defRPr/>
             </a:lvl9pPr>
@@ -2366,8 +2366,8 @@
         </p:nvSpPr>
         <p:spPr>
           <a:xfrm rot="5400000">
-            <a:off x="1731764" y="-188713"/>
-            <a:ext cx="3394472" cy="6172200"/>
+            <a:off x="2308961" y="-251611"/>
+            <a:ext cx="4525849" cy="8229394"/>
           </a:xfrm>
           <a:prstGeom prst="rect">
             <a:avLst/>
@@ -2378,13 +2378,13 @@
           </a:ln>
         </p:spPr>
         <p:txBody>
-          <a:bodyPr anchorCtr="0" anchor="t" bIns="45700" lIns="91425" spcFirstLastPara="1" rIns="91425" wrap="square" tIns="45700">
+          <a:bodyPr anchorCtr="0" anchor="t" bIns="60932" lIns="121897" spcFirstLastPara="1" rIns="121897" wrap="square" tIns="60932">
             <a:normAutofit/>
           </a:bodyPr>
           <a:lstStyle>
             <a:lvl1pPr indent="-342900" lvl="0" marL="457200" algn="l">
               <a:spcBef>
-                <a:spcPts val="360"/>
+                <a:spcPts val="480"/>
               </a:spcBef>
               <a:spcAft>
                 <a:spcPts val="0"/>
@@ -2392,13 +2392,13 @@
               <a:buClr>
                 <a:schemeClr val="dk1"/>
               </a:buClr>
-              <a:buSzPts val="1800"/>
+              <a:buSzPts val="2400"/>
               <a:buChar char="•"/>
               <a:defRPr/>
             </a:lvl1pPr>
             <a:lvl2pPr indent="-342900" lvl="1" marL="914400" algn="l">
               <a:spcBef>
-                <a:spcPts val="360"/>
+                <a:spcPts val="480"/>
               </a:spcBef>
               <a:spcAft>
                 <a:spcPts val="0"/>
@@ -2406,13 +2406,13 @@
               <a:buClr>
                 <a:schemeClr val="dk1"/>
               </a:buClr>
-              <a:buSzPts val="1800"/>
+              <a:buSzPts val="2400"/>
               <a:buChar char="–"/>
               <a:defRPr/>
             </a:lvl2pPr>
             <a:lvl3pPr indent="-342900" lvl="2" marL="1371600" algn="l">
               <a:spcBef>
-                <a:spcPts val="360"/>
+                <a:spcPts val="480"/>
               </a:spcBef>
               <a:spcAft>
                 <a:spcPts val="0"/>
@@ -2420,13 +2420,13 @@
               <a:buClr>
                 <a:schemeClr val="dk1"/>
               </a:buClr>
-              <a:buSzPts val="1800"/>
+              <a:buSzPts val="2400"/>
               <a:buChar char="•"/>
               <a:defRPr/>
             </a:lvl3pPr>
             <a:lvl4pPr indent="-342900" lvl="3" marL="1828800" algn="l">
               <a:spcBef>
-                <a:spcPts val="360"/>
+                <a:spcPts val="480"/>
               </a:spcBef>
               <a:spcAft>
                 <a:spcPts val="0"/>
@@ -2434,13 +2434,13 @@
               <a:buClr>
                 <a:schemeClr val="dk1"/>
               </a:buClr>
-              <a:buSzPts val="1800"/>
+              <a:buSzPts val="2400"/>
               <a:buChar char="–"/>
               <a:defRPr/>
             </a:lvl4pPr>
             <a:lvl5pPr indent="-342900" lvl="4" marL="2286000" algn="l">
               <a:spcBef>
-                <a:spcPts val="360"/>
+                <a:spcPts val="480"/>
               </a:spcBef>
               <a:spcAft>
                 <a:spcPts val="0"/>
@@ -2448,13 +2448,13 @@
               <a:buClr>
                 <a:schemeClr val="dk1"/>
               </a:buClr>
-              <a:buSzPts val="1800"/>
+              <a:buSzPts val="2400"/>
               <a:buChar char="»"/>
               <a:defRPr/>
             </a:lvl5pPr>
             <a:lvl6pPr indent="-342900" lvl="5" marL="2743200" algn="l">
               <a:spcBef>
-                <a:spcPts val="360"/>
+                <a:spcPts val="480"/>
               </a:spcBef>
               <a:spcAft>
                 <a:spcPts val="0"/>
@@ -2462,13 +2462,13 @@
               <a:buClr>
                 <a:schemeClr val="dk1"/>
               </a:buClr>
-              <a:buSzPts val="1800"/>
+              <a:buSzPts val="2400"/>
               <a:buChar char="•"/>
               <a:defRPr/>
             </a:lvl6pPr>
             <a:lvl7pPr indent="-342900" lvl="6" marL="3200400" algn="l">
               <a:spcBef>
-                <a:spcPts val="360"/>
+                <a:spcPts val="480"/>
               </a:spcBef>
               <a:spcAft>
                 <a:spcPts val="0"/>
@@ -2476,13 +2476,13 @@
               <a:buClr>
                 <a:schemeClr val="dk1"/>
               </a:buClr>
-              <a:buSzPts val="1800"/>
+              <a:buSzPts val="2400"/>
               <a:buChar char="•"/>
               <a:defRPr/>
             </a:lvl7pPr>
             <a:lvl8pPr indent="-342900" lvl="7" marL="3657600" algn="l">
               <a:spcBef>
-                <a:spcPts val="360"/>
+                <a:spcPts val="480"/>
               </a:spcBef>
               <a:spcAft>
                 <a:spcPts val="0"/>
@@ -2490,13 +2490,13 @@
               <a:buClr>
                 <a:schemeClr val="dk1"/>
               </a:buClr>
-              <a:buSzPts val="1800"/>
+              <a:buSzPts val="2400"/>
               <a:buChar char="•"/>
               <a:defRPr/>
             </a:lvl8pPr>
             <a:lvl9pPr indent="-342900" lvl="8" marL="4114800" algn="l">
               <a:spcBef>
-                <a:spcPts val="360"/>
+                <a:spcPts val="480"/>
               </a:spcBef>
               <a:spcAft>
                 <a:spcPts val="0"/>
@@ -2504,7 +2504,7 @@
               <a:buClr>
                 <a:schemeClr val="dk1"/>
               </a:buClr>
-              <a:buSzPts val="1800"/>
+              <a:buSzPts val="2400"/>
               <a:buChar char="•"/>
               <a:defRPr/>
             </a:lvl9pPr>
@@ -2522,8 +2522,8 @@
         </p:nvSpPr>
         <p:spPr>
           <a:xfrm>
-            <a:off x="342900" y="4767263"/>
-            <a:ext cx="1600200" cy="273844"/>
+            <a:off x="457189" y="6356192"/>
+            <a:ext cx="2133547" cy="365116"/>
           </a:xfrm>
           <a:prstGeom prst="rect">
             <a:avLst/>
@@ -2534,7 +2534,7 @@
           </a:ln>
         </p:spPr>
         <p:txBody>
-          <a:bodyPr anchorCtr="0" anchor="ctr" bIns="45700" lIns="91425" spcFirstLastPara="1" rIns="91425" wrap="square" tIns="45700">
+          <a:bodyPr anchorCtr="0" anchor="ctr" bIns="60932" lIns="121897" spcFirstLastPara="1" rIns="121897" wrap="square" tIns="60932">
             <a:noAutofit/>
           </a:bodyPr>
           <a:lstStyle>
@@ -2551,7 +2551,7 @@
               <a:buClr>
                 <a:srgbClr val="888888"/>
               </a:buClr>
-              <a:buSzPts val="1800"/>
+              <a:buSzPts val="2400"/>
               <a:buNone/>
               <a:defRPr/>
             </a:lvl1pPr>
@@ -2568,7 +2568,7 @@
               <a:buClr>
                 <a:schemeClr val="accent2"/>
               </a:buClr>
-              <a:buSzPts val="1800"/>
+              <a:buSzPts val="2400"/>
               <a:buNone/>
               <a:defRPr/>
             </a:lvl2pPr>
@@ -2585,7 +2585,7 @@
               <a:buClr>
                 <a:schemeClr val="accent2"/>
               </a:buClr>
-              <a:buSzPts val="1800"/>
+              <a:buSzPts val="2400"/>
               <a:buNone/>
               <a:defRPr/>
             </a:lvl3pPr>
@@ -2602,7 +2602,7 @@
               <a:buClr>
                 <a:schemeClr val="accent2"/>
               </a:buClr>
-              <a:buSzPts val="1800"/>
+              <a:buSzPts val="2400"/>
               <a:buNone/>
               <a:defRPr/>
             </a:lvl4pPr>
@@ -2619,7 +2619,7 @@
               <a:buClr>
                 <a:schemeClr val="accent2"/>
               </a:buClr>
-              <a:buSzPts val="1800"/>
+              <a:buSzPts val="2400"/>
               <a:buNone/>
               <a:defRPr/>
             </a:lvl5pPr>
@@ -2636,7 +2636,7 @@
               <a:buClr>
                 <a:schemeClr val="accent2"/>
               </a:buClr>
-              <a:buSzPts val="1800"/>
+              <a:buSzPts val="2400"/>
               <a:buNone/>
               <a:defRPr/>
             </a:lvl6pPr>
@@ -2653,7 +2653,7 @@
               <a:buClr>
                 <a:schemeClr val="accent2"/>
               </a:buClr>
-              <a:buSzPts val="1800"/>
+              <a:buSzPts val="2400"/>
               <a:buNone/>
               <a:defRPr/>
             </a:lvl7pPr>
@@ -2670,7 +2670,7 @@
               <a:buClr>
                 <a:schemeClr val="accent2"/>
               </a:buClr>
-              <a:buSzPts val="1800"/>
+              <a:buSzPts val="2400"/>
               <a:buNone/>
               <a:defRPr/>
             </a:lvl8pPr>
@@ -2687,7 +2687,7 @@
               <a:buClr>
                 <a:schemeClr val="accent2"/>
               </a:buClr>
-              <a:buSzPts val="1800"/>
+              <a:buSzPts val="2400"/>
               <a:buNone/>
               <a:defRPr/>
             </a:lvl9pPr>
@@ -2705,8 +2705,8 @@
         </p:nvSpPr>
         <p:spPr>
           <a:xfrm>
-            <a:off x="2343150" y="4767263"/>
-            <a:ext cx="2171700" cy="273844"/>
+            <a:off x="3124122" y="6356192"/>
+            <a:ext cx="2895528" cy="365116"/>
           </a:xfrm>
           <a:prstGeom prst="rect">
             <a:avLst/>
@@ -2717,7 +2717,7 @@
           </a:ln>
         </p:spPr>
         <p:txBody>
-          <a:bodyPr anchorCtr="0" anchor="ctr" bIns="45700" lIns="91425" spcFirstLastPara="1" rIns="91425" wrap="square" tIns="45700">
+          <a:bodyPr anchorCtr="0" anchor="ctr" bIns="60932" lIns="121897" spcFirstLastPara="1" rIns="121897" wrap="square" tIns="60932">
             <a:noAutofit/>
           </a:bodyPr>
           <a:lstStyle>
@@ -2734,7 +2734,7 @@
               <a:buClr>
                 <a:srgbClr val="888888"/>
               </a:buClr>
-              <a:buSzPts val="1800"/>
+              <a:buSzPts val="2400"/>
               <a:buNone/>
               <a:defRPr/>
             </a:lvl1pPr>
@@ -2751,7 +2751,7 @@
               <a:buClr>
                 <a:schemeClr val="accent2"/>
               </a:buClr>
-              <a:buSzPts val="1800"/>
+              <a:buSzPts val="2400"/>
               <a:buNone/>
               <a:defRPr/>
             </a:lvl2pPr>
@@ -2768,7 +2768,7 @@
               <a:buClr>
                 <a:schemeClr val="accent2"/>
               </a:buClr>
-              <a:buSzPts val="1800"/>
+              <a:buSzPts val="2400"/>
               <a:buNone/>
               <a:defRPr/>
             </a:lvl3pPr>
@@ -2785,7 +2785,7 @@
               <a:buClr>
                 <a:schemeClr val="accent2"/>
               </a:buClr>
-              <a:buSzPts val="1800"/>
+              <a:buSzPts val="2400"/>
               <a:buNone/>
               <a:defRPr/>
             </a:lvl4pPr>
@@ -2802,7 +2802,7 @@
               <a:buClr>
                 <a:schemeClr val="accent2"/>
               </a:buClr>
-              <a:buSzPts val="1800"/>
+              <a:buSzPts val="2400"/>
               <a:buNone/>
               <a:defRPr/>
             </a:lvl5pPr>
@@ -2819,7 +2819,7 @@
               <a:buClr>
                 <a:schemeClr val="accent2"/>
               </a:buClr>
-              <a:buSzPts val="1800"/>
+              <a:buSzPts val="2400"/>
               <a:buNone/>
               <a:defRPr/>
             </a:lvl6pPr>
@@ -2836,7 +2836,7 @@
               <a:buClr>
                 <a:schemeClr val="accent2"/>
               </a:buClr>
-              <a:buSzPts val="1800"/>
+              <a:buSzPts val="2400"/>
               <a:buNone/>
               <a:defRPr/>
             </a:lvl7pPr>
@@ -2853,7 +2853,7 @@
               <a:buClr>
                 <a:schemeClr val="accent2"/>
               </a:buClr>
-              <a:buSzPts val="1800"/>
+              <a:buSzPts val="2400"/>
               <a:buNone/>
               <a:defRPr/>
             </a:lvl8pPr>
@@ -2870,7 +2870,7 @@
               <a:buClr>
                 <a:schemeClr val="accent2"/>
               </a:buClr>
-              <a:buSzPts val="1800"/>
+              <a:buSzPts val="2400"/>
               <a:buNone/>
               <a:defRPr/>
             </a:lvl9pPr>
@@ -2888,8 +2888,8 @@
         </p:nvSpPr>
         <p:spPr>
           <a:xfrm>
-            <a:off x="4914900" y="4767263"/>
-            <a:ext cx="1600200" cy="273844"/>
+            <a:off x="6553036" y="6356192"/>
+            <a:ext cx="2133547" cy="365116"/>
           </a:xfrm>
           <a:prstGeom prst="rect">
             <a:avLst/>
@@ -2900,7 +2900,7 @@
           </a:ln>
         </p:spPr>
         <p:txBody>
-          <a:bodyPr anchorCtr="0" anchor="ctr" bIns="45700" lIns="91425" spcFirstLastPara="1" rIns="91425" wrap="square" tIns="45700">
+          <a:bodyPr anchorCtr="0" anchor="ctr" bIns="60932" lIns="121897" spcFirstLastPara="1" rIns="121897" wrap="square" tIns="60932">
             <a:noAutofit/>
           </a:bodyPr>
           <a:lstStyle>
@@ -2917,7 +2917,7 @@
               <a:buClr>
                 <a:srgbClr val="888888"/>
               </a:buClr>
-              <a:buSzPts val="900"/>
+              <a:buSzPts val="1200"/>
               <a:buFont typeface="Calibri"/>
               <a:buNone/>
               <a:defRPr/>
@@ -2935,7 +2935,7 @@
               <a:buClr>
                 <a:srgbClr val="888888"/>
               </a:buClr>
-              <a:buSzPts val="900"/>
+              <a:buSzPts val="1200"/>
               <a:buFont typeface="Calibri"/>
               <a:buNone/>
               <a:defRPr/>
@@ -2953,7 +2953,7 @@
               <a:buClr>
                 <a:srgbClr val="888888"/>
               </a:buClr>
-              <a:buSzPts val="900"/>
+              <a:buSzPts val="1200"/>
               <a:buFont typeface="Calibri"/>
               <a:buNone/>
               <a:defRPr/>
@@ -2971,7 +2971,7 @@
               <a:buClr>
                 <a:srgbClr val="888888"/>
               </a:buClr>
-              <a:buSzPts val="900"/>
+              <a:buSzPts val="1200"/>
               <a:buFont typeface="Calibri"/>
               <a:buNone/>
               <a:defRPr/>
@@ -2989,7 +2989,7 @@
               <a:buClr>
                 <a:srgbClr val="888888"/>
               </a:buClr>
-              <a:buSzPts val="900"/>
+              <a:buSzPts val="1200"/>
               <a:buFont typeface="Calibri"/>
               <a:buNone/>
               <a:defRPr/>
@@ -3007,7 +3007,7 @@
               <a:buClr>
                 <a:srgbClr val="888888"/>
               </a:buClr>
-              <a:buSzPts val="900"/>
+              <a:buSzPts val="1200"/>
               <a:buFont typeface="Calibri"/>
               <a:buNone/>
               <a:defRPr/>
@@ -3025,7 +3025,7 @@
               <a:buClr>
                 <a:srgbClr val="888888"/>
               </a:buClr>
-              <a:buSzPts val="900"/>
+              <a:buSzPts val="1200"/>
               <a:buFont typeface="Calibri"/>
               <a:buNone/>
               <a:defRPr/>
@@ -3043,7 +3043,7 @@
               <a:buClr>
                 <a:srgbClr val="888888"/>
               </a:buClr>
-              <a:buSzPts val="900"/>
+              <a:buSzPts val="1200"/>
               <a:buFont typeface="Calibri"/>
               <a:buNone/>
               <a:defRPr/>
@@ -3061,7 +3061,7 @@
               <a:buClr>
                 <a:srgbClr val="888888"/>
               </a:buClr>
-              <a:buSzPts val="900"/>
+              <a:buSzPts val="1200"/>
               <a:buFont typeface="Calibri"/>
               <a:buNone/>
               <a:defRPr/>
@@ -3120,8 +3120,8 @@
         </p:nvSpPr>
         <p:spPr>
           <a:xfrm rot="5400000">
-            <a:off x="3549253" y="1628776"/>
-            <a:ext cx="4388644" cy="1543050"/>
+            <a:off x="4732219" y="2171647"/>
+            <a:ext cx="5851379" cy="2057349"/>
           </a:xfrm>
           <a:prstGeom prst="rect">
             <a:avLst/>
@@ -3132,7 +3132,7 @@
           </a:ln>
         </p:spPr>
         <p:txBody>
-          <a:bodyPr anchorCtr="0" anchor="ctr" bIns="45700" lIns="91425" spcFirstLastPara="1" rIns="91425" wrap="square" tIns="45700">
+          <a:bodyPr anchorCtr="0" anchor="ctr" bIns="60932" lIns="121897" spcFirstLastPara="1" rIns="121897" wrap="square" tIns="60932">
             <a:normAutofit/>
           </a:bodyPr>
           <a:lstStyle>
@@ -3146,7 +3146,7 @@
               <a:buClr>
                 <a:schemeClr val="dk1"/>
               </a:buClr>
-              <a:buSzPts val="1800"/>
+              <a:buSzPts val="2400"/>
               <a:buNone/>
               <a:defRPr/>
             </a:lvl1pPr>
@@ -3157,7 +3157,7 @@
               <a:spcAft>
                 <a:spcPts val="0"/>
               </a:spcAft>
-              <a:buSzPts val="1400"/>
+              <a:buSzPts val="1867"/>
               <a:buNone/>
               <a:defRPr/>
             </a:lvl2pPr>
@@ -3168,7 +3168,7 @@
               <a:spcAft>
                 <a:spcPts val="0"/>
               </a:spcAft>
-              <a:buSzPts val="1400"/>
+              <a:buSzPts val="1867"/>
               <a:buNone/>
               <a:defRPr/>
             </a:lvl3pPr>
@@ -3179,7 +3179,7 @@
               <a:spcAft>
                 <a:spcPts val="0"/>
               </a:spcAft>
-              <a:buSzPts val="1400"/>
+              <a:buSzPts val="1867"/>
               <a:buNone/>
               <a:defRPr/>
             </a:lvl4pPr>
@@ -3190,7 +3190,7 @@
               <a:spcAft>
                 <a:spcPts val="0"/>
               </a:spcAft>
-              <a:buSzPts val="1400"/>
+              <a:buSzPts val="1867"/>
               <a:buNone/>
               <a:defRPr/>
             </a:lvl5pPr>
@@ -3201,7 +3201,7 @@
               <a:spcAft>
                 <a:spcPts val="0"/>
               </a:spcAft>
-              <a:buSzPts val="1400"/>
+              <a:buSzPts val="1867"/>
               <a:buNone/>
               <a:defRPr/>
             </a:lvl6pPr>
@@ -3212,7 +3212,7 @@
               <a:spcAft>
                 <a:spcPts val="0"/>
               </a:spcAft>
-              <a:buSzPts val="1400"/>
+              <a:buSzPts val="1867"/>
               <a:buNone/>
               <a:defRPr/>
             </a:lvl7pPr>
@@ -3223,7 +3223,7 @@
               <a:spcAft>
                 <a:spcPts val="0"/>
               </a:spcAft>
-              <a:buSzPts val="1400"/>
+              <a:buSzPts val="1867"/>
               <a:buNone/>
               <a:defRPr/>
             </a:lvl8pPr>
@@ -3234,7 +3234,7 @@
               <a:spcAft>
                 <a:spcPts val="0"/>
               </a:spcAft>
-              <a:buSzPts val="1400"/>
+              <a:buSzPts val="1867"/>
               <a:buNone/>
               <a:defRPr/>
             </a:lvl9pPr>
@@ -3252,8 +3252,8 @@
         </p:nvSpPr>
         <p:spPr>
           <a:xfrm rot="5400000">
-            <a:off x="406003" y="142876"/>
-            <a:ext cx="4388644" cy="4514850"/>
+            <a:off x="541324" y="190497"/>
+            <a:ext cx="5851379" cy="6019649"/>
           </a:xfrm>
           <a:prstGeom prst="rect">
             <a:avLst/>
@@ -3264,13 +3264,13 @@
           </a:ln>
         </p:spPr>
         <p:txBody>
-          <a:bodyPr anchorCtr="0" anchor="t" bIns="45700" lIns="91425" spcFirstLastPara="1" rIns="91425" wrap="square" tIns="45700">
+          <a:bodyPr anchorCtr="0" anchor="t" bIns="60932" lIns="121897" spcFirstLastPara="1" rIns="121897" wrap="square" tIns="60932">
             <a:normAutofit/>
           </a:bodyPr>
           <a:lstStyle>
             <a:lvl1pPr indent="-342900" lvl="0" marL="457200" algn="l">
               <a:spcBef>
-                <a:spcPts val="360"/>
+                <a:spcPts val="480"/>
               </a:spcBef>
               <a:spcAft>
                 <a:spcPts val="0"/>
@@ -3278,13 +3278,13 @@
               <a:buClr>
                 <a:schemeClr val="dk1"/>
               </a:buClr>
-              <a:buSzPts val="1800"/>
+              <a:buSzPts val="2400"/>
               <a:buChar char="•"/>
               <a:defRPr/>
             </a:lvl1pPr>
             <a:lvl2pPr indent="-342900" lvl="1" marL="914400" algn="l">
               <a:spcBef>
-                <a:spcPts val="360"/>
+                <a:spcPts val="480"/>
               </a:spcBef>
               <a:spcAft>
                 <a:spcPts val="0"/>
@@ -3292,13 +3292,13 @@
               <a:buClr>
                 <a:schemeClr val="dk1"/>
               </a:buClr>
-              <a:buSzPts val="1800"/>
+              <a:buSzPts val="2400"/>
               <a:buChar char="–"/>
               <a:defRPr/>
             </a:lvl2pPr>
             <a:lvl3pPr indent="-342900" lvl="2" marL="1371600" algn="l">
               <a:spcBef>
-                <a:spcPts val="360"/>
+                <a:spcPts val="480"/>
               </a:spcBef>
               <a:spcAft>
                 <a:spcPts val="0"/>
@@ -3306,13 +3306,13 @@
               <a:buClr>
                 <a:schemeClr val="dk1"/>
               </a:buClr>
-              <a:buSzPts val="1800"/>
+              <a:buSzPts val="2400"/>
               <a:buChar char="•"/>
               <a:defRPr/>
             </a:lvl3pPr>
             <a:lvl4pPr indent="-342900" lvl="3" marL="1828800" algn="l">
               <a:spcBef>
-                <a:spcPts val="360"/>
+                <a:spcPts val="480"/>
               </a:spcBef>
               <a:spcAft>
                 <a:spcPts val="0"/>
@@ -3320,13 +3320,13 @@
               <a:buClr>
                 <a:schemeClr val="dk1"/>
               </a:buClr>
-              <a:buSzPts val="1800"/>
+              <a:buSzPts val="2400"/>
               <a:buChar char="–"/>
               <a:defRPr/>
             </a:lvl4pPr>
             <a:lvl5pPr indent="-342900" lvl="4" marL="2286000" algn="l">
               <a:spcBef>
-                <a:spcPts val="360"/>
+                <a:spcPts val="480"/>
               </a:spcBef>
               <a:spcAft>
                 <a:spcPts val="0"/>
@@ -3334,13 +3334,13 @@
               <a:buClr>
                 <a:schemeClr val="dk1"/>
               </a:buClr>
-              <a:buSzPts val="1800"/>
+              <a:buSzPts val="2400"/>
               <a:buChar char="»"/>
               <a:defRPr/>
             </a:lvl5pPr>
             <a:lvl6pPr indent="-342900" lvl="5" marL="2743200" algn="l">
               <a:spcBef>
-                <a:spcPts val="360"/>
+                <a:spcPts val="480"/>
               </a:spcBef>
               <a:spcAft>
                 <a:spcPts val="0"/>
@@ -3348,13 +3348,13 @@
               <a:buClr>
                 <a:schemeClr val="dk1"/>
               </a:buClr>
-              <a:buSzPts val="1800"/>
+              <a:buSzPts val="2400"/>
               <a:buChar char="•"/>
               <a:defRPr/>
             </a:lvl6pPr>
             <a:lvl7pPr indent="-342900" lvl="6" marL="3200400" algn="l">
               <a:spcBef>
-                <a:spcPts val="360"/>
+                <a:spcPts val="480"/>
               </a:spcBef>
               <a:spcAft>
                 <a:spcPts val="0"/>
@@ -3362,13 +3362,13 @@
               <a:buClr>
                 <a:schemeClr val="dk1"/>
               </a:buClr>
-              <a:buSzPts val="1800"/>
+              <a:buSzPts val="2400"/>
               <a:buChar char="•"/>
               <a:defRPr/>
             </a:lvl7pPr>
             <a:lvl8pPr indent="-342900" lvl="7" marL="3657600" algn="l">
               <a:spcBef>
-                <a:spcPts val="360"/>
+                <a:spcPts val="480"/>
               </a:spcBef>
               <a:spcAft>
                 <a:spcPts val="0"/>
@@ -3376,13 +3376,13 @@
               <a:buClr>
                 <a:schemeClr val="dk1"/>
               </a:buClr>
-              <a:buSzPts val="1800"/>
+              <a:buSzPts val="2400"/>
               <a:buChar char="•"/>
               <a:defRPr/>
             </a:lvl8pPr>
             <a:lvl9pPr indent="-342900" lvl="8" marL="4114800" algn="l">
               <a:spcBef>
-                <a:spcPts val="360"/>
+                <a:spcPts val="480"/>
               </a:spcBef>
               <a:spcAft>
                 <a:spcPts val="0"/>
@@ -3390,7 +3390,7 @@
               <a:buClr>
                 <a:schemeClr val="dk1"/>
               </a:buClr>
-              <a:buSzPts val="1800"/>
+              <a:buSzPts val="2400"/>
               <a:buChar char="•"/>
               <a:defRPr/>
             </a:lvl9pPr>
@@ -3408,8 +3408,8 @@
         </p:nvSpPr>
         <p:spPr>
           <a:xfrm>
-            <a:off x="342900" y="4767263"/>
-            <a:ext cx="1600200" cy="273844"/>
+            <a:off x="457189" y="6356192"/>
+            <a:ext cx="2133547" cy="365116"/>
           </a:xfrm>
           <a:prstGeom prst="rect">
             <a:avLst/>
@@ -3420,7 +3420,7 @@
           </a:ln>
         </p:spPr>
         <p:txBody>
-          <a:bodyPr anchorCtr="0" anchor="ctr" bIns="45700" lIns="91425" spcFirstLastPara="1" rIns="91425" wrap="square" tIns="45700">
+          <a:bodyPr anchorCtr="0" anchor="ctr" bIns="60932" lIns="121897" spcFirstLastPara="1" rIns="121897" wrap="square" tIns="60932">
             <a:noAutofit/>
           </a:bodyPr>
           <a:lstStyle>
@@ -3437,7 +3437,7 @@
               <a:buClr>
                 <a:srgbClr val="888888"/>
               </a:buClr>
-              <a:buSzPts val="1800"/>
+              <a:buSzPts val="2400"/>
               <a:buNone/>
               <a:defRPr/>
             </a:lvl1pPr>
@@ -3454,7 +3454,7 @@
               <a:buClr>
                 <a:schemeClr val="accent2"/>
               </a:buClr>
-              <a:buSzPts val="1800"/>
+              <a:buSzPts val="2400"/>
               <a:buNone/>
               <a:defRPr/>
             </a:lvl2pPr>
@@ -3471,7 +3471,7 @@
               <a:buClr>
                 <a:schemeClr val="accent2"/>
               </a:buClr>
-              <a:buSzPts val="1800"/>
+              <a:buSzPts val="2400"/>
               <a:buNone/>
               <a:defRPr/>
             </a:lvl3pPr>
@@ -3488,7 +3488,7 @@
               <a:buClr>
                 <a:schemeClr val="accent2"/>
               </a:buClr>
-              <a:buSzPts val="1800"/>
+              <a:buSzPts val="2400"/>
               <a:buNone/>
               <a:defRPr/>
             </a:lvl4pPr>
@@ -3505,7 +3505,7 @@
               <a:buClr>
                 <a:schemeClr val="accent2"/>
               </a:buClr>
-              <a:buSzPts val="1800"/>
+              <a:buSzPts val="2400"/>
               <a:buNone/>
               <a:defRPr/>
             </a:lvl5pPr>
@@ -3522,7 +3522,7 @@
               <a:buClr>
                 <a:schemeClr val="accent2"/>
               </a:buClr>
-              <a:buSzPts val="1800"/>
+              <a:buSzPts val="2400"/>
               <a:buNone/>
               <a:defRPr/>
             </a:lvl6pPr>
@@ -3539,7 +3539,7 @@
               <a:buClr>
                 <a:schemeClr val="accent2"/>
               </a:buClr>
-              <a:buSzPts val="1800"/>
+              <a:buSzPts val="2400"/>
               <a:buNone/>
               <a:defRPr/>
             </a:lvl7pPr>
@@ -3556,7 +3556,7 @@
               <a:buClr>
                 <a:schemeClr val="accent2"/>
               </a:buClr>
-              <a:buSzPts val="1800"/>
+              <a:buSzPts val="2400"/>
               <a:buNone/>
               <a:defRPr/>
             </a:lvl8pPr>
@@ -3573,7 +3573,7 @@
               <a:buClr>
                 <a:schemeClr val="accent2"/>
               </a:buClr>
-              <a:buSzPts val="1800"/>
+              <a:buSzPts val="2400"/>
               <a:buNone/>
               <a:defRPr/>
             </a:lvl9pPr>
@@ -3591,8 +3591,8 @@
         </p:nvSpPr>
         <p:spPr>
           <a:xfrm>
-            <a:off x="2343150" y="4767263"/>
-            <a:ext cx="2171700" cy="273844"/>
+            <a:off x="3124122" y="6356192"/>
+            <a:ext cx="2895528" cy="365116"/>
           </a:xfrm>
           <a:prstGeom prst="rect">
             <a:avLst/>
@@ -3603,7 +3603,7 @@
           </a:ln>
         </p:spPr>
         <p:txBody>
-          <a:bodyPr anchorCtr="0" anchor="ctr" bIns="45700" lIns="91425" spcFirstLastPara="1" rIns="91425" wrap="square" tIns="45700">
+          <a:bodyPr anchorCtr="0" anchor="ctr" bIns="60932" lIns="121897" spcFirstLastPara="1" rIns="121897" wrap="square" tIns="60932">
             <a:noAutofit/>
           </a:bodyPr>
           <a:lstStyle>
@@ -3620,7 +3620,7 @@
               <a:buClr>
                 <a:srgbClr val="888888"/>
               </a:buClr>
-              <a:buSzPts val="1800"/>
+              <a:buSzPts val="2400"/>
               <a:buNone/>
               <a:defRPr/>
             </a:lvl1pPr>
@@ -3637,7 +3637,7 @@
               <a:buClr>
                 <a:schemeClr val="accent2"/>
               </a:buClr>
-              <a:buSzPts val="1800"/>
+              <a:buSzPts val="2400"/>
               <a:buNone/>
               <a:defRPr/>
             </a:lvl2pPr>
@@ -3654,7 +3654,7 @@
               <a:buClr>
                 <a:schemeClr val="accent2"/>
               </a:buClr>
-              <a:buSzPts val="1800"/>
+              <a:buSzPts val="2400"/>
               <a:buNone/>
               <a:defRPr/>
             </a:lvl3pPr>
@@ -3671,7 +3671,7 @@
               <a:buClr>
                 <a:schemeClr val="accent2"/>
               </a:buClr>
-              <a:buSzPts val="1800"/>
+              <a:buSzPts val="2400"/>
               <a:buNone/>
               <a:defRPr/>
             </a:lvl4pPr>
@@ -3688,7 +3688,7 @@
               <a:buClr>
                 <a:schemeClr val="accent2"/>
               </a:buClr>
-              <a:buSzPts val="1800"/>
+              <a:buSzPts val="2400"/>
               <a:buNone/>
               <a:defRPr/>
             </a:lvl5pPr>
@@ -3705,7 +3705,7 @@
               <a:buClr>
                 <a:schemeClr val="accent2"/>
               </a:buClr>
-              <a:buSzPts val="1800"/>
+              <a:buSzPts val="2400"/>
               <a:buNone/>
               <a:defRPr/>
             </a:lvl6pPr>
@@ -3722,7 +3722,7 @@
               <a:buClr>
                 <a:schemeClr val="accent2"/>
               </a:buClr>
-              <a:buSzPts val="1800"/>
+              <a:buSzPts val="2400"/>
               <a:buNone/>
               <a:defRPr/>
             </a:lvl7pPr>
@@ -3739,7 +3739,7 @@
               <a:buClr>
                 <a:schemeClr val="accent2"/>
               </a:buClr>
-              <a:buSzPts val="1800"/>
+              <a:buSzPts val="2400"/>
               <a:buNone/>
               <a:defRPr/>
             </a:lvl8pPr>
@@ -3756,7 +3756,7 @@
               <a:buClr>
                 <a:schemeClr val="accent2"/>
               </a:buClr>
-              <a:buSzPts val="1800"/>
+              <a:buSzPts val="2400"/>
               <a:buNone/>
               <a:defRPr/>
             </a:lvl9pPr>
@@ -3774,8 +3774,8 @@
         </p:nvSpPr>
         <p:spPr>
           <a:xfrm>
-            <a:off x="4914900" y="4767263"/>
-            <a:ext cx="1600200" cy="273844"/>
+            <a:off x="6553036" y="6356192"/>
+            <a:ext cx="2133547" cy="365116"/>
           </a:xfrm>
           <a:prstGeom prst="rect">
             <a:avLst/>
@@ -3786,7 +3786,7 @@
           </a:ln>
         </p:spPr>
         <p:txBody>
-          <a:bodyPr anchorCtr="0" anchor="ctr" bIns="45700" lIns="91425" spcFirstLastPara="1" rIns="91425" wrap="square" tIns="45700">
+          <a:bodyPr anchorCtr="0" anchor="ctr" bIns="60932" lIns="121897" spcFirstLastPara="1" rIns="121897" wrap="square" tIns="60932">
             <a:noAutofit/>
           </a:bodyPr>
           <a:lstStyle>
@@ -3803,7 +3803,7 @@
               <a:buClr>
                 <a:srgbClr val="888888"/>
               </a:buClr>
-              <a:buSzPts val="900"/>
+              <a:buSzPts val="1200"/>
               <a:buFont typeface="Calibri"/>
               <a:buNone/>
               <a:defRPr/>
@@ -3821,7 +3821,7 @@
               <a:buClr>
                 <a:srgbClr val="888888"/>
               </a:buClr>
-              <a:buSzPts val="900"/>
+              <a:buSzPts val="1200"/>
               <a:buFont typeface="Calibri"/>
               <a:buNone/>
               <a:defRPr/>
@@ -3839,7 +3839,7 @@
               <a:buClr>
                 <a:srgbClr val="888888"/>
               </a:buClr>
-              <a:buSzPts val="900"/>
+              <a:buSzPts val="1200"/>
               <a:buFont typeface="Calibri"/>
               <a:buNone/>
               <a:defRPr/>
@@ -3857,7 +3857,7 @@
               <a:buClr>
                 <a:srgbClr val="888888"/>
               </a:buClr>
-              <a:buSzPts val="900"/>
+              <a:buSzPts val="1200"/>
               <a:buFont typeface="Calibri"/>
               <a:buNone/>
               <a:defRPr/>
@@ -3875,7 +3875,7 @@
               <a:buClr>
                 <a:srgbClr val="888888"/>
               </a:buClr>
-              <a:buSzPts val="900"/>
+              <a:buSzPts val="1200"/>
               <a:buFont typeface="Calibri"/>
               <a:buNone/>
               <a:defRPr/>
@@ -3893,7 +3893,7 @@
               <a:buClr>
                 <a:srgbClr val="888888"/>
               </a:buClr>
-              <a:buSzPts val="900"/>
+              <a:buSzPts val="1200"/>
               <a:buFont typeface="Calibri"/>
               <a:buNone/>
               <a:defRPr/>
@@ -3911,7 +3911,7 @@
               <a:buClr>
                 <a:srgbClr val="888888"/>
               </a:buClr>
-              <a:buSzPts val="900"/>
+              <a:buSzPts val="1200"/>
               <a:buFont typeface="Calibri"/>
               <a:buNone/>
               <a:defRPr/>
@@ -3929,7 +3929,7 @@
               <a:buClr>
                 <a:srgbClr val="888888"/>
               </a:buClr>
-              <a:buSzPts val="900"/>
+              <a:buSzPts val="1200"/>
               <a:buFont typeface="Calibri"/>
               <a:buNone/>
               <a:defRPr/>
@@ -3947,7 +3947,7 @@
               <a:buClr>
                 <a:srgbClr val="888888"/>
               </a:buClr>
-              <a:buSzPts val="900"/>
+              <a:buSzPts val="1200"/>
               <a:buFont typeface="Calibri"/>
               <a:buNone/>
               <a:defRPr/>
@@ -4038,8 +4038,8 @@
         </p:nvSpPr>
         <p:spPr>
           <a:xfrm>
-            <a:off x="514350" y="1597819"/>
-            <a:ext cx="5829300" cy="1102519"/>
+            <a:off x="685783" y="2130372"/>
+            <a:ext cx="7772206" cy="1469989"/>
           </a:xfrm>
           <a:prstGeom prst="rect">
             <a:avLst/>
@@ -4050,7 +4050,7 @@
           </a:ln>
         </p:spPr>
         <p:txBody>
-          <a:bodyPr anchorCtr="0" anchor="ctr" bIns="45700" lIns="91425" spcFirstLastPara="1" rIns="91425" wrap="square" tIns="45700">
+          <a:bodyPr anchorCtr="0" anchor="ctr" bIns="60932" lIns="121897" spcFirstLastPara="1" rIns="121897" wrap="square" tIns="60932">
             <a:normAutofit/>
           </a:bodyPr>
           <a:lstStyle>
@@ -4064,7 +4064,7 @@
               <a:buClr>
                 <a:schemeClr val="dk1"/>
               </a:buClr>
-              <a:buSzPts val="1800"/>
+              <a:buSzPts val="2400"/>
               <a:buNone/>
               <a:defRPr/>
             </a:lvl1pPr>
@@ -4075,7 +4075,7 @@
               <a:spcAft>
                 <a:spcPts val="0"/>
               </a:spcAft>
-              <a:buSzPts val="1400"/>
+              <a:buSzPts val="1867"/>
               <a:buNone/>
               <a:defRPr/>
             </a:lvl2pPr>
@@ -4086,7 +4086,7 @@
               <a:spcAft>
                 <a:spcPts val="0"/>
               </a:spcAft>
-              <a:buSzPts val="1400"/>
+              <a:buSzPts val="1867"/>
               <a:buNone/>
               <a:defRPr/>
             </a:lvl3pPr>
@@ -4097,7 +4097,7 @@
               <a:spcAft>
                 <a:spcPts val="0"/>
               </a:spcAft>
-              <a:buSzPts val="1400"/>
+              <a:buSzPts val="1867"/>
               <a:buNone/>
               <a:defRPr/>
             </a:lvl4pPr>
@@ -4108,7 +4108,7 @@
               <a:spcAft>
                 <a:spcPts val="0"/>
               </a:spcAft>
-              <a:buSzPts val="1400"/>
+              <a:buSzPts val="1867"/>
               <a:buNone/>
               <a:defRPr/>
             </a:lvl5pPr>
@@ -4119,7 +4119,7 @@
               <a:spcAft>
                 <a:spcPts val="0"/>
               </a:spcAft>
-              <a:buSzPts val="1400"/>
+              <a:buSzPts val="1867"/>
               <a:buNone/>
               <a:defRPr/>
             </a:lvl6pPr>
@@ -4130,7 +4130,7 @@
               <a:spcAft>
                 <a:spcPts val="0"/>
               </a:spcAft>
-              <a:buSzPts val="1400"/>
+              <a:buSzPts val="1867"/>
               <a:buNone/>
               <a:defRPr/>
             </a:lvl7pPr>
@@ -4141,7 +4141,7 @@
               <a:spcAft>
                 <a:spcPts val="0"/>
               </a:spcAft>
-              <a:buSzPts val="1400"/>
+              <a:buSzPts val="1867"/>
               <a:buNone/>
               <a:defRPr/>
             </a:lvl8pPr>
@@ -4152,7 +4152,7 @@
               <a:spcAft>
                 <a:spcPts val="0"/>
               </a:spcAft>
-              <a:buSzPts val="1400"/>
+              <a:buSzPts val="1867"/>
               <a:buNone/>
               <a:defRPr/>
             </a:lvl9pPr>
@@ -4170,8 +4170,8 @@
         </p:nvSpPr>
         <p:spPr>
           <a:xfrm>
-            <a:off x="1028700" y="2914650"/>
-            <a:ext cx="4800600" cy="1314450"/>
+            <a:off x="1371566" y="3886103"/>
+            <a:ext cx="6400640" cy="1752556"/>
           </a:xfrm>
           <a:prstGeom prst="rect">
             <a:avLst/>
@@ -4182,13 +4182,13 @@
           </a:ln>
         </p:spPr>
         <p:txBody>
-          <a:bodyPr anchorCtr="0" anchor="t" bIns="45700" lIns="91425" spcFirstLastPara="1" rIns="91425" wrap="square" tIns="45700">
+          <a:bodyPr anchorCtr="0" anchor="t" bIns="60932" lIns="121897" spcFirstLastPara="1" rIns="121897" wrap="square" tIns="60932">
             <a:normAutofit/>
           </a:bodyPr>
           <a:lstStyle>
             <a:lvl1pPr lvl="0" algn="ctr">
               <a:spcBef>
-                <a:spcPts val="480"/>
+                <a:spcPts val="640"/>
               </a:spcBef>
               <a:spcAft>
                 <a:spcPts val="0"/>
@@ -4196,7 +4196,7 @@
               <a:buClr>
                 <a:srgbClr val="888888"/>
               </a:buClr>
-              <a:buSzPts val="2400"/>
+              <a:buSzPts val="3200"/>
               <a:buNone/>
               <a:defRPr>
                 <a:solidFill>
@@ -4206,7 +4206,7 @@
             </a:lvl1pPr>
             <a:lvl2pPr lvl="1" algn="ctr">
               <a:spcBef>
-                <a:spcPts val="420"/>
+                <a:spcPts val="560"/>
               </a:spcBef>
               <a:spcAft>
                 <a:spcPts val="0"/>
@@ -4214,7 +4214,7 @@
               <a:buClr>
                 <a:srgbClr val="888888"/>
               </a:buClr>
-              <a:buSzPts val="2100"/>
+              <a:buSzPts val="2800"/>
               <a:buNone/>
               <a:defRPr>
                 <a:solidFill>
@@ -4224,7 +4224,7 @@
             </a:lvl2pPr>
             <a:lvl3pPr lvl="2" algn="ctr">
               <a:spcBef>
-                <a:spcPts val="360"/>
+                <a:spcPts val="480"/>
               </a:spcBef>
               <a:spcAft>
                 <a:spcPts val="0"/>
@@ -4232,7 +4232,7 @@
               <a:buClr>
                 <a:srgbClr val="888888"/>
               </a:buClr>
-              <a:buSzPts val="1800"/>
+              <a:buSzPts val="2400"/>
               <a:buNone/>
               <a:defRPr>
                 <a:solidFill>
@@ -4242,7 +4242,7 @@
             </a:lvl3pPr>
             <a:lvl4pPr lvl="3" algn="ctr">
               <a:spcBef>
-                <a:spcPts val="300"/>
+                <a:spcPts val="400"/>
               </a:spcBef>
               <a:spcAft>
                 <a:spcPts val="0"/>
@@ -4250,7 +4250,7 @@
               <a:buClr>
                 <a:srgbClr val="888888"/>
               </a:buClr>
-              <a:buSzPts val="1500"/>
+              <a:buSzPts val="2000"/>
               <a:buNone/>
               <a:defRPr>
                 <a:solidFill>
@@ -4260,7 +4260,7 @@
             </a:lvl4pPr>
             <a:lvl5pPr lvl="4" algn="ctr">
               <a:spcBef>
-                <a:spcPts val="300"/>
+                <a:spcPts val="400"/>
               </a:spcBef>
               <a:spcAft>
                 <a:spcPts val="0"/>
@@ -4268,7 +4268,7 @@
               <a:buClr>
                 <a:srgbClr val="888888"/>
               </a:buClr>
-              <a:buSzPts val="1500"/>
+              <a:buSzPts val="2000"/>
               <a:buNone/>
               <a:defRPr>
                 <a:solidFill>
@@ -4278,7 +4278,7 @@
             </a:lvl5pPr>
             <a:lvl6pPr lvl="5" algn="ctr">
               <a:spcBef>
-                <a:spcPts val="300"/>
+                <a:spcPts val="400"/>
               </a:spcBef>
               <a:spcAft>
                 <a:spcPts val="0"/>
@@ -4286,7 +4286,7 @@
               <a:buClr>
                 <a:srgbClr val="888888"/>
               </a:buClr>
-              <a:buSzPts val="1500"/>
+              <a:buSzPts val="2000"/>
               <a:buNone/>
               <a:defRPr>
                 <a:solidFill>
@@ -4296,7 +4296,7 @@
             </a:lvl6pPr>
             <a:lvl7pPr lvl="6" algn="ctr">
               <a:spcBef>
-                <a:spcPts val="300"/>
+                <a:spcPts val="400"/>
               </a:spcBef>
               <a:spcAft>
                 <a:spcPts val="0"/>
@@ -4304,7 +4304,7 @@
               <a:buClr>
                 <a:srgbClr val="888888"/>
               </a:buClr>
-              <a:buSzPts val="1500"/>
+              <a:buSzPts val="2000"/>
               <a:buNone/>
               <a:defRPr>
                 <a:solidFill>
@@ -4314,7 +4314,7 @@
             </a:lvl7pPr>
             <a:lvl8pPr lvl="7" algn="ctr">
               <a:spcBef>
-                <a:spcPts val="300"/>
+                <a:spcPts val="400"/>
               </a:spcBef>
               <a:spcAft>
                 <a:spcPts val="0"/>
@@ -4322,7 +4322,7 @@
               <a:buClr>
                 <a:srgbClr val="888888"/>
               </a:buClr>
-              <a:buSzPts val="1500"/>
+              <a:buSzPts val="2000"/>
               <a:buNone/>
               <a:defRPr>
                 <a:solidFill>
@@ -4332,7 +4332,7 @@
             </a:lvl8pPr>
             <a:lvl9pPr lvl="8" algn="ctr">
               <a:spcBef>
-                <a:spcPts val="300"/>
+                <a:spcPts val="400"/>
               </a:spcBef>
               <a:spcAft>
                 <a:spcPts val="0"/>
@@ -4340,7 +4340,7 @@
               <a:buClr>
                 <a:srgbClr val="888888"/>
               </a:buClr>
-              <a:buSzPts val="1500"/>
+              <a:buSzPts val="2000"/>
               <a:buNone/>
               <a:defRPr>
                 <a:solidFill>
@@ -4362,8 +4362,8 @@
         </p:nvSpPr>
         <p:spPr>
           <a:xfrm>
-            <a:off x="342900" y="4767263"/>
-            <a:ext cx="1600200" cy="273844"/>
+            <a:off x="457189" y="6356192"/>
+            <a:ext cx="2133547" cy="365116"/>
           </a:xfrm>
           <a:prstGeom prst="rect">
             <a:avLst/>
@@ -4374,7 +4374,7 @@
           </a:ln>
         </p:spPr>
         <p:txBody>
-          <a:bodyPr anchorCtr="0" anchor="ctr" bIns="45700" lIns="91425" spcFirstLastPara="1" rIns="91425" wrap="square" tIns="45700">
+          <a:bodyPr anchorCtr="0" anchor="ctr" bIns="60932" lIns="121897" spcFirstLastPara="1" rIns="121897" wrap="square" tIns="60932">
             <a:noAutofit/>
           </a:bodyPr>
           <a:lstStyle>
@@ -4391,7 +4391,7 @@
               <a:buClr>
                 <a:srgbClr val="888888"/>
               </a:buClr>
-              <a:buSzPts val="1800"/>
+              <a:buSzPts val="2400"/>
               <a:buNone/>
               <a:defRPr/>
             </a:lvl1pPr>
@@ -4408,7 +4408,7 @@
               <a:buClr>
                 <a:schemeClr val="accent2"/>
               </a:buClr>
-              <a:buSzPts val="1800"/>
+              <a:buSzPts val="2400"/>
               <a:buNone/>
               <a:defRPr/>
             </a:lvl2pPr>
@@ -4425,7 +4425,7 @@
               <a:buClr>
                 <a:schemeClr val="accent2"/>
               </a:buClr>
-              <a:buSzPts val="1800"/>
+              <a:buSzPts val="2400"/>
               <a:buNone/>
               <a:defRPr/>
             </a:lvl3pPr>
@@ -4442,7 +4442,7 @@
               <a:buClr>
                 <a:schemeClr val="accent2"/>
               </a:buClr>
-              <a:buSzPts val="1800"/>
+              <a:buSzPts val="2400"/>
               <a:buNone/>
               <a:defRPr/>
             </a:lvl4pPr>
@@ -4459,7 +4459,7 @@
               <a:buClr>
                 <a:schemeClr val="accent2"/>
               </a:buClr>
-              <a:buSzPts val="1800"/>
+              <a:buSzPts val="2400"/>
               <a:buNone/>
               <a:defRPr/>
             </a:lvl5pPr>
@@ -4476,7 +4476,7 @@
               <a:buClr>
                 <a:schemeClr val="accent2"/>
               </a:buClr>
-              <a:buSzPts val="1800"/>
+              <a:buSzPts val="2400"/>
               <a:buNone/>
               <a:defRPr/>
             </a:lvl6pPr>
@@ -4493,7 +4493,7 @@
               <a:buClr>
                 <a:schemeClr val="accent2"/>
               </a:buClr>
-              <a:buSzPts val="1800"/>
+              <a:buSzPts val="2400"/>
               <a:buNone/>
               <a:defRPr/>
             </a:lvl7pPr>
@@ -4510,7 +4510,7 @@
               <a:buClr>
                 <a:schemeClr val="accent2"/>
               </a:buClr>
-              <a:buSzPts val="1800"/>
+              <a:buSzPts val="2400"/>
               <a:buNone/>
               <a:defRPr/>
             </a:lvl8pPr>
@@ -4527,7 +4527,7 @@
               <a:buClr>
                 <a:schemeClr val="accent2"/>
               </a:buClr>
-              <a:buSzPts val="1800"/>
+              <a:buSzPts val="2400"/>
               <a:buNone/>
               <a:defRPr/>
             </a:lvl9pPr>
@@ -4545,8 +4545,8 @@
         </p:nvSpPr>
         <p:spPr>
           <a:xfrm>
-            <a:off x="2343150" y="4767263"/>
-            <a:ext cx="2171700" cy="273844"/>
+            <a:off x="3124122" y="6356192"/>
+            <a:ext cx="2895528" cy="365116"/>
           </a:xfrm>
           <a:prstGeom prst="rect">
             <a:avLst/>
@@ -4557,7 +4557,7 @@
           </a:ln>
         </p:spPr>
         <p:txBody>
-          <a:bodyPr anchorCtr="0" anchor="ctr" bIns="45700" lIns="91425" spcFirstLastPara="1" rIns="91425" wrap="square" tIns="45700">
+          <a:bodyPr anchorCtr="0" anchor="ctr" bIns="60932" lIns="121897" spcFirstLastPara="1" rIns="121897" wrap="square" tIns="60932">
             <a:noAutofit/>
           </a:bodyPr>
           <a:lstStyle>
@@ -4574,7 +4574,7 @@
               <a:buClr>
                 <a:srgbClr val="888888"/>
               </a:buClr>
-              <a:buSzPts val="1800"/>
+              <a:buSzPts val="2400"/>
               <a:buNone/>
               <a:defRPr/>
             </a:lvl1pPr>
@@ -4591,7 +4591,7 @@
               <a:buClr>
                 <a:schemeClr val="accent2"/>
               </a:buClr>
-              <a:buSzPts val="1800"/>
+              <a:buSzPts val="2400"/>
               <a:buNone/>
               <a:defRPr/>
             </a:lvl2pPr>
@@ -4608,7 +4608,7 @@
               <a:buClr>
                 <a:schemeClr val="accent2"/>
               </a:buClr>
-              <a:buSzPts val="1800"/>
+              <a:buSzPts val="2400"/>
               <a:buNone/>
               <a:defRPr/>
             </a:lvl3pPr>
@@ -4625,7 +4625,7 @@
               <a:buClr>
                 <a:schemeClr val="accent2"/>
               </a:buClr>
-              <a:buSzPts val="1800"/>
+              <a:buSzPts val="2400"/>
               <a:buNone/>
               <a:defRPr/>
             </a:lvl4pPr>
@@ -4642,7 +4642,7 @@
               <a:buClr>
                 <a:schemeClr val="accent2"/>
               </a:buClr>
-              <a:buSzPts val="1800"/>
+              <a:buSzPts val="2400"/>
               <a:buNone/>
               <a:defRPr/>
             </a:lvl5pPr>
@@ -4659,7 +4659,7 @@
               <a:buClr>
                 <a:schemeClr val="accent2"/>
               </a:buClr>
-              <a:buSzPts val="1800"/>
+              <a:buSzPts val="2400"/>
               <a:buNone/>
               <a:defRPr/>
             </a:lvl6pPr>
@@ -4676,7 +4676,7 @@
               <a:buClr>
                 <a:schemeClr val="accent2"/>
               </a:buClr>
-              <a:buSzPts val="1800"/>
+              <a:buSzPts val="2400"/>
               <a:buNone/>
               <a:defRPr/>
             </a:lvl7pPr>
@@ -4693,7 +4693,7 @@
               <a:buClr>
                 <a:schemeClr val="accent2"/>
               </a:buClr>
-              <a:buSzPts val="1800"/>
+              <a:buSzPts val="2400"/>
               <a:buNone/>
               <a:defRPr/>
             </a:lvl8pPr>
@@ -4710,7 +4710,7 @@
               <a:buClr>
                 <a:schemeClr val="accent2"/>
               </a:buClr>
-              <a:buSzPts val="1800"/>
+              <a:buSzPts val="2400"/>
               <a:buNone/>
               <a:defRPr/>
             </a:lvl9pPr>
@@ -4728,8 +4728,8 @@
         </p:nvSpPr>
         <p:spPr>
           <a:xfrm>
-            <a:off x="4914900" y="4767263"/>
-            <a:ext cx="1600200" cy="273844"/>
+            <a:off x="6553036" y="6356192"/>
+            <a:ext cx="2133547" cy="365116"/>
           </a:xfrm>
           <a:prstGeom prst="rect">
             <a:avLst/>
@@ -4740,7 +4740,7 @@
           </a:ln>
         </p:spPr>
         <p:txBody>
-          <a:bodyPr anchorCtr="0" anchor="ctr" bIns="45700" lIns="91425" spcFirstLastPara="1" rIns="91425" wrap="square" tIns="45700">
+          <a:bodyPr anchorCtr="0" anchor="ctr" bIns="60932" lIns="121897" spcFirstLastPara="1" rIns="121897" wrap="square" tIns="60932">
             <a:noAutofit/>
           </a:bodyPr>
           <a:lstStyle>
@@ -4757,7 +4757,7 @@
               <a:buClr>
                 <a:srgbClr val="888888"/>
               </a:buClr>
-              <a:buSzPts val="900"/>
+              <a:buSzPts val="1200"/>
               <a:buFont typeface="Calibri"/>
               <a:buNone/>
               <a:defRPr/>
@@ -4775,7 +4775,7 @@
               <a:buClr>
                 <a:srgbClr val="888888"/>
               </a:buClr>
-              <a:buSzPts val="900"/>
+              <a:buSzPts val="1200"/>
               <a:buFont typeface="Calibri"/>
               <a:buNone/>
               <a:defRPr/>
@@ -4793,7 +4793,7 @@
               <a:buClr>
                 <a:srgbClr val="888888"/>
               </a:buClr>
-              <a:buSzPts val="900"/>
+              <a:buSzPts val="1200"/>
               <a:buFont typeface="Calibri"/>
               <a:buNone/>
               <a:defRPr/>
@@ -4811,7 +4811,7 @@
               <a:buClr>
                 <a:srgbClr val="888888"/>
               </a:buClr>
-              <a:buSzPts val="900"/>
+              <a:buSzPts val="1200"/>
               <a:buFont typeface="Calibri"/>
               <a:buNone/>
               <a:defRPr/>
@@ -4829,7 +4829,7 @@
               <a:buClr>
                 <a:srgbClr val="888888"/>
               </a:buClr>
-              <a:buSzPts val="900"/>
+              <a:buSzPts val="1200"/>
               <a:buFont typeface="Calibri"/>
               <a:buNone/>
               <a:defRPr/>
@@ -4847,7 +4847,7 @@
               <a:buClr>
                 <a:srgbClr val="888888"/>
               </a:buClr>
-              <a:buSzPts val="900"/>
+              <a:buSzPts val="1200"/>
               <a:buFont typeface="Calibri"/>
               <a:buNone/>
               <a:defRPr/>
@@ -4865,7 +4865,7 @@
               <a:buClr>
                 <a:srgbClr val="888888"/>
               </a:buClr>
-              <a:buSzPts val="900"/>
+              <a:buSzPts val="1200"/>
               <a:buFont typeface="Calibri"/>
               <a:buNone/>
               <a:defRPr/>
@@ -4883,7 +4883,7 @@
               <a:buClr>
                 <a:srgbClr val="888888"/>
               </a:buClr>
-              <a:buSzPts val="900"/>
+              <a:buSzPts val="1200"/>
               <a:buFont typeface="Calibri"/>
               <a:buNone/>
               <a:defRPr/>
@@ -4901,7 +4901,7 @@
               <a:buClr>
                 <a:srgbClr val="888888"/>
               </a:buClr>
-              <a:buSzPts val="900"/>
+              <a:buSzPts val="1200"/>
               <a:buFont typeface="Calibri"/>
               <a:buNone/>
               <a:defRPr/>
@@ -4960,8 +4960,8 @@
         </p:nvSpPr>
         <p:spPr>
           <a:xfrm>
-            <a:off x="342900" y="205978"/>
-            <a:ext cx="6172200" cy="857250"/>
+            <a:off x="457189" y="274630"/>
+            <a:ext cx="8229394" cy="1142971"/>
           </a:xfrm>
           <a:prstGeom prst="rect">
             <a:avLst/>
@@ -4972,7 +4972,7 @@
           </a:ln>
         </p:spPr>
         <p:txBody>
-          <a:bodyPr anchorCtr="0" anchor="ctr" bIns="45700" lIns="91425" spcFirstLastPara="1" rIns="91425" wrap="square" tIns="45700">
+          <a:bodyPr anchorCtr="0" anchor="ctr" bIns="60932" lIns="121897" spcFirstLastPara="1" rIns="121897" wrap="square" tIns="60932">
             <a:normAutofit/>
           </a:bodyPr>
           <a:lstStyle>
@@ -4986,7 +4986,7 @@
               <a:buClr>
                 <a:schemeClr val="dk1"/>
               </a:buClr>
-              <a:buSzPts val="1800"/>
+              <a:buSzPts val="2400"/>
               <a:buNone/>
               <a:defRPr/>
             </a:lvl1pPr>
@@ -4997,7 +4997,7 @@
               <a:spcAft>
                 <a:spcPts val="0"/>
               </a:spcAft>
-              <a:buSzPts val="1400"/>
+              <a:buSzPts val="1867"/>
               <a:buNone/>
               <a:defRPr/>
             </a:lvl2pPr>
@@ -5008,7 +5008,7 @@
               <a:spcAft>
                 <a:spcPts val="0"/>
               </a:spcAft>
-              <a:buSzPts val="1400"/>
+              <a:buSzPts val="1867"/>
               <a:buNone/>
               <a:defRPr/>
             </a:lvl3pPr>
@@ -5019,7 +5019,7 @@
               <a:spcAft>
                 <a:spcPts val="0"/>
               </a:spcAft>
-              <a:buSzPts val="1400"/>
+              <a:buSzPts val="1867"/>
               <a:buNone/>
               <a:defRPr/>
             </a:lvl4pPr>
@@ -5030,7 +5030,7 @@
               <a:spcAft>
                 <a:spcPts val="0"/>
               </a:spcAft>
-              <a:buSzPts val="1400"/>
+              <a:buSzPts val="1867"/>
               <a:buNone/>
               <a:defRPr/>
             </a:lvl5pPr>
@@ -5041,7 +5041,7 @@
               <a:spcAft>
                 <a:spcPts val="0"/>
               </a:spcAft>
-              <a:buSzPts val="1400"/>
+              <a:buSzPts val="1867"/>
               <a:buNone/>
               <a:defRPr/>
             </a:lvl6pPr>
@@ -5052,7 +5052,7 @@
               <a:spcAft>
                 <a:spcPts val="0"/>
               </a:spcAft>
-              <a:buSzPts val="1400"/>
+              <a:buSzPts val="1867"/>
               <a:buNone/>
               <a:defRPr/>
             </a:lvl7pPr>
@@ -5063,7 +5063,7 @@
               <a:spcAft>
                 <a:spcPts val="0"/>
               </a:spcAft>
-              <a:buSzPts val="1400"/>
+              <a:buSzPts val="1867"/>
               <a:buNone/>
               <a:defRPr/>
             </a:lvl8pPr>
@@ -5074,7 +5074,7 @@
               <a:spcAft>
                 <a:spcPts val="0"/>
               </a:spcAft>
-              <a:buSzPts val="1400"/>
+              <a:buSzPts val="1867"/>
               <a:buNone/>
               <a:defRPr/>
             </a:lvl9pPr>
@@ -5092,8 +5092,8 @@
         </p:nvSpPr>
         <p:spPr>
           <a:xfrm>
-            <a:off x="342900" y="1200151"/>
-            <a:ext cx="6172200" cy="3394472"/>
+            <a:off x="457189" y="1600161"/>
+            <a:ext cx="8229394" cy="4525849"/>
           </a:xfrm>
           <a:prstGeom prst="rect">
             <a:avLst/>
@@ -5104,13 +5104,13 @@
           </a:ln>
         </p:spPr>
         <p:txBody>
-          <a:bodyPr anchorCtr="0" anchor="t" bIns="45700" lIns="91425" spcFirstLastPara="1" rIns="91425" wrap="square" tIns="45700">
+          <a:bodyPr anchorCtr="0" anchor="t" bIns="60932" lIns="121897" spcFirstLastPara="1" rIns="121897" wrap="square" tIns="60932">
             <a:normAutofit/>
           </a:bodyPr>
           <a:lstStyle>
             <a:lvl1pPr indent="-342900" lvl="0" marL="457200" algn="l">
               <a:spcBef>
-                <a:spcPts val="360"/>
+                <a:spcPts val="480"/>
               </a:spcBef>
               <a:spcAft>
                 <a:spcPts val="0"/>
@@ -5118,13 +5118,13 @@
               <a:buClr>
                 <a:schemeClr val="dk1"/>
               </a:buClr>
-              <a:buSzPts val="1800"/>
+              <a:buSzPts val="2400"/>
               <a:buChar char="•"/>
               <a:defRPr/>
             </a:lvl1pPr>
             <a:lvl2pPr indent="-342900" lvl="1" marL="914400" algn="l">
               <a:spcBef>
-                <a:spcPts val="360"/>
+                <a:spcPts val="480"/>
               </a:spcBef>
               <a:spcAft>
                 <a:spcPts val="0"/>
@@ -5132,13 +5132,13 @@
               <a:buClr>
                 <a:schemeClr val="dk1"/>
               </a:buClr>
-              <a:buSzPts val="1800"/>
+              <a:buSzPts val="2400"/>
               <a:buChar char="–"/>
               <a:defRPr/>
             </a:lvl2pPr>
             <a:lvl3pPr indent="-342900" lvl="2" marL="1371600" algn="l">
               <a:spcBef>
-                <a:spcPts val="360"/>
+                <a:spcPts val="480"/>
               </a:spcBef>
               <a:spcAft>
                 <a:spcPts val="0"/>
@@ -5146,13 +5146,13 @@
               <a:buClr>
                 <a:schemeClr val="dk1"/>
               </a:buClr>
-              <a:buSzPts val="1800"/>
+              <a:buSzPts val="2400"/>
               <a:buChar char="•"/>
               <a:defRPr/>
             </a:lvl3pPr>
             <a:lvl4pPr indent="-342900" lvl="3" marL="1828800" algn="l">
               <a:spcBef>
-                <a:spcPts val="360"/>
+                <a:spcPts val="480"/>
               </a:spcBef>
               <a:spcAft>
                 <a:spcPts val="0"/>
@@ -5160,13 +5160,13 @@
               <a:buClr>
                 <a:schemeClr val="dk1"/>
               </a:buClr>
-              <a:buSzPts val="1800"/>
+              <a:buSzPts val="2400"/>
               <a:buChar char="–"/>
               <a:defRPr/>
             </a:lvl4pPr>
             <a:lvl5pPr indent="-342900" lvl="4" marL="2286000" algn="l">
               <a:spcBef>
-                <a:spcPts val="360"/>
+                <a:spcPts val="480"/>
               </a:spcBef>
               <a:spcAft>
                 <a:spcPts val="0"/>
@@ -5174,13 +5174,13 @@
               <a:buClr>
                 <a:schemeClr val="dk1"/>
               </a:buClr>
-              <a:buSzPts val="1800"/>
+              <a:buSzPts val="2400"/>
               <a:buChar char="»"/>
               <a:defRPr/>
             </a:lvl5pPr>
             <a:lvl6pPr indent="-342900" lvl="5" marL="2743200" algn="l">
               <a:spcBef>
-                <a:spcPts val="360"/>
+                <a:spcPts val="480"/>
               </a:spcBef>
               <a:spcAft>
                 <a:spcPts val="0"/>
@@ -5188,13 +5188,13 @@
               <a:buClr>
                 <a:schemeClr val="dk1"/>
               </a:buClr>
-              <a:buSzPts val="1800"/>
+              <a:buSzPts val="2400"/>
               <a:buChar char="•"/>
               <a:defRPr/>
             </a:lvl6pPr>
             <a:lvl7pPr indent="-342900" lvl="6" marL="3200400" algn="l">
               <a:spcBef>
-                <a:spcPts val="360"/>
+                <a:spcPts val="480"/>
               </a:spcBef>
               <a:spcAft>
                 <a:spcPts val="0"/>
@@ -5202,13 +5202,13 @@
               <a:buClr>
                 <a:schemeClr val="dk1"/>
               </a:buClr>
-              <a:buSzPts val="1800"/>
+              <a:buSzPts val="2400"/>
               <a:buChar char="•"/>
               <a:defRPr/>
             </a:lvl7pPr>
             <a:lvl8pPr indent="-342900" lvl="7" marL="3657600" algn="l">
               <a:spcBef>
-                <a:spcPts val="360"/>
+                <a:spcPts val="480"/>
               </a:spcBef>
               <a:spcAft>
                 <a:spcPts val="0"/>
@@ -5216,13 +5216,13 @@
               <a:buClr>
                 <a:schemeClr val="dk1"/>
               </a:buClr>
-              <a:buSzPts val="1800"/>
+              <a:buSzPts val="2400"/>
               <a:buChar char="•"/>
               <a:defRPr/>
             </a:lvl8pPr>
             <a:lvl9pPr indent="-342900" lvl="8" marL="4114800" algn="l">
               <a:spcBef>
-                <a:spcPts val="360"/>
+                <a:spcPts val="480"/>
               </a:spcBef>
               <a:spcAft>
                 <a:spcPts val="0"/>
@@ -5230,7 +5230,7 @@
               <a:buClr>
                 <a:schemeClr val="dk1"/>
               </a:buClr>
-              <a:buSzPts val="1800"/>
+              <a:buSzPts val="2400"/>
               <a:buChar char="•"/>
               <a:defRPr/>
             </a:lvl9pPr>
@@ -5248,8 +5248,8 @@
         </p:nvSpPr>
         <p:spPr>
           <a:xfrm>
-            <a:off x="342900" y="4767263"/>
-            <a:ext cx="1600200" cy="273844"/>
+            <a:off x="457189" y="6356192"/>
+            <a:ext cx="2133547" cy="365116"/>
           </a:xfrm>
           <a:prstGeom prst="rect">
             <a:avLst/>
@@ -5260,7 +5260,7 @@
           </a:ln>
         </p:spPr>
         <p:txBody>
-          <a:bodyPr anchorCtr="0" anchor="ctr" bIns="45700" lIns="91425" spcFirstLastPara="1" rIns="91425" wrap="square" tIns="45700">
+          <a:bodyPr anchorCtr="0" anchor="ctr" bIns="60932" lIns="121897" spcFirstLastPara="1" rIns="121897" wrap="square" tIns="60932">
             <a:noAutofit/>
           </a:bodyPr>
           <a:lstStyle>
@@ -5277,7 +5277,7 @@
               <a:buClr>
                 <a:srgbClr val="888888"/>
               </a:buClr>
-              <a:buSzPts val="1800"/>
+              <a:buSzPts val="2400"/>
               <a:buNone/>
               <a:defRPr/>
             </a:lvl1pPr>
@@ -5294,7 +5294,7 @@
               <a:buClr>
                 <a:schemeClr val="accent2"/>
               </a:buClr>
-              <a:buSzPts val="1800"/>
+              <a:buSzPts val="2400"/>
               <a:buNone/>
               <a:defRPr/>
             </a:lvl2pPr>
@@ -5311,7 +5311,7 @@
               <a:buClr>
                 <a:schemeClr val="accent2"/>
               </a:buClr>
-              <a:buSzPts val="1800"/>
+              <a:buSzPts val="2400"/>
               <a:buNone/>
               <a:defRPr/>
             </a:lvl3pPr>
@@ -5328,7 +5328,7 @@
               <a:buClr>
                 <a:schemeClr val="accent2"/>
               </a:buClr>
-              <a:buSzPts val="1800"/>
+              <a:buSzPts val="2400"/>
               <a:buNone/>
               <a:defRPr/>
             </a:lvl4pPr>
@@ -5345,7 +5345,7 @@
               <a:buClr>
                 <a:schemeClr val="accent2"/>
               </a:buClr>
-              <a:buSzPts val="1800"/>
+              <a:buSzPts val="2400"/>
               <a:buNone/>
               <a:defRPr/>
             </a:lvl5pPr>
@@ -5362,7 +5362,7 @@
               <a:buClr>
                 <a:schemeClr val="accent2"/>
               </a:buClr>
-              <a:buSzPts val="1800"/>
+              <a:buSzPts val="2400"/>
               <a:buNone/>
               <a:defRPr/>
             </a:lvl6pPr>
@@ -5379,7 +5379,7 @@
               <a:buClr>
                 <a:schemeClr val="accent2"/>
               </a:buClr>
-              <a:buSzPts val="1800"/>
+              <a:buSzPts val="2400"/>
               <a:buNone/>
               <a:defRPr/>
             </a:lvl7pPr>
@@ -5396,7 +5396,7 @@
               <a:buClr>
                 <a:schemeClr val="accent2"/>
               </a:buClr>
-              <a:buSzPts val="1800"/>
+              <a:buSzPts val="2400"/>
               <a:buNone/>
               <a:defRPr/>
             </a:lvl8pPr>
@@ -5413,7 +5413,7 @@
               <a:buClr>
                 <a:schemeClr val="accent2"/>
               </a:buClr>
-              <a:buSzPts val="1800"/>
+              <a:buSzPts val="2400"/>
               <a:buNone/>
               <a:defRPr/>
             </a:lvl9pPr>
@@ -5431,8 +5431,8 @@
         </p:nvSpPr>
         <p:spPr>
           <a:xfrm>
-            <a:off x="2343150" y="4767263"/>
-            <a:ext cx="2171700" cy="273844"/>
+            <a:off x="3124122" y="6356192"/>
+            <a:ext cx="2895528" cy="365116"/>
           </a:xfrm>
           <a:prstGeom prst="rect">
             <a:avLst/>
@@ -5443,7 +5443,7 @@
           </a:ln>
         </p:spPr>
         <p:txBody>
-          <a:bodyPr anchorCtr="0" anchor="ctr" bIns="45700" lIns="91425" spcFirstLastPara="1" rIns="91425" wrap="square" tIns="45700">
+          <a:bodyPr anchorCtr="0" anchor="ctr" bIns="60932" lIns="121897" spcFirstLastPara="1" rIns="121897" wrap="square" tIns="60932">
             <a:noAutofit/>
           </a:bodyPr>
           <a:lstStyle>
@@ -5460,7 +5460,7 @@
               <a:buClr>
                 <a:srgbClr val="888888"/>
               </a:buClr>
-              <a:buSzPts val="1800"/>
+              <a:buSzPts val="2400"/>
               <a:buNone/>
               <a:defRPr/>
             </a:lvl1pPr>
@@ -5477,7 +5477,7 @@
               <a:buClr>
                 <a:schemeClr val="accent2"/>
               </a:buClr>
-              <a:buSzPts val="1800"/>
+              <a:buSzPts val="2400"/>
               <a:buNone/>
               <a:defRPr/>
             </a:lvl2pPr>
@@ -5494,7 +5494,7 @@
               <a:buClr>
                 <a:schemeClr val="accent2"/>
               </a:buClr>
-              <a:buSzPts val="1800"/>
+              <a:buSzPts val="2400"/>
               <a:buNone/>
               <a:defRPr/>
             </a:lvl3pPr>
@@ -5511,7 +5511,7 @@
               <a:buClr>
                 <a:schemeClr val="accent2"/>
               </a:buClr>
-              <a:buSzPts val="1800"/>
+              <a:buSzPts val="2400"/>
               <a:buNone/>
               <a:defRPr/>
             </a:lvl4pPr>
@@ -5528,7 +5528,7 @@
               <a:buClr>
                 <a:schemeClr val="accent2"/>
               </a:buClr>
-              <a:buSzPts val="1800"/>
+              <a:buSzPts val="2400"/>
               <a:buNone/>
               <a:defRPr/>
             </a:lvl5pPr>
@@ -5545,7 +5545,7 @@
               <a:buClr>
                 <a:schemeClr val="accent2"/>
               </a:buClr>
-              <a:buSzPts val="1800"/>
+              <a:buSzPts val="2400"/>
               <a:buNone/>
               <a:defRPr/>
             </a:lvl6pPr>
@@ -5562,7 +5562,7 @@
               <a:buClr>
                 <a:schemeClr val="accent2"/>
               </a:buClr>
-              <a:buSzPts val="1800"/>
+              <a:buSzPts val="2400"/>
               <a:buNone/>
               <a:defRPr/>
             </a:lvl7pPr>
@@ -5579,7 +5579,7 @@
               <a:buClr>
                 <a:schemeClr val="accent2"/>
               </a:buClr>
-              <a:buSzPts val="1800"/>
+              <a:buSzPts val="2400"/>
               <a:buNone/>
               <a:defRPr/>
             </a:lvl8pPr>
@@ -5596,7 +5596,7 @@
               <a:buClr>
                 <a:schemeClr val="accent2"/>
               </a:buClr>
-              <a:buSzPts val="1800"/>
+              <a:buSzPts val="2400"/>
               <a:buNone/>
               <a:defRPr/>
             </a:lvl9pPr>
@@ -5614,8 +5614,8 @@
         </p:nvSpPr>
         <p:spPr>
           <a:xfrm>
-            <a:off x="4914900" y="4767263"/>
-            <a:ext cx="1600200" cy="273844"/>
+            <a:off x="6553036" y="6356192"/>
+            <a:ext cx="2133547" cy="365116"/>
           </a:xfrm>
           <a:prstGeom prst="rect">
             <a:avLst/>
@@ -5626,7 +5626,7 @@
           </a:ln>
         </p:spPr>
         <p:txBody>
-          <a:bodyPr anchorCtr="0" anchor="ctr" bIns="45700" lIns="91425" spcFirstLastPara="1" rIns="91425" wrap="square" tIns="45700">
+          <a:bodyPr anchorCtr="0" anchor="ctr" bIns="60932" lIns="121897" spcFirstLastPara="1" rIns="121897" wrap="square" tIns="60932">
             <a:noAutofit/>
           </a:bodyPr>
           <a:lstStyle>
@@ -5643,7 +5643,7 @@
               <a:buClr>
                 <a:srgbClr val="888888"/>
               </a:buClr>
-              <a:buSzPts val="900"/>
+              <a:buSzPts val="1200"/>
               <a:buFont typeface="Calibri"/>
               <a:buNone/>
               <a:defRPr/>
@@ -5661,7 +5661,7 @@
               <a:buClr>
                 <a:srgbClr val="888888"/>
               </a:buClr>
-              <a:buSzPts val="900"/>
+              <a:buSzPts val="1200"/>
               <a:buFont typeface="Calibri"/>
               <a:buNone/>
               <a:defRPr/>
@@ -5679,7 +5679,7 @@
               <a:buClr>
                 <a:srgbClr val="888888"/>
               </a:buClr>
-              <a:buSzPts val="900"/>
+              <a:buSzPts val="1200"/>
               <a:buFont typeface="Calibri"/>
               <a:buNone/>
               <a:defRPr/>
@@ -5697,7 +5697,7 @@
               <a:buClr>
                 <a:srgbClr val="888888"/>
               </a:buClr>
-              <a:buSzPts val="900"/>
+              <a:buSzPts val="1200"/>
               <a:buFont typeface="Calibri"/>
               <a:buNone/>
               <a:defRPr/>
@@ -5715,7 +5715,7 @@
               <a:buClr>
                 <a:srgbClr val="888888"/>
               </a:buClr>
-              <a:buSzPts val="900"/>
+              <a:buSzPts val="1200"/>
               <a:buFont typeface="Calibri"/>
               <a:buNone/>
               <a:defRPr/>
@@ -5733,7 +5733,7 @@
               <a:buClr>
                 <a:srgbClr val="888888"/>
               </a:buClr>
-              <a:buSzPts val="900"/>
+              <a:buSzPts val="1200"/>
               <a:buFont typeface="Calibri"/>
               <a:buNone/>
               <a:defRPr/>
@@ -5751,7 +5751,7 @@
               <a:buClr>
                 <a:srgbClr val="888888"/>
               </a:buClr>
-              <a:buSzPts val="900"/>
+              <a:buSzPts val="1200"/>
               <a:buFont typeface="Calibri"/>
               <a:buNone/>
               <a:defRPr/>
@@ -5769,7 +5769,7 @@
               <a:buClr>
                 <a:srgbClr val="888888"/>
               </a:buClr>
-              <a:buSzPts val="900"/>
+              <a:buSzPts val="1200"/>
               <a:buFont typeface="Calibri"/>
               <a:buNone/>
               <a:defRPr/>
@@ -5787,7 +5787,7 @@
               <a:buClr>
                 <a:srgbClr val="888888"/>
               </a:buClr>
-              <a:buSzPts val="900"/>
+              <a:buSzPts val="1200"/>
               <a:buFont typeface="Calibri"/>
               <a:buNone/>
               <a:defRPr/>
@@ -5846,8 +5846,8 @@
         </p:nvSpPr>
         <p:spPr>
           <a:xfrm>
-            <a:off x="541735" y="3305176"/>
-            <a:ext cx="5829300" cy="1021556"/>
+            <a:off x="722295" y="4406791"/>
+            <a:ext cx="7772206" cy="1362041"/>
           </a:xfrm>
           <a:prstGeom prst="rect">
             <a:avLst/>
@@ -5858,7 +5858,7 @@
           </a:ln>
         </p:spPr>
         <p:txBody>
-          <a:bodyPr anchorCtr="0" anchor="t" bIns="45700" lIns="91425" spcFirstLastPara="1" rIns="91425" wrap="square" tIns="45700">
+          <a:bodyPr anchorCtr="0" anchor="t" bIns="60932" lIns="121897" spcFirstLastPara="1" rIns="121897" wrap="square" tIns="60932">
             <a:normAutofit/>
           </a:bodyPr>
           <a:lstStyle>
@@ -5872,10 +5872,10 @@
               <a:buClr>
                 <a:schemeClr val="dk1"/>
               </a:buClr>
-              <a:buSzPts val="3000"/>
+              <a:buSzPts val="4000"/>
               <a:buFont typeface="Calibri"/>
               <a:buNone/>
-              <a:defRPr b="1" sz="3000" cap="none"/>
+              <a:defRPr b="1" sz="4000" cap="none"/>
             </a:lvl1pPr>
             <a:lvl2pPr lvl="1">
               <a:spcBef>
@@ -5884,7 +5884,7 @@
               <a:spcAft>
                 <a:spcPts val="0"/>
               </a:spcAft>
-              <a:buSzPts val="1400"/>
+              <a:buSzPts val="1867"/>
               <a:buNone/>
               <a:defRPr/>
             </a:lvl2pPr>
@@ -5895,7 +5895,7 @@
               <a:spcAft>
                 <a:spcPts val="0"/>
               </a:spcAft>
-              <a:buSzPts val="1400"/>
+              <a:buSzPts val="1867"/>
               <a:buNone/>
               <a:defRPr/>
             </a:lvl3pPr>
@@ -5906,7 +5906,7 @@
               <a:spcAft>
                 <a:spcPts val="0"/>
               </a:spcAft>
-              <a:buSzPts val="1400"/>
+              <a:buSzPts val="1867"/>
               <a:buNone/>
               <a:defRPr/>
             </a:lvl4pPr>
@@ -5917,7 +5917,7 @@
               <a:spcAft>
                 <a:spcPts val="0"/>
               </a:spcAft>
-              <a:buSzPts val="1400"/>
+              <a:buSzPts val="1867"/>
               <a:buNone/>
               <a:defRPr/>
             </a:lvl5pPr>
@@ -5928,7 +5928,7 @@
               <a:spcAft>
                 <a:spcPts val="0"/>
               </a:spcAft>
-              <a:buSzPts val="1400"/>
+              <a:buSzPts val="1867"/>
               <a:buNone/>
               <a:defRPr/>
             </a:lvl6pPr>
@@ -5939,7 +5939,7 @@
               <a:spcAft>
                 <a:spcPts val="0"/>
               </a:spcAft>
-              <a:buSzPts val="1400"/>
+              <a:buSzPts val="1867"/>
               <a:buNone/>
               <a:defRPr/>
             </a:lvl7pPr>
@@ -5950,7 +5950,7 @@
               <a:spcAft>
                 <a:spcPts val="0"/>
               </a:spcAft>
-              <a:buSzPts val="1400"/>
+              <a:buSzPts val="1867"/>
               <a:buNone/>
               <a:defRPr/>
             </a:lvl8pPr>
@@ -5961,7 +5961,7 @@
               <a:spcAft>
                 <a:spcPts val="0"/>
               </a:spcAft>
-              <a:buSzPts val="1400"/>
+              <a:buSzPts val="1867"/>
               <a:buNone/>
               <a:defRPr/>
             </a:lvl9pPr>
@@ -5979,8 +5979,8 @@
         </p:nvSpPr>
         <p:spPr>
           <a:xfrm>
-            <a:off x="541735" y="2180035"/>
-            <a:ext cx="5829300" cy="1125140"/>
+            <a:off x="722295" y="2906641"/>
+            <a:ext cx="7772206" cy="1500149"/>
           </a:xfrm>
           <a:prstGeom prst="rect">
             <a:avLst/>
@@ -5991,13 +5991,13 @@
           </a:ln>
         </p:spPr>
         <p:txBody>
-          <a:bodyPr anchorCtr="0" anchor="b" bIns="45700" lIns="91425" spcFirstLastPara="1" rIns="91425" wrap="square" tIns="45700">
+          <a:bodyPr anchorCtr="0" anchor="b" bIns="60932" lIns="121897" spcFirstLastPara="1" rIns="121897" wrap="square" tIns="60932">
             <a:normAutofit/>
           </a:bodyPr>
           <a:lstStyle>
             <a:lvl1pPr indent="-228600" lvl="0" marL="457200" algn="l">
               <a:spcBef>
-                <a:spcPts val="300"/>
+                <a:spcPts val="400"/>
               </a:spcBef>
               <a:spcAft>
                 <a:spcPts val="0"/>
@@ -6005,9 +6005,9 @@
               <a:buClr>
                 <a:srgbClr val="888888"/>
               </a:buClr>
-              <a:buSzPts val="1500"/>
-              <a:buNone/>
-              <a:defRPr sz="1500">
+              <a:buSzPts val="2000"/>
+              <a:buNone/>
+              <a:defRPr sz="2000">
                 <a:solidFill>
                   <a:srgbClr val="888888"/>
                 </a:solidFill>
@@ -6015,7 +6015,7 @@
             </a:lvl1pPr>
             <a:lvl2pPr indent="-228600" lvl="1" marL="914400" algn="l">
               <a:spcBef>
-                <a:spcPts val="270"/>
+                <a:spcPts val="360"/>
               </a:spcBef>
               <a:spcAft>
                 <a:spcPts val="0"/>
@@ -6023,9 +6023,9 @@
               <a:buClr>
                 <a:srgbClr val="888888"/>
               </a:buClr>
-              <a:buSzPts val="1350"/>
-              <a:buNone/>
-              <a:defRPr sz="1350">
+              <a:buSzPts val="1800"/>
+              <a:buNone/>
+              <a:defRPr sz="1800">
                 <a:solidFill>
                   <a:srgbClr val="888888"/>
                 </a:solidFill>
@@ -6033,7 +6033,7 @@
             </a:lvl2pPr>
             <a:lvl3pPr indent="-228600" lvl="2" marL="1371600" algn="l">
               <a:spcBef>
-                <a:spcPts val="240"/>
+                <a:spcPts val="320"/>
               </a:spcBef>
               <a:spcAft>
                 <a:spcPts val="0"/>
@@ -6041,9 +6041,9 @@
               <a:buClr>
                 <a:srgbClr val="888888"/>
               </a:buClr>
-              <a:buSzPts val="1200"/>
-              <a:buNone/>
-              <a:defRPr sz="1200">
+              <a:buSzPts val="1600"/>
+              <a:buNone/>
+              <a:defRPr sz="1600">
                 <a:solidFill>
                   <a:srgbClr val="888888"/>
                 </a:solidFill>
@@ -6051,7 +6051,7 @@
             </a:lvl3pPr>
             <a:lvl4pPr indent="-228600" lvl="3" marL="1828800" algn="l">
               <a:spcBef>
-                <a:spcPts val="210"/>
+                <a:spcPts val="280"/>
               </a:spcBef>
               <a:spcAft>
                 <a:spcPts val="0"/>
@@ -6059,9 +6059,9 @@
               <a:buClr>
                 <a:srgbClr val="888888"/>
               </a:buClr>
-              <a:buSzPts val="1050"/>
-              <a:buNone/>
-              <a:defRPr sz="1050">
+              <a:buSzPts val="1400"/>
+              <a:buNone/>
+              <a:defRPr sz="1400">
                 <a:solidFill>
                   <a:srgbClr val="888888"/>
                 </a:solidFill>
@@ -6069,7 +6069,7 @@
             </a:lvl4pPr>
             <a:lvl5pPr indent="-228600" lvl="4" marL="2286000" algn="l">
               <a:spcBef>
-                <a:spcPts val="210"/>
+                <a:spcPts val="280"/>
               </a:spcBef>
               <a:spcAft>
                 <a:spcPts val="0"/>
@@ -6077,9 +6077,9 @@
               <a:buClr>
                 <a:srgbClr val="888888"/>
               </a:buClr>
-              <a:buSzPts val="1050"/>
-              <a:buNone/>
-              <a:defRPr sz="1050">
+              <a:buSzPts val="1400"/>
+              <a:buNone/>
+              <a:defRPr sz="1400">
                 <a:solidFill>
                   <a:srgbClr val="888888"/>
                 </a:solidFill>
@@ -6087,7 +6087,7 @@
             </a:lvl5pPr>
             <a:lvl6pPr indent="-228600" lvl="5" marL="2743200" algn="l">
               <a:spcBef>
-                <a:spcPts val="210"/>
+                <a:spcPts val="280"/>
               </a:spcBef>
               <a:spcAft>
                 <a:spcPts val="0"/>
@@ -6095,9 +6095,9 @@
               <a:buClr>
                 <a:srgbClr val="888888"/>
               </a:buClr>
-              <a:buSzPts val="1050"/>
-              <a:buNone/>
-              <a:defRPr sz="1050">
+              <a:buSzPts val="1400"/>
+              <a:buNone/>
+              <a:defRPr sz="1400">
                 <a:solidFill>
                   <a:srgbClr val="888888"/>
                 </a:solidFill>
@@ -6105,7 +6105,7 @@
             </a:lvl6pPr>
             <a:lvl7pPr indent="-228600" lvl="6" marL="3200400" algn="l">
               <a:spcBef>
-                <a:spcPts val="210"/>
+                <a:spcPts val="280"/>
               </a:spcBef>
               <a:spcAft>
                 <a:spcPts val="0"/>
@@ -6113,9 +6113,9 @@
               <a:buClr>
                 <a:srgbClr val="888888"/>
               </a:buClr>
-              <a:buSzPts val="1050"/>
-              <a:buNone/>
-              <a:defRPr sz="1050">
+              <a:buSzPts val="1400"/>
+              <a:buNone/>
+              <a:defRPr sz="1400">
                 <a:solidFill>
                   <a:srgbClr val="888888"/>
                 </a:solidFill>
@@ -6123,7 +6123,7 @@
             </a:lvl7pPr>
             <a:lvl8pPr indent="-228600" lvl="7" marL="3657600" algn="l">
               <a:spcBef>
-                <a:spcPts val="210"/>
+                <a:spcPts val="280"/>
               </a:spcBef>
               <a:spcAft>
                 <a:spcPts val="0"/>
@@ -6131,9 +6131,9 @@
               <a:buClr>
                 <a:srgbClr val="888888"/>
               </a:buClr>
-              <a:buSzPts val="1050"/>
-              <a:buNone/>
-              <a:defRPr sz="1050">
+              <a:buSzPts val="1400"/>
+              <a:buNone/>
+              <a:defRPr sz="1400">
                 <a:solidFill>
                   <a:srgbClr val="888888"/>
                 </a:solidFill>
@@ -6141,7 +6141,7 @@
             </a:lvl8pPr>
             <a:lvl9pPr indent="-228600" lvl="8" marL="4114800" algn="l">
               <a:spcBef>
-                <a:spcPts val="210"/>
+                <a:spcPts val="280"/>
               </a:spcBef>
               <a:spcAft>
                 <a:spcPts val="0"/>
@@ -6149,9 +6149,9 @@
               <a:buClr>
                 <a:srgbClr val="888888"/>
               </a:buClr>
-              <a:buSzPts val="1050"/>
-              <a:buNone/>
-              <a:defRPr sz="1050">
+              <a:buSzPts val="1400"/>
+              <a:buNone/>
+              <a:defRPr sz="1400">
                 <a:solidFill>
                   <a:srgbClr val="888888"/>
                 </a:solidFill>
@@ -6171,8 +6171,8 @@
         </p:nvSpPr>
         <p:spPr>
           <a:xfrm>
-            <a:off x="342900" y="4767263"/>
-            <a:ext cx="1600200" cy="273844"/>
+            <a:off x="457189" y="6356192"/>
+            <a:ext cx="2133547" cy="365116"/>
           </a:xfrm>
           <a:prstGeom prst="rect">
             <a:avLst/>
@@ -6183,7 +6183,7 @@
           </a:ln>
         </p:spPr>
         <p:txBody>
-          <a:bodyPr anchorCtr="0" anchor="ctr" bIns="45700" lIns="91425" spcFirstLastPara="1" rIns="91425" wrap="square" tIns="45700">
+          <a:bodyPr anchorCtr="0" anchor="ctr" bIns="60932" lIns="121897" spcFirstLastPara="1" rIns="121897" wrap="square" tIns="60932">
             <a:noAutofit/>
           </a:bodyPr>
           <a:lstStyle>
@@ -6200,7 +6200,7 @@
               <a:buClr>
                 <a:srgbClr val="888888"/>
               </a:buClr>
-              <a:buSzPts val="1800"/>
+              <a:buSzPts val="2400"/>
               <a:buNone/>
               <a:defRPr/>
             </a:lvl1pPr>
@@ -6217,7 +6217,7 @@
               <a:buClr>
                 <a:schemeClr val="accent2"/>
               </a:buClr>
-              <a:buSzPts val="1800"/>
+              <a:buSzPts val="2400"/>
               <a:buNone/>
               <a:defRPr/>
             </a:lvl2pPr>
@@ -6234,7 +6234,7 @@
               <a:buClr>
                 <a:schemeClr val="accent2"/>
               </a:buClr>
-              <a:buSzPts val="1800"/>
+              <a:buSzPts val="2400"/>
               <a:buNone/>
               <a:defRPr/>
             </a:lvl3pPr>
@@ -6251,7 +6251,7 @@
               <a:buClr>
                 <a:schemeClr val="accent2"/>
               </a:buClr>
-              <a:buSzPts val="1800"/>
+              <a:buSzPts val="2400"/>
               <a:buNone/>
               <a:defRPr/>
             </a:lvl4pPr>
@@ -6268,7 +6268,7 @@
               <a:buClr>
                 <a:schemeClr val="accent2"/>
               </a:buClr>
-              <a:buSzPts val="1800"/>
+              <a:buSzPts val="2400"/>
               <a:buNone/>
               <a:defRPr/>
             </a:lvl5pPr>
@@ -6285,7 +6285,7 @@
               <a:buClr>
                 <a:schemeClr val="accent2"/>
               </a:buClr>
-              <a:buSzPts val="1800"/>
+              <a:buSzPts val="2400"/>
               <a:buNone/>
               <a:defRPr/>
             </a:lvl6pPr>
@@ -6302,7 +6302,7 @@
               <a:buClr>
                 <a:schemeClr val="accent2"/>
               </a:buClr>
-              <a:buSzPts val="1800"/>
+              <a:buSzPts val="2400"/>
               <a:buNone/>
               <a:defRPr/>
             </a:lvl7pPr>
@@ -6319,7 +6319,7 @@
               <a:buClr>
                 <a:schemeClr val="accent2"/>
               </a:buClr>
-              <a:buSzPts val="1800"/>
+              <a:buSzPts val="2400"/>
               <a:buNone/>
               <a:defRPr/>
             </a:lvl8pPr>
@@ -6336,7 +6336,7 @@
               <a:buClr>
                 <a:schemeClr val="accent2"/>
               </a:buClr>
-              <a:buSzPts val="1800"/>
+              <a:buSzPts val="2400"/>
               <a:buNone/>
               <a:defRPr/>
             </a:lvl9pPr>
@@ -6354,8 +6354,8 @@
         </p:nvSpPr>
         <p:spPr>
           <a:xfrm>
-            <a:off x="2343150" y="4767263"/>
-            <a:ext cx="2171700" cy="273844"/>
+            <a:off x="3124122" y="6356192"/>
+            <a:ext cx="2895528" cy="365116"/>
           </a:xfrm>
           <a:prstGeom prst="rect">
             <a:avLst/>
@@ -6366,7 +6366,7 @@
           </a:ln>
         </p:spPr>
         <p:txBody>
-          <a:bodyPr anchorCtr="0" anchor="ctr" bIns="45700" lIns="91425" spcFirstLastPara="1" rIns="91425" wrap="square" tIns="45700">
+          <a:bodyPr anchorCtr="0" anchor="ctr" bIns="60932" lIns="121897" spcFirstLastPara="1" rIns="121897" wrap="square" tIns="60932">
             <a:noAutofit/>
           </a:bodyPr>
           <a:lstStyle>
@@ -6383,7 +6383,7 @@
               <a:buClr>
                 <a:srgbClr val="888888"/>
               </a:buClr>
-              <a:buSzPts val="1800"/>
+              <a:buSzPts val="2400"/>
               <a:buNone/>
               <a:defRPr/>
             </a:lvl1pPr>
@@ -6400,7 +6400,7 @@
               <a:buClr>
                 <a:schemeClr val="accent2"/>
               </a:buClr>
-              <a:buSzPts val="1800"/>
+              <a:buSzPts val="2400"/>
               <a:buNone/>
               <a:defRPr/>
             </a:lvl2pPr>
@@ -6417,7 +6417,7 @@
               <a:buClr>
                 <a:schemeClr val="accent2"/>
               </a:buClr>
-              <a:buSzPts val="1800"/>
+              <a:buSzPts val="2400"/>
               <a:buNone/>
               <a:defRPr/>
             </a:lvl3pPr>
@@ -6434,7 +6434,7 @@
               <a:buClr>
                 <a:schemeClr val="accent2"/>
               </a:buClr>
-              <a:buSzPts val="1800"/>
+              <a:buSzPts val="2400"/>
               <a:buNone/>
               <a:defRPr/>
             </a:lvl4pPr>
@@ -6451,7 +6451,7 @@
               <a:buClr>
                 <a:schemeClr val="accent2"/>
               </a:buClr>
-              <a:buSzPts val="1800"/>
+              <a:buSzPts val="2400"/>
               <a:buNone/>
               <a:defRPr/>
             </a:lvl5pPr>
@@ -6468,7 +6468,7 @@
               <a:buClr>
                 <a:schemeClr val="accent2"/>
               </a:buClr>
-              <a:buSzPts val="1800"/>
+              <a:buSzPts val="2400"/>
               <a:buNone/>
               <a:defRPr/>
             </a:lvl6pPr>
@@ -6485,7 +6485,7 @@
               <a:buClr>
                 <a:schemeClr val="accent2"/>
               </a:buClr>
-              <a:buSzPts val="1800"/>
+              <a:buSzPts val="2400"/>
               <a:buNone/>
               <a:defRPr/>
             </a:lvl7pPr>
@@ -6502,7 +6502,7 @@
               <a:buClr>
                 <a:schemeClr val="accent2"/>
               </a:buClr>
-              <a:buSzPts val="1800"/>
+              <a:buSzPts val="2400"/>
               <a:buNone/>
               <a:defRPr/>
             </a:lvl8pPr>
@@ -6519,7 +6519,7 @@
               <a:buClr>
                 <a:schemeClr val="accent2"/>
               </a:buClr>
-              <a:buSzPts val="1800"/>
+              <a:buSzPts val="2400"/>
               <a:buNone/>
               <a:defRPr/>
             </a:lvl9pPr>
@@ -6537,8 +6537,8 @@
         </p:nvSpPr>
         <p:spPr>
           <a:xfrm>
-            <a:off x="4914900" y="4767263"/>
-            <a:ext cx="1600200" cy="273844"/>
+            <a:off x="6553036" y="6356192"/>
+            <a:ext cx="2133547" cy="365116"/>
           </a:xfrm>
           <a:prstGeom prst="rect">
             <a:avLst/>
@@ -6549,7 +6549,7 @@
           </a:ln>
         </p:spPr>
         <p:txBody>
-          <a:bodyPr anchorCtr="0" anchor="ctr" bIns="45700" lIns="91425" spcFirstLastPara="1" rIns="91425" wrap="square" tIns="45700">
+          <a:bodyPr anchorCtr="0" anchor="ctr" bIns="60932" lIns="121897" spcFirstLastPara="1" rIns="121897" wrap="square" tIns="60932">
             <a:noAutofit/>
           </a:bodyPr>
           <a:lstStyle>
@@ -6566,7 +6566,7 @@
               <a:buClr>
                 <a:srgbClr val="888888"/>
               </a:buClr>
-              <a:buSzPts val="900"/>
+              <a:buSzPts val="1200"/>
               <a:buFont typeface="Calibri"/>
               <a:buNone/>
               <a:defRPr/>
@@ -6584,7 +6584,7 @@
               <a:buClr>
                 <a:srgbClr val="888888"/>
               </a:buClr>
-              <a:buSzPts val="900"/>
+              <a:buSzPts val="1200"/>
               <a:buFont typeface="Calibri"/>
               <a:buNone/>
               <a:defRPr/>
@@ -6602,7 +6602,7 @@
               <a:buClr>
                 <a:srgbClr val="888888"/>
               </a:buClr>
-              <a:buSzPts val="900"/>
+              <a:buSzPts val="1200"/>
               <a:buFont typeface="Calibri"/>
               <a:buNone/>
               <a:defRPr/>
@@ -6620,7 +6620,7 @@
               <a:buClr>
                 <a:srgbClr val="888888"/>
               </a:buClr>
-              <a:buSzPts val="900"/>
+              <a:buSzPts val="1200"/>
               <a:buFont typeface="Calibri"/>
               <a:buNone/>
               <a:defRPr/>
@@ -6638,7 +6638,7 @@
               <a:buClr>
                 <a:srgbClr val="888888"/>
               </a:buClr>
-              <a:buSzPts val="900"/>
+              <a:buSzPts val="1200"/>
               <a:buFont typeface="Calibri"/>
               <a:buNone/>
               <a:defRPr/>
@@ -6656,7 +6656,7 @@
               <a:buClr>
                 <a:srgbClr val="888888"/>
               </a:buClr>
-              <a:buSzPts val="900"/>
+              <a:buSzPts val="1200"/>
               <a:buFont typeface="Calibri"/>
               <a:buNone/>
               <a:defRPr/>
@@ -6674,7 +6674,7 @@
               <a:buClr>
                 <a:srgbClr val="888888"/>
               </a:buClr>
-              <a:buSzPts val="900"/>
+              <a:buSzPts val="1200"/>
               <a:buFont typeface="Calibri"/>
               <a:buNone/>
               <a:defRPr/>
@@ -6692,7 +6692,7 @@
               <a:buClr>
                 <a:srgbClr val="888888"/>
               </a:buClr>
-              <a:buSzPts val="900"/>
+              <a:buSzPts val="1200"/>
               <a:buFont typeface="Calibri"/>
               <a:buNone/>
               <a:defRPr/>
@@ -6710,7 +6710,7 @@
               <a:buClr>
                 <a:srgbClr val="888888"/>
               </a:buClr>
-              <a:buSzPts val="900"/>
+              <a:buSzPts val="1200"/>
               <a:buFont typeface="Calibri"/>
               <a:buNone/>
               <a:defRPr/>
@@ -6939,8 +6939,8 @@
         </p:nvSpPr>
         <p:spPr>
           <a:xfrm>
-            <a:off x="342900" y="205978"/>
-            <a:ext cx="6172200" cy="857250"/>
+            <a:off x="457189" y="274630"/>
+            <a:ext cx="8229394" cy="1142971"/>
           </a:xfrm>
           <a:prstGeom prst="rect">
             <a:avLst/>
@@ -6951,7 +6951,7 @@
           </a:ln>
         </p:spPr>
         <p:txBody>
-          <a:bodyPr anchorCtr="0" anchor="ctr" bIns="45700" lIns="91425" spcFirstLastPara="1" rIns="91425" wrap="square" tIns="45700">
+          <a:bodyPr anchorCtr="0" anchor="ctr" bIns="60932" lIns="121897" spcFirstLastPara="1" rIns="121897" wrap="square" tIns="60932">
             <a:normAutofit/>
           </a:bodyPr>
           <a:lstStyle>
@@ -6965,7 +6965,7 @@
               <a:buClr>
                 <a:schemeClr val="dk1"/>
               </a:buClr>
-              <a:buSzPts val="1800"/>
+              <a:buSzPts val="2400"/>
               <a:buNone/>
               <a:defRPr/>
             </a:lvl1pPr>
@@ -6976,7 +6976,7 @@
               <a:spcAft>
                 <a:spcPts val="0"/>
               </a:spcAft>
-              <a:buSzPts val="1400"/>
+              <a:buSzPts val="1867"/>
               <a:buNone/>
               <a:defRPr/>
             </a:lvl2pPr>
@@ -6987,7 +6987,7 @@
               <a:spcAft>
                 <a:spcPts val="0"/>
               </a:spcAft>
-              <a:buSzPts val="1400"/>
+              <a:buSzPts val="1867"/>
               <a:buNone/>
               <a:defRPr/>
             </a:lvl3pPr>
@@ -6998,7 +6998,7 @@
               <a:spcAft>
                 <a:spcPts val="0"/>
               </a:spcAft>
-              <a:buSzPts val="1400"/>
+              <a:buSzPts val="1867"/>
               <a:buNone/>
               <a:defRPr/>
             </a:lvl4pPr>
@@ -7009,7 +7009,7 @@
               <a:spcAft>
                 <a:spcPts val="0"/>
               </a:spcAft>
-              <a:buSzPts val="1400"/>
+              <a:buSzPts val="1867"/>
               <a:buNone/>
               <a:defRPr/>
             </a:lvl5pPr>
@@ -7020,7 +7020,7 @@
               <a:spcAft>
                 <a:spcPts val="0"/>
               </a:spcAft>
-              <a:buSzPts val="1400"/>
+              <a:buSzPts val="1867"/>
               <a:buNone/>
               <a:defRPr/>
             </a:lvl6pPr>
@@ -7031,7 +7031,7 @@
               <a:spcAft>
                 <a:spcPts val="0"/>
               </a:spcAft>
-              <a:buSzPts val="1400"/>
+              <a:buSzPts val="1867"/>
               <a:buNone/>
               <a:defRPr/>
             </a:lvl7pPr>
@@ -7042,7 +7042,7 @@
               <a:spcAft>
                 <a:spcPts val="0"/>
               </a:spcAft>
-              <a:buSzPts val="1400"/>
+              <a:buSzPts val="1867"/>
               <a:buNone/>
               <a:defRPr/>
             </a:lvl8pPr>
@@ -7053,7 +7053,7 @@
               <a:spcAft>
                 <a:spcPts val="0"/>
               </a:spcAft>
-              <a:buSzPts val="1400"/>
+              <a:buSzPts val="1867"/>
               <a:buNone/>
               <a:defRPr/>
             </a:lvl9pPr>
@@ -7071,8 +7071,8 @@
         </p:nvSpPr>
         <p:spPr>
           <a:xfrm>
-            <a:off x="342900" y="1200151"/>
-            <a:ext cx="3028950" cy="3394472"/>
+            <a:off x="457189" y="1600161"/>
+            <a:ext cx="4038499" cy="4525849"/>
           </a:xfrm>
           <a:prstGeom prst="rect">
             <a:avLst/>
@@ -7083,13 +7083,13 @@
           </a:ln>
         </p:spPr>
         <p:txBody>
-          <a:bodyPr anchorCtr="0" anchor="t" bIns="45700" lIns="91425" spcFirstLastPara="1" rIns="91425" wrap="square" tIns="45700">
+          <a:bodyPr anchorCtr="0" anchor="t" bIns="60932" lIns="121897" spcFirstLastPara="1" rIns="121897" wrap="square" tIns="60932">
             <a:normAutofit/>
           </a:bodyPr>
           <a:lstStyle>
             <a:lvl1pPr indent="-361950" lvl="0" marL="457200" algn="l">
               <a:spcBef>
-                <a:spcPts val="420"/>
+                <a:spcPts val="560"/>
               </a:spcBef>
               <a:spcAft>
                 <a:spcPts val="0"/>
@@ -7097,11 +7097,39 @@
               <a:buClr>
                 <a:schemeClr val="dk1"/>
               </a:buClr>
-              <a:buSzPts val="2100"/>
+              <a:buSzPts val="2800"/>
               <a:buChar char="•"/>
-              <a:defRPr sz="2100"/>
+              <a:defRPr sz="2800"/>
             </a:lvl1pPr>
             <a:lvl2pPr indent="-342900" lvl="1" marL="914400" algn="l">
+              <a:spcBef>
+                <a:spcPts val="480"/>
+              </a:spcBef>
+              <a:spcAft>
+                <a:spcPts val="0"/>
+              </a:spcAft>
+              <a:buClr>
+                <a:schemeClr val="dk1"/>
+              </a:buClr>
+              <a:buSzPts val="2400"/>
+              <a:buChar char="–"/>
+              <a:defRPr sz="2400"/>
+            </a:lvl2pPr>
+            <a:lvl3pPr indent="-323850" lvl="2" marL="1371600" algn="l">
+              <a:spcBef>
+                <a:spcPts val="400"/>
+              </a:spcBef>
+              <a:spcAft>
+                <a:spcPts val="0"/>
+              </a:spcAft>
+              <a:buClr>
+                <a:schemeClr val="dk1"/>
+              </a:buClr>
+              <a:buSzPts val="2000"/>
+              <a:buChar char="•"/>
+              <a:defRPr sz="2000"/>
+            </a:lvl3pPr>
+            <a:lvl4pPr indent="-314325" lvl="3" marL="1828800" algn="l">
               <a:spcBef>
                 <a:spcPts val="360"/>
               </a:spcBef>
@@ -7114,38 +7142,10 @@
               <a:buSzPts val="1800"/>
               <a:buChar char="–"/>
               <a:defRPr sz="1800"/>
-            </a:lvl2pPr>
-            <a:lvl3pPr indent="-323850" lvl="2" marL="1371600" algn="l">
-              <a:spcBef>
-                <a:spcPts val="300"/>
-              </a:spcBef>
-              <a:spcAft>
-                <a:spcPts val="0"/>
-              </a:spcAft>
-              <a:buClr>
-                <a:schemeClr val="dk1"/>
-              </a:buClr>
-              <a:buSzPts val="1500"/>
-              <a:buChar char="•"/>
-              <a:defRPr sz="1500"/>
-            </a:lvl3pPr>
-            <a:lvl4pPr indent="-314325" lvl="3" marL="1828800" algn="l">
-              <a:spcBef>
-                <a:spcPts val="270"/>
-              </a:spcBef>
-              <a:spcAft>
-                <a:spcPts val="0"/>
-              </a:spcAft>
-              <a:buClr>
-                <a:schemeClr val="dk1"/>
-              </a:buClr>
-              <a:buSzPts val="1350"/>
-              <a:buChar char="–"/>
-              <a:defRPr sz="1350"/>
             </a:lvl4pPr>
             <a:lvl5pPr indent="-314325" lvl="4" marL="2286000" algn="l">
               <a:spcBef>
-                <a:spcPts val="270"/>
+                <a:spcPts val="360"/>
               </a:spcBef>
               <a:spcAft>
                 <a:spcPts val="0"/>
@@ -7153,13 +7153,13 @@
               <a:buClr>
                 <a:schemeClr val="dk1"/>
               </a:buClr>
-              <a:buSzPts val="1350"/>
+              <a:buSzPts val="1800"/>
               <a:buChar char="»"/>
-              <a:defRPr sz="1350"/>
+              <a:defRPr sz="1800"/>
             </a:lvl5pPr>
             <a:lvl6pPr indent="-314325" lvl="5" marL="2743200" algn="l">
               <a:spcBef>
-                <a:spcPts val="270"/>
+                <a:spcPts val="360"/>
               </a:spcBef>
               <a:spcAft>
                 <a:spcPts val="0"/>
@@ -7167,13 +7167,13 @@
               <a:buClr>
                 <a:schemeClr val="dk1"/>
               </a:buClr>
-              <a:buSzPts val="1350"/>
+              <a:buSzPts val="1800"/>
               <a:buChar char="•"/>
-              <a:defRPr sz="1350"/>
+              <a:defRPr sz="1800"/>
             </a:lvl6pPr>
             <a:lvl7pPr indent="-314325" lvl="6" marL="3200400" algn="l">
               <a:spcBef>
-                <a:spcPts val="270"/>
+                <a:spcPts val="360"/>
               </a:spcBef>
               <a:spcAft>
                 <a:spcPts val="0"/>
@@ -7181,13 +7181,13 @@
               <a:buClr>
                 <a:schemeClr val="dk1"/>
               </a:buClr>
-              <a:buSzPts val="1350"/>
+              <a:buSzPts val="1800"/>
               <a:buChar char="•"/>
-              <a:defRPr sz="1350"/>
+              <a:defRPr sz="1800"/>
             </a:lvl7pPr>
             <a:lvl8pPr indent="-314325" lvl="7" marL="3657600" algn="l">
               <a:spcBef>
-                <a:spcPts val="270"/>
+                <a:spcPts val="360"/>
               </a:spcBef>
               <a:spcAft>
                 <a:spcPts val="0"/>
@@ -7195,13 +7195,13 @@
               <a:buClr>
                 <a:schemeClr val="dk1"/>
               </a:buClr>
-              <a:buSzPts val="1350"/>
+              <a:buSzPts val="1800"/>
               <a:buChar char="•"/>
-              <a:defRPr sz="1350"/>
+              <a:defRPr sz="1800"/>
             </a:lvl8pPr>
             <a:lvl9pPr indent="-314325" lvl="8" marL="4114800" algn="l">
               <a:spcBef>
-                <a:spcPts val="270"/>
+                <a:spcPts val="360"/>
               </a:spcBef>
               <a:spcAft>
                 <a:spcPts val="0"/>
@@ -7209,9 +7209,9 @@
               <a:buClr>
                 <a:schemeClr val="dk1"/>
               </a:buClr>
-              <a:buSzPts val="1350"/>
+              <a:buSzPts val="1800"/>
               <a:buChar char="•"/>
-              <a:defRPr sz="1350"/>
+              <a:defRPr sz="1800"/>
             </a:lvl9pPr>
           </a:lstStyle>
           <a:p/>
@@ -7227,8 +7227,8 @@
         </p:nvSpPr>
         <p:spPr>
           <a:xfrm>
-            <a:off x="3486150" y="1200151"/>
-            <a:ext cx="3028950" cy="3394472"/>
+            <a:off x="4648084" y="1600161"/>
+            <a:ext cx="4038499" cy="4525849"/>
           </a:xfrm>
           <a:prstGeom prst="rect">
             <a:avLst/>
@@ -7239,13 +7239,13 @@
           </a:ln>
         </p:spPr>
         <p:txBody>
-          <a:bodyPr anchorCtr="0" anchor="t" bIns="45700" lIns="91425" spcFirstLastPara="1" rIns="91425" wrap="square" tIns="45700">
+          <a:bodyPr anchorCtr="0" anchor="t" bIns="60932" lIns="121897" spcFirstLastPara="1" rIns="121897" wrap="square" tIns="60932">
             <a:normAutofit/>
           </a:bodyPr>
           <a:lstStyle>
             <a:lvl1pPr indent="-361950" lvl="0" marL="457200" algn="l">
               <a:spcBef>
-                <a:spcPts val="420"/>
+                <a:spcPts val="560"/>
               </a:spcBef>
               <a:spcAft>
                 <a:spcPts val="0"/>
@@ -7253,11 +7253,39 @@
               <a:buClr>
                 <a:schemeClr val="dk1"/>
               </a:buClr>
-              <a:buSzPts val="2100"/>
+              <a:buSzPts val="2800"/>
               <a:buChar char="•"/>
-              <a:defRPr sz="2100"/>
+              <a:defRPr sz="2800"/>
             </a:lvl1pPr>
             <a:lvl2pPr indent="-342900" lvl="1" marL="914400" algn="l">
+              <a:spcBef>
+                <a:spcPts val="480"/>
+              </a:spcBef>
+              <a:spcAft>
+                <a:spcPts val="0"/>
+              </a:spcAft>
+              <a:buClr>
+                <a:schemeClr val="dk1"/>
+              </a:buClr>
+              <a:buSzPts val="2400"/>
+              <a:buChar char="–"/>
+              <a:defRPr sz="2400"/>
+            </a:lvl2pPr>
+            <a:lvl3pPr indent="-323850" lvl="2" marL="1371600" algn="l">
+              <a:spcBef>
+                <a:spcPts val="400"/>
+              </a:spcBef>
+              <a:spcAft>
+                <a:spcPts val="0"/>
+              </a:spcAft>
+              <a:buClr>
+                <a:schemeClr val="dk1"/>
+              </a:buClr>
+              <a:buSzPts val="2000"/>
+              <a:buChar char="•"/>
+              <a:defRPr sz="2000"/>
+            </a:lvl3pPr>
+            <a:lvl4pPr indent="-314325" lvl="3" marL="1828800" algn="l">
               <a:spcBef>
                 <a:spcPts val="360"/>
               </a:spcBef>
@@ -7270,38 +7298,10 @@
               <a:buSzPts val="1800"/>
               <a:buChar char="–"/>
               <a:defRPr sz="1800"/>
-            </a:lvl2pPr>
-            <a:lvl3pPr indent="-323850" lvl="2" marL="1371600" algn="l">
-              <a:spcBef>
-                <a:spcPts val="300"/>
-              </a:spcBef>
-              <a:spcAft>
-                <a:spcPts val="0"/>
-              </a:spcAft>
-              <a:buClr>
-                <a:schemeClr val="dk1"/>
-              </a:buClr>
-              <a:buSzPts val="1500"/>
-              <a:buChar char="•"/>
-              <a:defRPr sz="1500"/>
-            </a:lvl3pPr>
-            <a:lvl4pPr indent="-314325" lvl="3" marL="1828800" algn="l">
-              <a:spcBef>
-                <a:spcPts val="270"/>
-              </a:spcBef>
-              <a:spcAft>
-                <a:spcPts val="0"/>
-              </a:spcAft>
-              <a:buClr>
-                <a:schemeClr val="dk1"/>
-              </a:buClr>
-              <a:buSzPts val="1350"/>
-              <a:buChar char="–"/>
-              <a:defRPr sz="1350"/>
             </a:lvl4pPr>
             <a:lvl5pPr indent="-314325" lvl="4" marL="2286000" algn="l">
               <a:spcBef>
-                <a:spcPts val="270"/>
+                <a:spcPts val="360"/>
               </a:spcBef>
               <a:spcAft>
                 <a:spcPts val="0"/>
@@ -7309,13 +7309,13 @@
               <a:buClr>
                 <a:schemeClr val="dk1"/>
               </a:buClr>
-              <a:buSzPts val="1350"/>
+              <a:buSzPts val="1800"/>
               <a:buChar char="»"/>
-              <a:defRPr sz="1350"/>
+              <a:defRPr sz="1800"/>
             </a:lvl5pPr>
             <a:lvl6pPr indent="-314325" lvl="5" marL="2743200" algn="l">
               <a:spcBef>
-                <a:spcPts val="270"/>
+                <a:spcPts val="360"/>
               </a:spcBef>
               <a:spcAft>
                 <a:spcPts val="0"/>
@@ -7323,13 +7323,13 @@
               <a:buClr>
                 <a:schemeClr val="dk1"/>
               </a:buClr>
-              <a:buSzPts val="1350"/>
+              <a:buSzPts val="1800"/>
               <a:buChar char="•"/>
-              <a:defRPr sz="1350"/>
+              <a:defRPr sz="1800"/>
             </a:lvl6pPr>
             <a:lvl7pPr indent="-314325" lvl="6" marL="3200400" algn="l">
               <a:spcBef>
-                <a:spcPts val="270"/>
+                <a:spcPts val="360"/>
               </a:spcBef>
               <a:spcAft>
                 <a:spcPts val="0"/>
@@ -7337,13 +7337,13 @@
               <a:buClr>
                 <a:schemeClr val="dk1"/>
               </a:buClr>
-              <a:buSzPts val="1350"/>
+              <a:buSzPts val="1800"/>
               <a:buChar char="•"/>
-              <a:defRPr sz="1350"/>
+              <a:defRPr sz="1800"/>
             </a:lvl7pPr>
             <a:lvl8pPr indent="-314325" lvl="7" marL="3657600" algn="l">
               <a:spcBef>
-                <a:spcPts val="270"/>
+                <a:spcPts val="360"/>
               </a:spcBef>
               <a:spcAft>
                 <a:spcPts val="0"/>
@@ -7351,13 +7351,13 @@
               <a:buClr>
                 <a:schemeClr val="dk1"/>
               </a:buClr>
-              <a:buSzPts val="1350"/>
+              <a:buSzPts val="1800"/>
               <a:buChar char="•"/>
-              <a:defRPr sz="1350"/>
+              <a:defRPr sz="1800"/>
             </a:lvl8pPr>
             <a:lvl9pPr indent="-314325" lvl="8" marL="4114800" algn="l">
               <a:spcBef>
-                <a:spcPts val="270"/>
+                <a:spcPts val="360"/>
               </a:spcBef>
               <a:spcAft>
                 <a:spcPts val="0"/>
@@ -7365,9 +7365,9 @@
               <a:buClr>
                 <a:schemeClr val="dk1"/>
               </a:buClr>
-              <a:buSzPts val="1350"/>
+              <a:buSzPts val="1800"/>
               <a:buChar char="•"/>
-              <a:defRPr sz="1350"/>
+              <a:defRPr sz="1800"/>
             </a:lvl9pPr>
           </a:lstStyle>
           <a:p/>
@@ -7383,8 +7383,8 @@
         </p:nvSpPr>
         <p:spPr>
           <a:xfrm>
-            <a:off x="342900" y="4767263"/>
-            <a:ext cx="1600200" cy="273844"/>
+            <a:off x="457189" y="6356192"/>
+            <a:ext cx="2133547" cy="365116"/>
           </a:xfrm>
           <a:prstGeom prst="rect">
             <a:avLst/>
@@ -7395,7 +7395,7 @@
           </a:ln>
         </p:spPr>
         <p:txBody>
-          <a:bodyPr anchorCtr="0" anchor="ctr" bIns="45700" lIns="91425" spcFirstLastPara="1" rIns="91425" wrap="square" tIns="45700">
+          <a:bodyPr anchorCtr="0" anchor="ctr" bIns="60932" lIns="121897" spcFirstLastPara="1" rIns="121897" wrap="square" tIns="60932">
             <a:noAutofit/>
           </a:bodyPr>
           <a:lstStyle>
@@ -7412,7 +7412,7 @@
               <a:buClr>
                 <a:srgbClr val="888888"/>
               </a:buClr>
-              <a:buSzPts val="1800"/>
+              <a:buSzPts val="2400"/>
               <a:buNone/>
               <a:defRPr/>
             </a:lvl1pPr>
@@ -7429,7 +7429,7 @@
               <a:buClr>
                 <a:schemeClr val="accent2"/>
               </a:buClr>
-              <a:buSzPts val="1800"/>
+              <a:buSzPts val="2400"/>
               <a:buNone/>
               <a:defRPr/>
             </a:lvl2pPr>
@@ -7446,7 +7446,7 @@
               <a:buClr>
                 <a:schemeClr val="accent2"/>
               </a:buClr>
-              <a:buSzPts val="1800"/>
+              <a:buSzPts val="2400"/>
               <a:buNone/>
               <a:defRPr/>
             </a:lvl3pPr>
@@ -7463,7 +7463,7 @@
               <a:buClr>
                 <a:schemeClr val="accent2"/>
               </a:buClr>
-              <a:buSzPts val="1800"/>
+              <a:buSzPts val="2400"/>
               <a:buNone/>
               <a:defRPr/>
             </a:lvl4pPr>
@@ -7480,7 +7480,7 @@
               <a:buClr>
                 <a:schemeClr val="accent2"/>
               </a:buClr>
-              <a:buSzPts val="1800"/>
+              <a:buSzPts val="2400"/>
               <a:buNone/>
               <a:defRPr/>
             </a:lvl5pPr>
@@ -7497,7 +7497,7 @@
               <a:buClr>
                 <a:schemeClr val="accent2"/>
               </a:buClr>
-              <a:buSzPts val="1800"/>
+              <a:buSzPts val="2400"/>
               <a:buNone/>
               <a:defRPr/>
             </a:lvl6pPr>
@@ -7514,7 +7514,7 @@
               <a:buClr>
                 <a:schemeClr val="accent2"/>
               </a:buClr>
-              <a:buSzPts val="1800"/>
+              <a:buSzPts val="2400"/>
               <a:buNone/>
               <a:defRPr/>
             </a:lvl7pPr>
@@ -7531,7 +7531,7 @@
               <a:buClr>
                 <a:schemeClr val="accent2"/>
               </a:buClr>
-              <a:buSzPts val="1800"/>
+              <a:buSzPts val="2400"/>
               <a:buNone/>
               <a:defRPr/>
             </a:lvl8pPr>
@@ -7548,7 +7548,7 @@
               <a:buClr>
                 <a:schemeClr val="accent2"/>
               </a:buClr>
-              <a:buSzPts val="1800"/>
+              <a:buSzPts val="2400"/>
               <a:buNone/>
               <a:defRPr/>
             </a:lvl9pPr>
@@ -7566,8 +7566,8 @@
         </p:nvSpPr>
         <p:spPr>
           <a:xfrm>
-            <a:off x="2343150" y="4767263"/>
-            <a:ext cx="2171700" cy="273844"/>
+            <a:off x="3124122" y="6356192"/>
+            <a:ext cx="2895528" cy="365116"/>
           </a:xfrm>
           <a:prstGeom prst="rect">
             <a:avLst/>
@@ -7578,7 +7578,7 @@
           </a:ln>
         </p:spPr>
         <p:txBody>
-          <a:bodyPr anchorCtr="0" anchor="ctr" bIns="45700" lIns="91425" spcFirstLastPara="1" rIns="91425" wrap="square" tIns="45700">
+          <a:bodyPr anchorCtr="0" anchor="ctr" bIns="60932" lIns="121897" spcFirstLastPara="1" rIns="121897" wrap="square" tIns="60932">
             <a:noAutofit/>
           </a:bodyPr>
           <a:lstStyle>
@@ -7595,7 +7595,7 @@
               <a:buClr>
                 <a:srgbClr val="888888"/>
               </a:buClr>
-              <a:buSzPts val="1800"/>
+              <a:buSzPts val="2400"/>
               <a:buNone/>
               <a:defRPr/>
             </a:lvl1pPr>
@@ -7612,7 +7612,7 @@
               <a:buClr>
                 <a:schemeClr val="accent2"/>
               </a:buClr>
-              <a:buSzPts val="1800"/>
+              <a:buSzPts val="2400"/>
               <a:buNone/>
               <a:defRPr/>
             </a:lvl2pPr>
@@ -7629,7 +7629,7 @@
               <a:buClr>
                 <a:schemeClr val="accent2"/>
               </a:buClr>
-              <a:buSzPts val="1800"/>
+              <a:buSzPts val="2400"/>
               <a:buNone/>
               <a:defRPr/>
             </a:lvl3pPr>
@@ -7646,7 +7646,7 @@
               <a:buClr>
                 <a:schemeClr val="accent2"/>
               </a:buClr>
-              <a:buSzPts val="1800"/>
+              <a:buSzPts val="2400"/>
               <a:buNone/>
               <a:defRPr/>
             </a:lvl4pPr>
@@ -7663,7 +7663,7 @@
               <a:buClr>
                 <a:schemeClr val="accent2"/>
               </a:buClr>
-              <a:buSzPts val="1800"/>
+              <a:buSzPts val="2400"/>
               <a:buNone/>
               <a:defRPr/>
             </a:lvl5pPr>
@@ -7680,7 +7680,7 @@
               <a:buClr>
                 <a:schemeClr val="accent2"/>
               </a:buClr>
-              <a:buSzPts val="1800"/>
+              <a:buSzPts val="2400"/>
               <a:buNone/>
               <a:defRPr/>
             </a:lvl6pPr>
@@ -7697,7 +7697,7 @@
               <a:buClr>
                 <a:schemeClr val="accent2"/>
               </a:buClr>
-              <a:buSzPts val="1800"/>
+              <a:buSzPts val="2400"/>
               <a:buNone/>
               <a:defRPr/>
             </a:lvl7pPr>
@@ -7714,7 +7714,7 @@
               <a:buClr>
                 <a:schemeClr val="accent2"/>
               </a:buClr>
-              <a:buSzPts val="1800"/>
+              <a:buSzPts val="2400"/>
               <a:buNone/>
               <a:defRPr/>
             </a:lvl8pPr>
@@ -7731,7 +7731,7 @@
               <a:buClr>
                 <a:schemeClr val="accent2"/>
               </a:buClr>
-              <a:buSzPts val="1800"/>
+              <a:buSzPts val="2400"/>
               <a:buNone/>
               <a:defRPr/>
             </a:lvl9pPr>
@@ -7749,8 +7749,8 @@
         </p:nvSpPr>
         <p:spPr>
           <a:xfrm>
-            <a:off x="4914900" y="4767263"/>
-            <a:ext cx="1600200" cy="273844"/>
+            <a:off x="6553036" y="6356192"/>
+            <a:ext cx="2133547" cy="365116"/>
           </a:xfrm>
           <a:prstGeom prst="rect">
             <a:avLst/>
@@ -7761,7 +7761,7 @@
           </a:ln>
         </p:spPr>
         <p:txBody>
-          <a:bodyPr anchorCtr="0" anchor="ctr" bIns="45700" lIns="91425" spcFirstLastPara="1" rIns="91425" wrap="square" tIns="45700">
+          <a:bodyPr anchorCtr="0" anchor="ctr" bIns="60932" lIns="121897" spcFirstLastPara="1" rIns="121897" wrap="square" tIns="60932">
             <a:noAutofit/>
           </a:bodyPr>
           <a:lstStyle>
@@ -7778,7 +7778,7 @@
               <a:buClr>
                 <a:srgbClr val="888888"/>
               </a:buClr>
-              <a:buSzPts val="900"/>
+              <a:buSzPts val="1200"/>
               <a:buFont typeface="Calibri"/>
               <a:buNone/>
               <a:defRPr/>
@@ -7796,7 +7796,7 @@
               <a:buClr>
                 <a:srgbClr val="888888"/>
               </a:buClr>
-              <a:buSzPts val="900"/>
+              <a:buSzPts val="1200"/>
               <a:buFont typeface="Calibri"/>
               <a:buNone/>
               <a:defRPr/>
@@ -7814,7 +7814,7 @@
               <a:buClr>
                 <a:srgbClr val="888888"/>
               </a:buClr>
-              <a:buSzPts val="900"/>
+              <a:buSzPts val="1200"/>
               <a:buFont typeface="Calibri"/>
               <a:buNone/>
               <a:defRPr/>
@@ -7832,7 +7832,7 @@
               <a:buClr>
                 <a:srgbClr val="888888"/>
               </a:buClr>
-              <a:buSzPts val="900"/>
+              <a:buSzPts val="1200"/>
               <a:buFont typeface="Calibri"/>
               <a:buNone/>
               <a:defRPr/>
@@ -7850,7 +7850,7 @@
               <a:buClr>
                 <a:srgbClr val="888888"/>
               </a:buClr>
-              <a:buSzPts val="900"/>
+              <a:buSzPts val="1200"/>
               <a:buFont typeface="Calibri"/>
               <a:buNone/>
               <a:defRPr/>
@@ -7868,7 +7868,7 @@
               <a:buClr>
                 <a:srgbClr val="888888"/>
               </a:buClr>
-              <a:buSzPts val="900"/>
+              <a:buSzPts val="1200"/>
               <a:buFont typeface="Calibri"/>
               <a:buNone/>
               <a:defRPr/>
@@ -7886,7 +7886,7 @@
               <a:buClr>
                 <a:srgbClr val="888888"/>
               </a:buClr>
-              <a:buSzPts val="900"/>
+              <a:buSzPts val="1200"/>
               <a:buFont typeface="Calibri"/>
               <a:buNone/>
               <a:defRPr/>
@@ -7904,7 +7904,7 @@
               <a:buClr>
                 <a:srgbClr val="888888"/>
               </a:buClr>
-              <a:buSzPts val="900"/>
+              <a:buSzPts val="1200"/>
               <a:buFont typeface="Calibri"/>
               <a:buNone/>
               <a:defRPr/>
@@ -7922,7 +7922,7 @@
               <a:buClr>
                 <a:srgbClr val="888888"/>
               </a:buClr>
-              <a:buSzPts val="900"/>
+              <a:buSzPts val="1200"/>
               <a:buFont typeface="Calibri"/>
               <a:buNone/>
               <a:defRPr/>
@@ -7981,8 +7981,8 @@
         </p:nvSpPr>
         <p:spPr>
           <a:xfrm>
-            <a:off x="342900" y="205978"/>
-            <a:ext cx="6172200" cy="857250"/>
+            <a:off x="457189" y="274630"/>
+            <a:ext cx="8229394" cy="1142971"/>
           </a:xfrm>
           <a:prstGeom prst="rect">
             <a:avLst/>
@@ -7993,7 +7993,7 @@
           </a:ln>
         </p:spPr>
         <p:txBody>
-          <a:bodyPr anchorCtr="0" anchor="ctr" bIns="45700" lIns="91425" spcFirstLastPara="1" rIns="91425" wrap="square" tIns="45700">
+          <a:bodyPr anchorCtr="0" anchor="ctr" bIns="60932" lIns="121897" spcFirstLastPara="1" rIns="121897" wrap="square" tIns="60932">
             <a:normAutofit/>
           </a:bodyPr>
           <a:lstStyle>
@@ -8007,7 +8007,7 @@
               <a:buClr>
                 <a:schemeClr val="dk1"/>
               </a:buClr>
-              <a:buSzPts val="3300"/>
+              <a:buSzPts val="4400"/>
               <a:buFont typeface="Calibri"/>
               <a:buNone/>
               <a:defRPr/>
@@ -8019,7 +8019,7 @@
               <a:spcAft>
                 <a:spcPts val="0"/>
               </a:spcAft>
-              <a:buSzPts val="1400"/>
+              <a:buSzPts val="1867"/>
               <a:buNone/>
               <a:defRPr/>
             </a:lvl2pPr>
@@ -8030,7 +8030,7 @@
               <a:spcAft>
                 <a:spcPts val="0"/>
               </a:spcAft>
-              <a:buSzPts val="1400"/>
+              <a:buSzPts val="1867"/>
               <a:buNone/>
               <a:defRPr/>
             </a:lvl3pPr>
@@ -8041,7 +8041,7 @@
               <a:spcAft>
                 <a:spcPts val="0"/>
               </a:spcAft>
-              <a:buSzPts val="1400"/>
+              <a:buSzPts val="1867"/>
               <a:buNone/>
               <a:defRPr/>
             </a:lvl4pPr>
@@ -8052,7 +8052,7 @@
               <a:spcAft>
                 <a:spcPts val="0"/>
               </a:spcAft>
-              <a:buSzPts val="1400"/>
+              <a:buSzPts val="1867"/>
               <a:buNone/>
               <a:defRPr/>
             </a:lvl5pPr>
@@ -8063,7 +8063,7 @@
               <a:spcAft>
                 <a:spcPts val="0"/>
               </a:spcAft>
-              <a:buSzPts val="1400"/>
+              <a:buSzPts val="1867"/>
               <a:buNone/>
               <a:defRPr/>
             </a:lvl6pPr>
@@ -8074,7 +8074,7 @@
               <a:spcAft>
                 <a:spcPts val="0"/>
               </a:spcAft>
-              <a:buSzPts val="1400"/>
+              <a:buSzPts val="1867"/>
               <a:buNone/>
               <a:defRPr/>
             </a:lvl7pPr>
@@ -8085,7 +8085,7 @@
               <a:spcAft>
                 <a:spcPts val="0"/>
               </a:spcAft>
-              <a:buSzPts val="1400"/>
+              <a:buSzPts val="1867"/>
               <a:buNone/>
               <a:defRPr/>
             </a:lvl8pPr>
@@ -8096,7 +8096,7 @@
               <a:spcAft>
                 <a:spcPts val="0"/>
               </a:spcAft>
-              <a:buSzPts val="1400"/>
+              <a:buSzPts val="1867"/>
               <a:buNone/>
               <a:defRPr/>
             </a:lvl9pPr>
@@ -8114,8 +8114,8 @@
         </p:nvSpPr>
         <p:spPr>
           <a:xfrm>
-            <a:off x="342900" y="1151335"/>
-            <a:ext cx="3030141" cy="479822"/>
+            <a:off x="457189" y="1535075"/>
+            <a:ext cx="4040087" cy="639747"/>
           </a:xfrm>
           <a:prstGeom prst="rect">
             <a:avLst/>
@@ -8126,13 +8126,13 @@
           </a:ln>
         </p:spPr>
         <p:txBody>
-          <a:bodyPr anchorCtr="0" anchor="b" bIns="45700" lIns="91425" spcFirstLastPara="1" rIns="91425" wrap="square" tIns="45700">
+          <a:bodyPr anchorCtr="0" anchor="b" bIns="60932" lIns="121897" spcFirstLastPara="1" rIns="121897" wrap="square" tIns="60932">
             <a:normAutofit/>
           </a:bodyPr>
           <a:lstStyle>
             <a:lvl1pPr indent="-228600" lvl="0" marL="457200" algn="l">
               <a:spcBef>
-                <a:spcPts val="360"/>
+                <a:spcPts val="480"/>
               </a:spcBef>
               <a:spcAft>
                 <a:spcPts val="0"/>
@@ -8140,13 +8140,13 @@
               <a:buClr>
                 <a:schemeClr val="dk1"/>
               </a:buClr>
-              <a:buSzPts val="1800"/>
-              <a:buNone/>
-              <a:defRPr b="1" sz="1800"/>
+              <a:buSzPts val="2400"/>
+              <a:buNone/>
+              <a:defRPr b="1" sz="2400"/>
             </a:lvl1pPr>
             <a:lvl2pPr indent="-228600" lvl="1" marL="914400" algn="l">
               <a:spcBef>
-                <a:spcPts val="300"/>
+                <a:spcPts val="400"/>
               </a:spcBef>
               <a:spcAft>
                 <a:spcPts val="0"/>
@@ -8154,13 +8154,13 @@
               <a:buClr>
                 <a:schemeClr val="dk1"/>
               </a:buClr>
-              <a:buSzPts val="1500"/>
-              <a:buNone/>
-              <a:defRPr b="1" sz="1500"/>
+              <a:buSzPts val="2000"/>
+              <a:buNone/>
+              <a:defRPr b="1" sz="2000"/>
             </a:lvl2pPr>
             <a:lvl3pPr indent="-228600" lvl="2" marL="1371600" algn="l">
               <a:spcBef>
-                <a:spcPts val="270"/>
+                <a:spcPts val="360"/>
               </a:spcBef>
               <a:spcAft>
                 <a:spcPts val="0"/>
@@ -8168,13 +8168,13 @@
               <a:buClr>
                 <a:schemeClr val="dk1"/>
               </a:buClr>
-              <a:buSzPts val="1350"/>
-              <a:buNone/>
-              <a:defRPr b="1" sz="1350"/>
+              <a:buSzPts val="1800"/>
+              <a:buNone/>
+              <a:defRPr b="1" sz="1800"/>
             </a:lvl3pPr>
             <a:lvl4pPr indent="-228600" lvl="3" marL="1828800" algn="l">
               <a:spcBef>
-                <a:spcPts val="240"/>
+                <a:spcPts val="320"/>
               </a:spcBef>
               <a:spcAft>
                 <a:spcPts val="0"/>
@@ -8182,13 +8182,13 @@
               <a:buClr>
                 <a:schemeClr val="dk1"/>
               </a:buClr>
-              <a:buSzPts val="1200"/>
-              <a:buNone/>
-              <a:defRPr b="1" sz="1200"/>
+              <a:buSzPts val="1600"/>
+              <a:buNone/>
+              <a:defRPr b="1" sz="1600"/>
             </a:lvl4pPr>
             <a:lvl5pPr indent="-228600" lvl="4" marL="2286000" algn="l">
               <a:spcBef>
-                <a:spcPts val="240"/>
+                <a:spcPts val="320"/>
               </a:spcBef>
               <a:spcAft>
                 <a:spcPts val="0"/>
@@ -8196,13 +8196,13 @@
               <a:buClr>
                 <a:schemeClr val="dk1"/>
               </a:buClr>
-              <a:buSzPts val="1200"/>
-              <a:buNone/>
-              <a:defRPr b="1" sz="1200"/>
+              <a:buSzPts val="1600"/>
+              <a:buNone/>
+              <a:defRPr b="1" sz="1600"/>
             </a:lvl5pPr>
             <a:lvl6pPr indent="-228600" lvl="5" marL="2743200" algn="l">
               <a:spcBef>
-                <a:spcPts val="240"/>
+                <a:spcPts val="320"/>
               </a:spcBef>
               <a:spcAft>
                 <a:spcPts val="0"/>
@@ -8210,13 +8210,13 @@
               <a:buClr>
                 <a:schemeClr val="dk1"/>
               </a:buClr>
-              <a:buSzPts val="1200"/>
-              <a:buNone/>
-              <a:defRPr b="1" sz="1200"/>
+              <a:buSzPts val="1600"/>
+              <a:buNone/>
+              <a:defRPr b="1" sz="1600"/>
             </a:lvl6pPr>
             <a:lvl7pPr indent="-228600" lvl="6" marL="3200400" algn="l">
               <a:spcBef>
-                <a:spcPts val="240"/>
+                <a:spcPts val="320"/>
               </a:spcBef>
               <a:spcAft>
                 <a:spcPts val="0"/>
@@ -8224,13 +8224,13 @@
               <a:buClr>
                 <a:schemeClr val="dk1"/>
               </a:buClr>
-              <a:buSzPts val="1200"/>
-              <a:buNone/>
-              <a:defRPr b="1" sz="1200"/>
+              <a:buSzPts val="1600"/>
+              <a:buNone/>
+              <a:defRPr b="1" sz="1600"/>
             </a:lvl7pPr>
             <a:lvl8pPr indent="-228600" lvl="7" marL="3657600" algn="l">
               <a:spcBef>
-                <a:spcPts val="240"/>
+                <a:spcPts val="320"/>
               </a:spcBef>
               <a:spcAft>
                 <a:spcPts val="0"/>
@@ -8238,13 +8238,13 @@
               <a:buClr>
                 <a:schemeClr val="dk1"/>
               </a:buClr>
-              <a:buSzPts val="1200"/>
-              <a:buNone/>
-              <a:defRPr b="1" sz="1200"/>
+              <a:buSzPts val="1600"/>
+              <a:buNone/>
+              <a:defRPr b="1" sz="1600"/>
             </a:lvl8pPr>
             <a:lvl9pPr indent="-228600" lvl="8" marL="4114800" algn="l">
               <a:spcBef>
-                <a:spcPts val="240"/>
+                <a:spcPts val="320"/>
               </a:spcBef>
               <a:spcAft>
                 <a:spcPts val="0"/>
@@ -8252,9 +8252,9 @@
               <a:buClr>
                 <a:schemeClr val="dk1"/>
               </a:buClr>
-              <a:buSzPts val="1200"/>
-              <a:buNone/>
-              <a:defRPr b="1" sz="1200"/>
+              <a:buSzPts val="1600"/>
+              <a:buNone/>
+              <a:defRPr b="1" sz="1600"/>
             </a:lvl9pPr>
           </a:lstStyle>
           <a:p/>
@@ -8270,8 +8270,8 @@
         </p:nvSpPr>
         <p:spPr>
           <a:xfrm>
-            <a:off x="342900" y="1631156"/>
-            <a:ext cx="3030141" cy="2963466"/>
+            <a:off x="457189" y="2174820"/>
+            <a:ext cx="4040087" cy="3951189"/>
           </a:xfrm>
           <a:prstGeom prst="rect">
             <a:avLst/>
@@ -8282,12 +8282,40 @@
           </a:ln>
         </p:spPr>
         <p:txBody>
-          <a:bodyPr anchorCtr="0" anchor="t" bIns="45700" lIns="91425" spcFirstLastPara="1" rIns="91425" wrap="square" tIns="45700">
+          <a:bodyPr anchorCtr="0" anchor="t" bIns="60932" lIns="121897" spcFirstLastPara="1" rIns="121897" wrap="square" tIns="60932">
             <a:normAutofit/>
           </a:bodyPr>
           <a:lstStyle>
             <a:lvl1pPr indent="-342900" lvl="0" marL="457200" algn="l">
               <a:spcBef>
+                <a:spcPts val="480"/>
+              </a:spcBef>
+              <a:spcAft>
+                <a:spcPts val="0"/>
+              </a:spcAft>
+              <a:buClr>
+                <a:schemeClr val="dk1"/>
+              </a:buClr>
+              <a:buSzPts val="2400"/>
+              <a:buChar char="•"/>
+              <a:defRPr sz="2400"/>
+            </a:lvl1pPr>
+            <a:lvl2pPr indent="-323850" lvl="1" marL="914400" algn="l">
+              <a:spcBef>
+                <a:spcPts val="400"/>
+              </a:spcBef>
+              <a:spcAft>
+                <a:spcPts val="0"/>
+              </a:spcAft>
+              <a:buClr>
+                <a:schemeClr val="dk1"/>
+              </a:buClr>
+              <a:buSzPts val="2000"/>
+              <a:buChar char="–"/>
+              <a:defRPr sz="2000"/>
+            </a:lvl2pPr>
+            <a:lvl3pPr indent="-314325" lvl="2" marL="1371600" algn="l">
+              <a:spcBef>
                 <a:spcPts val="360"/>
               </a:spcBef>
               <a:spcAft>
@@ -8299,38 +8327,10 @@
               <a:buSzPts val="1800"/>
               <a:buChar char="•"/>
               <a:defRPr sz="1800"/>
-            </a:lvl1pPr>
-            <a:lvl2pPr indent="-323850" lvl="1" marL="914400" algn="l">
-              <a:spcBef>
-                <a:spcPts val="300"/>
-              </a:spcBef>
-              <a:spcAft>
-                <a:spcPts val="0"/>
-              </a:spcAft>
-              <a:buClr>
-                <a:schemeClr val="dk1"/>
-              </a:buClr>
-              <a:buSzPts val="1500"/>
-              <a:buChar char="–"/>
-              <a:defRPr sz="1500"/>
-            </a:lvl2pPr>
-            <a:lvl3pPr indent="-314325" lvl="2" marL="1371600" algn="l">
-              <a:spcBef>
-                <a:spcPts val="270"/>
-              </a:spcBef>
-              <a:spcAft>
-                <a:spcPts val="0"/>
-              </a:spcAft>
-              <a:buClr>
-                <a:schemeClr val="dk1"/>
-              </a:buClr>
-              <a:buSzPts val="1350"/>
-              <a:buChar char="•"/>
-              <a:defRPr sz="1350"/>
             </a:lvl3pPr>
             <a:lvl4pPr indent="-304800" lvl="3" marL="1828800" algn="l">
               <a:spcBef>
-                <a:spcPts val="240"/>
+                <a:spcPts val="320"/>
               </a:spcBef>
               <a:spcAft>
                 <a:spcPts val="0"/>
@@ -8338,13 +8338,13 @@
               <a:buClr>
                 <a:schemeClr val="dk1"/>
               </a:buClr>
-              <a:buSzPts val="1200"/>
+              <a:buSzPts val="1600"/>
               <a:buChar char="–"/>
-              <a:defRPr sz="1200"/>
+              <a:defRPr sz="1600"/>
             </a:lvl4pPr>
             <a:lvl5pPr indent="-304800" lvl="4" marL="2286000" algn="l">
               <a:spcBef>
-                <a:spcPts val="240"/>
+                <a:spcPts val="320"/>
               </a:spcBef>
               <a:spcAft>
                 <a:spcPts val="0"/>
@@ -8352,13 +8352,13 @@
               <a:buClr>
                 <a:schemeClr val="dk1"/>
               </a:buClr>
-              <a:buSzPts val="1200"/>
+              <a:buSzPts val="1600"/>
               <a:buChar char="»"/>
-              <a:defRPr sz="1200"/>
+              <a:defRPr sz="1600"/>
             </a:lvl5pPr>
             <a:lvl6pPr indent="-304800" lvl="5" marL="2743200" algn="l">
               <a:spcBef>
-                <a:spcPts val="240"/>
+                <a:spcPts val="320"/>
               </a:spcBef>
               <a:spcAft>
                 <a:spcPts val="0"/>
@@ -8366,13 +8366,13 @@
               <a:buClr>
                 <a:schemeClr val="dk1"/>
               </a:buClr>
-              <a:buSzPts val="1200"/>
+              <a:buSzPts val="1600"/>
               <a:buChar char="•"/>
-              <a:defRPr sz="1200"/>
+              <a:defRPr sz="1600"/>
             </a:lvl6pPr>
             <a:lvl7pPr indent="-304800" lvl="6" marL="3200400" algn="l">
               <a:spcBef>
-                <a:spcPts val="240"/>
+                <a:spcPts val="320"/>
               </a:spcBef>
               <a:spcAft>
                 <a:spcPts val="0"/>
@@ -8380,13 +8380,13 @@
               <a:buClr>
                 <a:schemeClr val="dk1"/>
               </a:buClr>
-              <a:buSzPts val="1200"/>
+              <a:buSzPts val="1600"/>
               <a:buChar char="•"/>
-              <a:defRPr sz="1200"/>
+              <a:defRPr sz="1600"/>
             </a:lvl7pPr>
             <a:lvl8pPr indent="-304800" lvl="7" marL="3657600" algn="l">
               <a:spcBef>
-                <a:spcPts val="240"/>
+                <a:spcPts val="320"/>
               </a:spcBef>
               <a:spcAft>
                 <a:spcPts val="0"/>
@@ -8394,13 +8394,13 @@
               <a:buClr>
                 <a:schemeClr val="dk1"/>
               </a:buClr>
-              <a:buSzPts val="1200"/>
+              <a:buSzPts val="1600"/>
               <a:buChar char="•"/>
-              <a:defRPr sz="1200"/>
+              <a:defRPr sz="1600"/>
             </a:lvl8pPr>
             <a:lvl9pPr indent="-304800" lvl="8" marL="4114800" algn="l">
               <a:spcBef>
-                <a:spcPts val="240"/>
+                <a:spcPts val="320"/>
               </a:spcBef>
               <a:spcAft>
                 <a:spcPts val="0"/>
@@ -8408,9 +8408,9 @@
               <a:buClr>
                 <a:schemeClr val="dk1"/>
               </a:buClr>
-              <a:buSzPts val="1200"/>
+              <a:buSzPts val="1600"/>
               <a:buChar char="•"/>
-              <a:defRPr sz="1200"/>
+              <a:defRPr sz="1600"/>
             </a:lvl9pPr>
           </a:lstStyle>
           <a:p/>
@@ -8426,8 +8426,8 @@
         </p:nvSpPr>
         <p:spPr>
           <a:xfrm>
-            <a:off x="3483769" y="1151335"/>
-            <a:ext cx="3031331" cy="479822"/>
+            <a:off x="4644909" y="1535075"/>
+            <a:ext cx="4041674" cy="639747"/>
           </a:xfrm>
           <a:prstGeom prst="rect">
             <a:avLst/>
@@ -8438,13 +8438,13 @@
           </a:ln>
         </p:spPr>
         <p:txBody>
-          <a:bodyPr anchorCtr="0" anchor="b" bIns="45700" lIns="91425" spcFirstLastPara="1" rIns="91425" wrap="square" tIns="45700">
+          <a:bodyPr anchorCtr="0" anchor="b" bIns="60932" lIns="121897" spcFirstLastPara="1" rIns="121897" wrap="square" tIns="60932">
             <a:normAutofit/>
           </a:bodyPr>
           <a:lstStyle>
             <a:lvl1pPr indent="-228600" lvl="0" marL="457200" algn="l">
               <a:spcBef>
-                <a:spcPts val="360"/>
+                <a:spcPts val="480"/>
               </a:spcBef>
               <a:spcAft>
                 <a:spcPts val="0"/>
@@ -8452,13 +8452,13 @@
               <a:buClr>
                 <a:schemeClr val="dk1"/>
               </a:buClr>
-              <a:buSzPts val="1800"/>
-              <a:buNone/>
-              <a:defRPr b="1" sz="1800"/>
+              <a:buSzPts val="2400"/>
+              <a:buNone/>
+              <a:defRPr b="1" sz="2400"/>
             </a:lvl1pPr>
             <a:lvl2pPr indent="-228600" lvl="1" marL="914400" algn="l">
               <a:spcBef>
-                <a:spcPts val="300"/>
+                <a:spcPts val="400"/>
               </a:spcBef>
               <a:spcAft>
                 <a:spcPts val="0"/>
@@ -8466,13 +8466,13 @@
               <a:buClr>
                 <a:schemeClr val="dk1"/>
               </a:buClr>
-              <a:buSzPts val="1500"/>
-              <a:buNone/>
-              <a:defRPr b="1" sz="1500"/>
+              <a:buSzPts val="2000"/>
+              <a:buNone/>
+              <a:defRPr b="1" sz="2000"/>
             </a:lvl2pPr>
             <a:lvl3pPr indent="-228600" lvl="2" marL="1371600" algn="l">
               <a:spcBef>
-                <a:spcPts val="270"/>
+                <a:spcPts val="360"/>
               </a:spcBef>
               <a:spcAft>
                 <a:spcPts val="0"/>
@@ -8480,13 +8480,13 @@
               <a:buClr>
                 <a:schemeClr val="dk1"/>
               </a:buClr>
-              <a:buSzPts val="1350"/>
-              <a:buNone/>
-              <a:defRPr b="1" sz="1350"/>
+              <a:buSzPts val="1800"/>
+              <a:buNone/>
+              <a:defRPr b="1" sz="1800"/>
             </a:lvl3pPr>
             <a:lvl4pPr indent="-228600" lvl="3" marL="1828800" algn="l">
               <a:spcBef>
-                <a:spcPts val="240"/>
+                <a:spcPts val="320"/>
               </a:spcBef>
               <a:spcAft>
                 <a:spcPts val="0"/>
@@ -8494,13 +8494,13 @@
               <a:buClr>
                 <a:schemeClr val="dk1"/>
               </a:buClr>
-              <a:buSzPts val="1200"/>
-              <a:buNone/>
-              <a:defRPr b="1" sz="1200"/>
+              <a:buSzPts val="1600"/>
+              <a:buNone/>
+              <a:defRPr b="1" sz="1600"/>
             </a:lvl4pPr>
             <a:lvl5pPr indent="-228600" lvl="4" marL="2286000" algn="l">
               <a:spcBef>
-                <a:spcPts val="240"/>
+                <a:spcPts val="320"/>
               </a:spcBef>
               <a:spcAft>
                 <a:spcPts val="0"/>
@@ -8508,13 +8508,13 @@
               <a:buClr>
                 <a:schemeClr val="dk1"/>
               </a:buClr>
-              <a:buSzPts val="1200"/>
-              <a:buNone/>
-              <a:defRPr b="1" sz="1200"/>
+              <a:buSzPts val="1600"/>
+              <a:buNone/>
+              <a:defRPr b="1" sz="1600"/>
             </a:lvl5pPr>
             <a:lvl6pPr indent="-228600" lvl="5" marL="2743200" algn="l">
               <a:spcBef>
-                <a:spcPts val="240"/>
+                <a:spcPts val="320"/>
               </a:spcBef>
               <a:spcAft>
                 <a:spcPts val="0"/>
@@ -8522,13 +8522,13 @@
               <a:buClr>
                 <a:schemeClr val="dk1"/>
               </a:buClr>
-              <a:buSzPts val="1200"/>
-              <a:buNone/>
-              <a:defRPr b="1" sz="1200"/>
+              <a:buSzPts val="1600"/>
+              <a:buNone/>
+              <a:defRPr b="1" sz="1600"/>
             </a:lvl6pPr>
             <a:lvl7pPr indent="-228600" lvl="6" marL="3200400" algn="l">
               <a:spcBef>
-                <a:spcPts val="240"/>
+                <a:spcPts val="320"/>
               </a:spcBef>
               <a:spcAft>
                 <a:spcPts val="0"/>
@@ -8536,13 +8536,13 @@
               <a:buClr>
                 <a:schemeClr val="dk1"/>
               </a:buClr>
-              <a:buSzPts val="1200"/>
-              <a:buNone/>
-              <a:defRPr b="1" sz="1200"/>
+              <a:buSzPts val="1600"/>
+              <a:buNone/>
+              <a:defRPr b="1" sz="1600"/>
             </a:lvl7pPr>
             <a:lvl8pPr indent="-228600" lvl="7" marL="3657600" algn="l">
               <a:spcBef>
-                <a:spcPts val="240"/>
+                <a:spcPts val="320"/>
               </a:spcBef>
               <a:spcAft>
                 <a:spcPts val="0"/>
@@ -8550,13 +8550,13 @@
               <a:buClr>
                 <a:schemeClr val="dk1"/>
               </a:buClr>
-              <a:buSzPts val="1200"/>
-              <a:buNone/>
-              <a:defRPr b="1" sz="1200"/>
+              <a:buSzPts val="1600"/>
+              <a:buNone/>
+              <a:defRPr b="1" sz="1600"/>
             </a:lvl8pPr>
             <a:lvl9pPr indent="-228600" lvl="8" marL="4114800" algn="l">
               <a:spcBef>
-                <a:spcPts val="240"/>
+                <a:spcPts val="320"/>
               </a:spcBef>
               <a:spcAft>
                 <a:spcPts val="0"/>
@@ -8564,9 +8564,9 @@
               <a:buClr>
                 <a:schemeClr val="dk1"/>
               </a:buClr>
-              <a:buSzPts val="1200"/>
-              <a:buNone/>
-              <a:defRPr b="1" sz="1200"/>
+              <a:buSzPts val="1600"/>
+              <a:buNone/>
+              <a:defRPr b="1" sz="1600"/>
             </a:lvl9pPr>
           </a:lstStyle>
           <a:p/>
@@ -8582,8 +8582,8 @@
         </p:nvSpPr>
         <p:spPr>
           <a:xfrm>
-            <a:off x="3483769" y="1631156"/>
-            <a:ext cx="3031331" cy="2963466"/>
+            <a:off x="4644909" y="2174820"/>
+            <a:ext cx="4041674" cy="3951189"/>
           </a:xfrm>
           <a:prstGeom prst="rect">
             <a:avLst/>
@@ -8594,12 +8594,40 @@
           </a:ln>
         </p:spPr>
         <p:txBody>
-          <a:bodyPr anchorCtr="0" anchor="t" bIns="45700" lIns="91425" spcFirstLastPara="1" rIns="91425" wrap="square" tIns="45700">
+          <a:bodyPr anchorCtr="0" anchor="t" bIns="60932" lIns="121897" spcFirstLastPara="1" rIns="121897" wrap="square" tIns="60932">
             <a:normAutofit/>
           </a:bodyPr>
           <a:lstStyle>
             <a:lvl1pPr indent="-342900" lvl="0" marL="457200" algn="l">
               <a:spcBef>
+                <a:spcPts val="480"/>
+              </a:spcBef>
+              <a:spcAft>
+                <a:spcPts val="0"/>
+              </a:spcAft>
+              <a:buClr>
+                <a:schemeClr val="dk1"/>
+              </a:buClr>
+              <a:buSzPts val="2400"/>
+              <a:buChar char="•"/>
+              <a:defRPr sz="2400"/>
+            </a:lvl1pPr>
+            <a:lvl2pPr indent="-323850" lvl="1" marL="914400" algn="l">
+              <a:spcBef>
+                <a:spcPts val="400"/>
+              </a:spcBef>
+              <a:spcAft>
+                <a:spcPts val="0"/>
+              </a:spcAft>
+              <a:buClr>
+                <a:schemeClr val="dk1"/>
+              </a:buClr>
+              <a:buSzPts val="2000"/>
+              <a:buChar char="–"/>
+              <a:defRPr sz="2000"/>
+            </a:lvl2pPr>
+            <a:lvl3pPr indent="-314325" lvl="2" marL="1371600" algn="l">
+              <a:spcBef>
                 <a:spcPts val="360"/>
               </a:spcBef>
               <a:spcAft>
@@ -8611,38 +8639,10 @@
               <a:buSzPts val="1800"/>
               <a:buChar char="•"/>
               <a:defRPr sz="1800"/>
-            </a:lvl1pPr>
-            <a:lvl2pPr indent="-323850" lvl="1" marL="914400" algn="l">
-              <a:spcBef>
-                <a:spcPts val="300"/>
-              </a:spcBef>
-              <a:spcAft>
-                <a:spcPts val="0"/>
-              </a:spcAft>
-              <a:buClr>
-                <a:schemeClr val="dk1"/>
-              </a:buClr>
-              <a:buSzPts val="1500"/>
-              <a:buChar char="–"/>
-              <a:defRPr sz="1500"/>
-            </a:lvl2pPr>
-            <a:lvl3pPr indent="-314325" lvl="2" marL="1371600" algn="l">
-              <a:spcBef>
-                <a:spcPts val="270"/>
-              </a:spcBef>
-              <a:spcAft>
-                <a:spcPts val="0"/>
-              </a:spcAft>
-              <a:buClr>
-                <a:schemeClr val="dk1"/>
-              </a:buClr>
-              <a:buSzPts val="1350"/>
-              <a:buChar char="•"/>
-              <a:defRPr sz="1350"/>
             </a:lvl3pPr>
             <a:lvl4pPr indent="-304800" lvl="3" marL="1828800" algn="l">
               <a:spcBef>
-                <a:spcPts val="240"/>
+                <a:spcPts val="320"/>
               </a:spcBef>
               <a:spcAft>
                 <a:spcPts val="0"/>
@@ -8650,13 +8650,13 @@
               <a:buClr>
                 <a:schemeClr val="dk1"/>
               </a:buClr>
-              <a:buSzPts val="1200"/>
+              <a:buSzPts val="1600"/>
               <a:buChar char="–"/>
-              <a:defRPr sz="1200"/>
+              <a:defRPr sz="1600"/>
             </a:lvl4pPr>
             <a:lvl5pPr indent="-304800" lvl="4" marL="2286000" algn="l">
               <a:spcBef>
-                <a:spcPts val="240"/>
+                <a:spcPts val="320"/>
               </a:spcBef>
               <a:spcAft>
                 <a:spcPts val="0"/>
@@ -8664,13 +8664,13 @@
               <a:buClr>
                 <a:schemeClr val="dk1"/>
               </a:buClr>
-              <a:buSzPts val="1200"/>
+              <a:buSzPts val="1600"/>
               <a:buChar char="»"/>
-              <a:defRPr sz="1200"/>
+              <a:defRPr sz="1600"/>
             </a:lvl5pPr>
             <a:lvl6pPr indent="-304800" lvl="5" marL="2743200" algn="l">
               <a:spcBef>
-                <a:spcPts val="240"/>
+                <a:spcPts val="320"/>
               </a:spcBef>
               <a:spcAft>
                 <a:spcPts val="0"/>
@@ -8678,13 +8678,13 @@
               <a:buClr>
                 <a:schemeClr val="dk1"/>
               </a:buClr>
-              <a:buSzPts val="1200"/>
+              <a:buSzPts val="1600"/>
               <a:buChar char="•"/>
-              <a:defRPr sz="1200"/>
+              <a:defRPr sz="1600"/>
             </a:lvl6pPr>
             <a:lvl7pPr indent="-304800" lvl="6" marL="3200400" algn="l">
               <a:spcBef>
-                <a:spcPts val="240"/>
+                <a:spcPts val="320"/>
               </a:spcBef>
               <a:spcAft>
                 <a:spcPts val="0"/>
@@ -8692,13 +8692,13 @@
               <a:buClr>
                 <a:schemeClr val="dk1"/>
               </a:buClr>
-              <a:buSzPts val="1200"/>
+              <a:buSzPts val="1600"/>
               <a:buChar char="•"/>
-              <a:defRPr sz="1200"/>
+              <a:defRPr sz="1600"/>
             </a:lvl7pPr>
             <a:lvl8pPr indent="-304800" lvl="7" marL="3657600" algn="l">
               <a:spcBef>
-                <a:spcPts val="240"/>
+                <a:spcPts val="320"/>
               </a:spcBef>
               <a:spcAft>
                 <a:spcPts val="0"/>
@@ -8706,13 +8706,13 @@
               <a:buClr>
                 <a:schemeClr val="dk1"/>
               </a:buClr>
-              <a:buSzPts val="1200"/>
+              <a:buSzPts val="1600"/>
               <a:buChar char="•"/>
-              <a:defRPr sz="1200"/>
+              <a:defRPr sz="1600"/>
             </a:lvl8pPr>
             <a:lvl9pPr indent="-304800" lvl="8" marL="4114800" algn="l">
               <a:spcBef>
-                <a:spcPts val="240"/>
+                <a:spcPts val="320"/>
               </a:spcBef>
               <a:spcAft>
                 <a:spcPts val="0"/>
@@ -8720,9 +8720,9 @@
               <a:buClr>
                 <a:schemeClr val="dk1"/>
               </a:buClr>
-              <a:buSzPts val="1200"/>
+              <a:buSzPts val="1600"/>
               <a:buChar char="•"/>
-              <a:defRPr sz="1200"/>
+              <a:defRPr sz="1600"/>
             </a:lvl9pPr>
           </a:lstStyle>
           <a:p/>
@@ -8738,8 +8738,8 @@
         </p:nvSpPr>
         <p:spPr>
           <a:xfrm>
-            <a:off x="342900" y="4767263"/>
-            <a:ext cx="1600200" cy="273844"/>
+            <a:off x="457189" y="6356192"/>
+            <a:ext cx="2133547" cy="365116"/>
           </a:xfrm>
           <a:prstGeom prst="rect">
             <a:avLst/>
@@ -8750,7 +8750,7 @@
           </a:ln>
         </p:spPr>
         <p:txBody>
-          <a:bodyPr anchorCtr="0" anchor="ctr" bIns="45700" lIns="91425" spcFirstLastPara="1" rIns="91425" wrap="square" tIns="45700">
+          <a:bodyPr anchorCtr="0" anchor="ctr" bIns="60932" lIns="121897" spcFirstLastPara="1" rIns="121897" wrap="square" tIns="60932">
             <a:noAutofit/>
           </a:bodyPr>
           <a:lstStyle>
@@ -8767,7 +8767,7 @@
               <a:buClr>
                 <a:srgbClr val="888888"/>
               </a:buClr>
-              <a:buSzPts val="1800"/>
+              <a:buSzPts val="2400"/>
               <a:buNone/>
               <a:defRPr/>
             </a:lvl1pPr>
@@ -8784,7 +8784,7 @@
               <a:buClr>
                 <a:schemeClr val="accent2"/>
               </a:buClr>
-              <a:buSzPts val="1800"/>
+              <a:buSzPts val="2400"/>
               <a:buNone/>
               <a:defRPr/>
             </a:lvl2pPr>
@@ -8801,7 +8801,7 @@
               <a:buClr>
                 <a:schemeClr val="accent2"/>
               </a:buClr>
-              <a:buSzPts val="1800"/>
+              <a:buSzPts val="2400"/>
               <a:buNone/>
               <a:defRPr/>
             </a:lvl3pPr>
@@ -8818,7 +8818,7 @@
               <a:buClr>
                 <a:schemeClr val="accent2"/>
               </a:buClr>
-              <a:buSzPts val="1800"/>
+              <a:buSzPts val="2400"/>
               <a:buNone/>
               <a:defRPr/>
             </a:lvl4pPr>
@@ -8835,7 +8835,7 @@
               <a:buClr>
                 <a:schemeClr val="accent2"/>
               </a:buClr>
-              <a:buSzPts val="1800"/>
+              <a:buSzPts val="2400"/>
               <a:buNone/>
               <a:defRPr/>
             </a:lvl5pPr>
@@ -8852,7 +8852,7 @@
               <a:buClr>
                 <a:schemeClr val="accent2"/>
               </a:buClr>
-              <a:buSzPts val="1800"/>
+              <a:buSzPts val="2400"/>
               <a:buNone/>
               <a:defRPr/>
             </a:lvl6pPr>
@@ -8869,7 +8869,7 @@
               <a:buClr>
                 <a:schemeClr val="accent2"/>
               </a:buClr>
-              <a:buSzPts val="1800"/>
+              <a:buSzPts val="2400"/>
               <a:buNone/>
               <a:defRPr/>
             </a:lvl7pPr>
@@ -8886,7 +8886,7 @@
               <a:buClr>
                 <a:schemeClr val="accent2"/>
               </a:buClr>
-              <a:buSzPts val="1800"/>
+              <a:buSzPts val="2400"/>
               <a:buNone/>
               <a:defRPr/>
             </a:lvl8pPr>
@@ -8903,7 +8903,7 @@
               <a:buClr>
                 <a:schemeClr val="accent2"/>
               </a:buClr>
-              <a:buSzPts val="1800"/>
+              <a:buSzPts val="2400"/>
               <a:buNone/>
               <a:defRPr/>
             </a:lvl9pPr>
@@ -8921,8 +8921,8 @@
         </p:nvSpPr>
         <p:spPr>
           <a:xfrm>
-            <a:off x="2343150" y="4767263"/>
-            <a:ext cx="2171700" cy="273844"/>
+            <a:off x="3124122" y="6356192"/>
+            <a:ext cx="2895528" cy="365116"/>
           </a:xfrm>
           <a:prstGeom prst="rect">
             <a:avLst/>
@@ -8933,7 +8933,7 @@
           </a:ln>
         </p:spPr>
         <p:txBody>
-          <a:bodyPr anchorCtr="0" anchor="ctr" bIns="45700" lIns="91425" spcFirstLastPara="1" rIns="91425" wrap="square" tIns="45700">
+          <a:bodyPr anchorCtr="0" anchor="ctr" bIns="60932" lIns="121897" spcFirstLastPara="1" rIns="121897" wrap="square" tIns="60932">
             <a:noAutofit/>
           </a:bodyPr>
           <a:lstStyle>
@@ -8950,7 +8950,7 @@
               <a:buClr>
                 <a:srgbClr val="888888"/>
               </a:buClr>
-              <a:buSzPts val="1800"/>
+              <a:buSzPts val="2400"/>
               <a:buNone/>
               <a:defRPr/>
             </a:lvl1pPr>
@@ -8967,7 +8967,7 @@
               <a:buClr>
                 <a:schemeClr val="accent2"/>
               </a:buClr>
-              <a:buSzPts val="1800"/>
+              <a:buSzPts val="2400"/>
               <a:buNone/>
               <a:defRPr/>
             </a:lvl2pPr>
@@ -8984,7 +8984,7 @@
               <a:buClr>
                 <a:schemeClr val="accent2"/>
               </a:buClr>
-              <a:buSzPts val="1800"/>
+              <a:buSzPts val="2400"/>
               <a:buNone/>
               <a:defRPr/>
             </a:lvl3pPr>
@@ -9001,7 +9001,7 @@
               <a:buClr>
                 <a:schemeClr val="accent2"/>
               </a:buClr>
-              <a:buSzPts val="1800"/>
+              <a:buSzPts val="2400"/>
               <a:buNone/>
               <a:defRPr/>
             </a:lvl4pPr>
@@ -9018,7 +9018,7 @@
               <a:buClr>
                 <a:schemeClr val="accent2"/>
               </a:buClr>
-              <a:buSzPts val="1800"/>
+              <a:buSzPts val="2400"/>
               <a:buNone/>
               <a:defRPr/>
             </a:lvl5pPr>
@@ -9035,7 +9035,7 @@
               <a:buClr>
                 <a:schemeClr val="accent2"/>
               </a:buClr>
-              <a:buSzPts val="1800"/>
+              <a:buSzPts val="2400"/>
               <a:buNone/>
               <a:defRPr/>
             </a:lvl6pPr>
@@ -9052,7 +9052,7 @@
               <a:buClr>
                 <a:schemeClr val="accent2"/>
               </a:buClr>
-              <a:buSzPts val="1800"/>
+              <a:buSzPts val="2400"/>
               <a:buNone/>
               <a:defRPr/>
             </a:lvl7pPr>
@@ -9069,7 +9069,7 @@
               <a:buClr>
                 <a:schemeClr val="accent2"/>
               </a:buClr>
-              <a:buSzPts val="1800"/>
+              <a:buSzPts val="2400"/>
               <a:buNone/>
               <a:defRPr/>
             </a:lvl8pPr>
@@ -9086,7 +9086,7 @@
               <a:buClr>
                 <a:schemeClr val="accent2"/>
               </a:buClr>
-              <a:buSzPts val="1800"/>
+              <a:buSzPts val="2400"/>
               <a:buNone/>
               <a:defRPr/>
             </a:lvl9pPr>
@@ -9104,8 +9104,8 @@
         </p:nvSpPr>
         <p:spPr>
           <a:xfrm>
-            <a:off x="4914900" y="4767263"/>
-            <a:ext cx="1600200" cy="273844"/>
+            <a:off x="6553036" y="6356192"/>
+            <a:ext cx="2133547" cy="365116"/>
           </a:xfrm>
           <a:prstGeom prst="rect">
             <a:avLst/>
@@ -9116,7 +9116,7 @@
           </a:ln>
         </p:spPr>
         <p:txBody>
-          <a:bodyPr anchorCtr="0" anchor="ctr" bIns="45700" lIns="91425" spcFirstLastPara="1" rIns="91425" wrap="square" tIns="45700">
+          <a:bodyPr anchorCtr="0" anchor="ctr" bIns="60932" lIns="121897" spcFirstLastPara="1" rIns="121897" wrap="square" tIns="60932">
             <a:noAutofit/>
           </a:bodyPr>
           <a:lstStyle>
@@ -9133,7 +9133,7 @@
               <a:buClr>
                 <a:srgbClr val="888888"/>
               </a:buClr>
-              <a:buSzPts val="900"/>
+              <a:buSzPts val="1200"/>
               <a:buFont typeface="Calibri"/>
               <a:buNone/>
               <a:defRPr/>
@@ -9151,7 +9151,7 @@
               <a:buClr>
                 <a:srgbClr val="888888"/>
               </a:buClr>
-              <a:buSzPts val="900"/>
+              <a:buSzPts val="1200"/>
               <a:buFont typeface="Calibri"/>
               <a:buNone/>
               <a:defRPr/>
@@ -9169,7 +9169,7 @@
               <a:buClr>
                 <a:srgbClr val="888888"/>
               </a:buClr>
-              <a:buSzPts val="900"/>
+              <a:buSzPts val="1200"/>
               <a:buFont typeface="Calibri"/>
               <a:buNone/>
               <a:defRPr/>
@@ -9187,7 +9187,7 @@
               <a:buClr>
                 <a:srgbClr val="888888"/>
               </a:buClr>
-              <a:buSzPts val="900"/>
+              <a:buSzPts val="1200"/>
               <a:buFont typeface="Calibri"/>
               <a:buNone/>
               <a:defRPr/>
@@ -9205,7 +9205,7 @@
               <a:buClr>
                 <a:srgbClr val="888888"/>
               </a:buClr>
-              <a:buSzPts val="900"/>
+              <a:buSzPts val="1200"/>
               <a:buFont typeface="Calibri"/>
               <a:buNone/>
               <a:defRPr/>
@@ -9223,7 +9223,7 @@
               <a:buClr>
                 <a:srgbClr val="888888"/>
               </a:buClr>
-              <a:buSzPts val="900"/>
+              <a:buSzPts val="1200"/>
               <a:buFont typeface="Calibri"/>
               <a:buNone/>
               <a:defRPr/>
@@ -9241,7 +9241,7 @@
               <a:buClr>
                 <a:srgbClr val="888888"/>
               </a:buClr>
-              <a:buSzPts val="900"/>
+              <a:buSzPts val="1200"/>
               <a:buFont typeface="Calibri"/>
               <a:buNone/>
               <a:defRPr/>
@@ -9259,7 +9259,7 @@
               <a:buClr>
                 <a:srgbClr val="888888"/>
               </a:buClr>
-              <a:buSzPts val="900"/>
+              <a:buSzPts val="1200"/>
               <a:buFont typeface="Calibri"/>
               <a:buNone/>
               <a:defRPr/>
@@ -9277,7 +9277,7 @@
               <a:buClr>
                 <a:srgbClr val="888888"/>
               </a:buClr>
-              <a:buSzPts val="900"/>
+              <a:buSzPts val="1200"/>
               <a:buFont typeface="Calibri"/>
               <a:buNone/>
               <a:defRPr/>
@@ -9336,8 +9336,8 @@
         </p:nvSpPr>
         <p:spPr>
           <a:xfrm>
-            <a:off x="342900" y="205978"/>
-            <a:ext cx="6172200" cy="857250"/>
+            <a:off x="457189" y="274630"/>
+            <a:ext cx="8229394" cy="1142971"/>
           </a:xfrm>
           <a:prstGeom prst="rect">
             <a:avLst/>
@@ -9348,7 +9348,7 @@
           </a:ln>
         </p:spPr>
         <p:txBody>
-          <a:bodyPr anchorCtr="0" anchor="ctr" bIns="45700" lIns="91425" spcFirstLastPara="1" rIns="91425" wrap="square" tIns="45700">
+          <a:bodyPr anchorCtr="0" anchor="ctr" bIns="60932" lIns="121897" spcFirstLastPara="1" rIns="121897" wrap="square" tIns="60932">
             <a:normAutofit/>
           </a:bodyPr>
           <a:lstStyle>
@@ -9362,7 +9362,7 @@
               <a:buClr>
                 <a:schemeClr val="dk1"/>
               </a:buClr>
-              <a:buSzPts val="1800"/>
+              <a:buSzPts val="2400"/>
               <a:buNone/>
               <a:defRPr/>
             </a:lvl1pPr>
@@ -9373,7 +9373,7 @@
               <a:spcAft>
                 <a:spcPts val="0"/>
               </a:spcAft>
-              <a:buSzPts val="1400"/>
+              <a:buSzPts val="1867"/>
               <a:buNone/>
               <a:defRPr/>
             </a:lvl2pPr>
@@ -9384,7 +9384,7 @@
               <a:spcAft>
                 <a:spcPts val="0"/>
               </a:spcAft>
-              <a:buSzPts val="1400"/>
+              <a:buSzPts val="1867"/>
               <a:buNone/>
               <a:defRPr/>
             </a:lvl3pPr>
@@ -9395,7 +9395,7 @@
               <a:spcAft>
                 <a:spcPts val="0"/>
               </a:spcAft>
-              <a:buSzPts val="1400"/>
+              <a:buSzPts val="1867"/>
               <a:buNone/>
               <a:defRPr/>
             </a:lvl4pPr>
@@ -9406,7 +9406,7 @@
               <a:spcAft>
                 <a:spcPts val="0"/>
               </a:spcAft>
-              <a:buSzPts val="1400"/>
+              <a:buSzPts val="1867"/>
               <a:buNone/>
               <a:defRPr/>
             </a:lvl5pPr>
@@ -9417,7 +9417,7 @@
               <a:spcAft>
                 <a:spcPts val="0"/>
               </a:spcAft>
-              <a:buSzPts val="1400"/>
+              <a:buSzPts val="1867"/>
               <a:buNone/>
               <a:defRPr/>
             </a:lvl6pPr>
@@ -9428,7 +9428,7 @@
               <a:spcAft>
                 <a:spcPts val="0"/>
               </a:spcAft>
-              <a:buSzPts val="1400"/>
+              <a:buSzPts val="1867"/>
               <a:buNone/>
               <a:defRPr/>
             </a:lvl7pPr>
@@ -9439,7 +9439,7 @@
               <a:spcAft>
                 <a:spcPts val="0"/>
               </a:spcAft>
-              <a:buSzPts val="1400"/>
+              <a:buSzPts val="1867"/>
               <a:buNone/>
               <a:defRPr/>
             </a:lvl8pPr>
@@ -9450,7 +9450,7 @@
               <a:spcAft>
                 <a:spcPts val="0"/>
               </a:spcAft>
-              <a:buSzPts val="1400"/>
+              <a:buSzPts val="1867"/>
               <a:buNone/>
               <a:defRPr/>
             </a:lvl9pPr>
@@ -9468,8 +9468,8 @@
         </p:nvSpPr>
         <p:spPr>
           <a:xfrm>
-            <a:off x="342900" y="4767263"/>
-            <a:ext cx="1600200" cy="273844"/>
+            <a:off x="457189" y="6356192"/>
+            <a:ext cx="2133547" cy="365116"/>
           </a:xfrm>
           <a:prstGeom prst="rect">
             <a:avLst/>
@@ -9480,7 +9480,7 @@
           </a:ln>
         </p:spPr>
         <p:txBody>
-          <a:bodyPr anchorCtr="0" anchor="ctr" bIns="45700" lIns="91425" spcFirstLastPara="1" rIns="91425" wrap="square" tIns="45700">
+          <a:bodyPr anchorCtr="0" anchor="ctr" bIns="60932" lIns="121897" spcFirstLastPara="1" rIns="121897" wrap="square" tIns="60932">
             <a:noAutofit/>
           </a:bodyPr>
           <a:lstStyle>
@@ -9497,7 +9497,7 @@
               <a:buClr>
                 <a:srgbClr val="888888"/>
               </a:buClr>
-              <a:buSzPts val="1800"/>
+              <a:buSzPts val="2400"/>
               <a:buNone/>
               <a:defRPr/>
             </a:lvl1pPr>
@@ -9514,7 +9514,7 @@
               <a:buClr>
                 <a:schemeClr val="accent2"/>
               </a:buClr>
-              <a:buSzPts val="1800"/>
+              <a:buSzPts val="2400"/>
               <a:buNone/>
               <a:defRPr/>
             </a:lvl2pPr>
@@ -9531,7 +9531,7 @@
               <a:buClr>
                 <a:schemeClr val="accent2"/>
               </a:buClr>
-              <a:buSzPts val="1800"/>
+              <a:buSzPts val="2400"/>
               <a:buNone/>
               <a:defRPr/>
             </a:lvl3pPr>
@@ -9548,7 +9548,7 @@
               <a:buClr>
                 <a:schemeClr val="accent2"/>
               </a:buClr>
-              <a:buSzPts val="1800"/>
+              <a:buSzPts val="2400"/>
               <a:buNone/>
               <a:defRPr/>
             </a:lvl4pPr>
@@ -9565,7 +9565,7 @@
               <a:buClr>
                 <a:schemeClr val="accent2"/>
               </a:buClr>
-              <a:buSzPts val="1800"/>
+              <a:buSzPts val="2400"/>
               <a:buNone/>
               <a:defRPr/>
             </a:lvl5pPr>
@@ -9582,7 +9582,7 @@
               <a:buClr>
                 <a:schemeClr val="accent2"/>
               </a:buClr>
-              <a:buSzPts val="1800"/>
+              <a:buSzPts val="2400"/>
               <a:buNone/>
               <a:defRPr/>
             </a:lvl6pPr>
@@ -9599,7 +9599,7 @@
               <a:buClr>
                 <a:schemeClr val="accent2"/>
               </a:buClr>
-              <a:buSzPts val="1800"/>
+              <a:buSzPts val="2400"/>
               <a:buNone/>
               <a:defRPr/>
             </a:lvl7pPr>
@@ -9616,7 +9616,7 @@
               <a:buClr>
                 <a:schemeClr val="accent2"/>
               </a:buClr>
-              <a:buSzPts val="1800"/>
+              <a:buSzPts val="2400"/>
               <a:buNone/>
               <a:defRPr/>
             </a:lvl8pPr>
@@ -9633,7 +9633,7 @@
               <a:buClr>
                 <a:schemeClr val="accent2"/>
               </a:buClr>
-              <a:buSzPts val="1800"/>
+              <a:buSzPts val="2400"/>
               <a:buNone/>
               <a:defRPr/>
             </a:lvl9pPr>
@@ -9651,8 +9651,8 @@
         </p:nvSpPr>
         <p:spPr>
           <a:xfrm>
-            <a:off x="2343150" y="4767263"/>
-            <a:ext cx="2171700" cy="273844"/>
+            <a:off x="3124122" y="6356192"/>
+            <a:ext cx="2895528" cy="365116"/>
           </a:xfrm>
           <a:prstGeom prst="rect">
             <a:avLst/>
@@ -9663,7 +9663,7 @@
           </a:ln>
         </p:spPr>
         <p:txBody>
-          <a:bodyPr anchorCtr="0" anchor="ctr" bIns="45700" lIns="91425" spcFirstLastPara="1" rIns="91425" wrap="square" tIns="45700">
+          <a:bodyPr anchorCtr="0" anchor="ctr" bIns="60932" lIns="121897" spcFirstLastPara="1" rIns="121897" wrap="square" tIns="60932">
             <a:noAutofit/>
           </a:bodyPr>
           <a:lstStyle>
@@ -9680,7 +9680,7 @@
               <a:buClr>
                 <a:srgbClr val="888888"/>
               </a:buClr>
-              <a:buSzPts val="1800"/>
+              <a:buSzPts val="2400"/>
               <a:buNone/>
               <a:defRPr/>
             </a:lvl1pPr>
@@ -9697,7 +9697,7 @@
               <a:buClr>
                 <a:schemeClr val="accent2"/>
               </a:buClr>
-              <a:buSzPts val="1800"/>
+              <a:buSzPts val="2400"/>
               <a:buNone/>
               <a:defRPr/>
             </a:lvl2pPr>
@@ -9714,7 +9714,7 @@
               <a:buClr>
                 <a:schemeClr val="accent2"/>
               </a:buClr>
-              <a:buSzPts val="1800"/>
+              <a:buSzPts val="2400"/>
               <a:buNone/>
               <a:defRPr/>
             </a:lvl3pPr>
@@ -9731,7 +9731,7 @@
               <a:buClr>
                 <a:schemeClr val="accent2"/>
               </a:buClr>
-              <a:buSzPts val="1800"/>
+              <a:buSzPts val="2400"/>
               <a:buNone/>
               <a:defRPr/>
             </a:lvl4pPr>
@@ -9748,7 +9748,7 @@
               <a:buClr>
                 <a:schemeClr val="accent2"/>
               </a:buClr>
-              <a:buSzPts val="1800"/>
+              <a:buSzPts val="2400"/>
               <a:buNone/>
               <a:defRPr/>
             </a:lvl5pPr>
@@ -9765,7 +9765,7 @@
               <a:buClr>
                 <a:schemeClr val="accent2"/>
               </a:buClr>
-              <a:buSzPts val="1800"/>
+              <a:buSzPts val="2400"/>
               <a:buNone/>
               <a:defRPr/>
             </a:lvl6pPr>
@@ -9782,7 +9782,7 @@
               <a:buClr>
                 <a:schemeClr val="accent2"/>
               </a:buClr>
-              <a:buSzPts val="1800"/>
+              <a:buSzPts val="2400"/>
               <a:buNone/>
               <a:defRPr/>
             </a:lvl7pPr>
@@ -9799,7 +9799,7 @@
               <a:buClr>
                 <a:schemeClr val="accent2"/>
               </a:buClr>
-              <a:buSzPts val="1800"/>
+              <a:buSzPts val="2400"/>
               <a:buNone/>
               <a:defRPr/>
             </a:lvl8pPr>
@@ -9816,7 +9816,7 @@
               <a:buClr>
                 <a:schemeClr val="accent2"/>
               </a:buClr>
-              <a:buSzPts val="1800"/>
+              <a:buSzPts val="2400"/>
               <a:buNone/>
               <a:defRPr/>
             </a:lvl9pPr>
@@ -9834,8 +9834,8 @@
         </p:nvSpPr>
         <p:spPr>
           <a:xfrm>
-            <a:off x="4914900" y="4767263"/>
-            <a:ext cx="1600200" cy="273844"/>
+            <a:off x="6553036" y="6356192"/>
+            <a:ext cx="2133547" cy="365116"/>
           </a:xfrm>
           <a:prstGeom prst="rect">
             <a:avLst/>
@@ -9846,7 +9846,7 @@
           </a:ln>
         </p:spPr>
         <p:txBody>
-          <a:bodyPr anchorCtr="0" anchor="ctr" bIns="45700" lIns="91425" spcFirstLastPara="1" rIns="91425" wrap="square" tIns="45700">
+          <a:bodyPr anchorCtr="0" anchor="ctr" bIns="60932" lIns="121897" spcFirstLastPara="1" rIns="121897" wrap="square" tIns="60932">
             <a:noAutofit/>
           </a:bodyPr>
           <a:lstStyle>
@@ -9863,7 +9863,7 @@
               <a:buClr>
                 <a:srgbClr val="888888"/>
               </a:buClr>
-              <a:buSzPts val="900"/>
+              <a:buSzPts val="1200"/>
               <a:buFont typeface="Calibri"/>
               <a:buNone/>
               <a:defRPr/>
@@ -9881,7 +9881,7 @@
               <a:buClr>
                 <a:srgbClr val="888888"/>
               </a:buClr>
-              <a:buSzPts val="900"/>
+              <a:buSzPts val="1200"/>
               <a:buFont typeface="Calibri"/>
               <a:buNone/>
               <a:defRPr/>
@@ -9899,7 +9899,7 @@
               <a:buClr>
                 <a:srgbClr val="888888"/>
               </a:buClr>
-              <a:buSzPts val="900"/>
+              <a:buSzPts val="1200"/>
               <a:buFont typeface="Calibri"/>
               <a:buNone/>
               <a:defRPr/>
@@ -9917,7 +9917,7 @@
               <a:buClr>
                 <a:srgbClr val="888888"/>
               </a:buClr>
-              <a:buSzPts val="900"/>
+              <a:buSzPts val="1200"/>
               <a:buFont typeface="Calibri"/>
               <a:buNone/>
               <a:defRPr/>
@@ -9935,7 +9935,7 @@
               <a:buClr>
                 <a:srgbClr val="888888"/>
               </a:buClr>
-              <a:buSzPts val="900"/>
+              <a:buSzPts val="1200"/>
               <a:buFont typeface="Calibri"/>
               <a:buNone/>
               <a:defRPr/>
@@ -9953,7 +9953,7 @@
               <a:buClr>
                 <a:srgbClr val="888888"/>
               </a:buClr>
-              <a:buSzPts val="900"/>
+              <a:buSzPts val="1200"/>
               <a:buFont typeface="Calibri"/>
               <a:buNone/>
               <a:defRPr/>
@@ -9971,7 +9971,7 @@
               <a:buClr>
                 <a:srgbClr val="888888"/>
               </a:buClr>
-              <a:buSzPts val="900"/>
+              <a:buSzPts val="1200"/>
               <a:buFont typeface="Calibri"/>
               <a:buNone/>
               <a:defRPr/>
@@ -9989,7 +9989,7 @@
               <a:buClr>
                 <a:srgbClr val="888888"/>
               </a:buClr>
-              <a:buSzPts val="900"/>
+              <a:buSzPts val="1200"/>
               <a:buFont typeface="Calibri"/>
               <a:buNone/>
               <a:defRPr/>
@@ -10007,7 +10007,7 @@
               <a:buClr>
                 <a:srgbClr val="888888"/>
               </a:buClr>
-              <a:buSzPts val="900"/>
+              <a:buSzPts val="1200"/>
               <a:buFont typeface="Calibri"/>
               <a:buNone/>
               <a:defRPr/>
@@ -10066,8 +10066,8 @@
         </p:nvSpPr>
         <p:spPr>
           <a:xfrm>
-            <a:off x="342900" y="204787"/>
-            <a:ext cx="2256235" cy="871538"/>
+            <a:off x="457189" y="273043"/>
+            <a:ext cx="3008238" cy="1162022"/>
           </a:xfrm>
           <a:prstGeom prst="rect">
             <a:avLst/>
@@ -10078,7 +10078,7 @@
           </a:ln>
         </p:spPr>
         <p:txBody>
-          <a:bodyPr anchorCtr="0" anchor="b" bIns="45700" lIns="91425" spcFirstLastPara="1" rIns="91425" wrap="square" tIns="45700">
+          <a:bodyPr anchorCtr="0" anchor="b" bIns="60932" lIns="121897" spcFirstLastPara="1" rIns="121897" wrap="square" tIns="60932">
             <a:normAutofit/>
           </a:bodyPr>
           <a:lstStyle>
@@ -10092,10 +10092,10 @@
               <a:buClr>
                 <a:schemeClr val="dk1"/>
               </a:buClr>
-              <a:buSzPts val="1500"/>
+              <a:buSzPts val="2000"/>
               <a:buFont typeface="Calibri"/>
               <a:buNone/>
-              <a:defRPr b="1" sz="1500"/>
+              <a:defRPr b="1" sz="2000"/>
             </a:lvl1pPr>
             <a:lvl2pPr lvl="1">
               <a:spcBef>
@@ -10104,7 +10104,7 @@
               <a:spcAft>
                 <a:spcPts val="0"/>
               </a:spcAft>
-              <a:buSzPts val="1400"/>
+              <a:buSzPts val="1867"/>
               <a:buNone/>
               <a:defRPr/>
             </a:lvl2pPr>
@@ -10115,7 +10115,7 @@
               <a:spcAft>
                 <a:spcPts val="0"/>
               </a:spcAft>
-              <a:buSzPts val="1400"/>
+              <a:buSzPts val="1867"/>
               <a:buNone/>
               <a:defRPr/>
             </a:lvl3pPr>
@@ -10126,7 +10126,7 @@
               <a:spcAft>
                 <a:spcPts val="0"/>
               </a:spcAft>
-              <a:buSzPts val="1400"/>
+              <a:buSzPts val="1867"/>
               <a:buNone/>
               <a:defRPr/>
             </a:lvl4pPr>
@@ -10137,7 +10137,7 @@
               <a:spcAft>
                 <a:spcPts val="0"/>
               </a:spcAft>
-              <a:buSzPts val="1400"/>
+              <a:buSzPts val="1867"/>
               <a:buNone/>
               <a:defRPr/>
             </a:lvl5pPr>
@@ -10148,7 +10148,7 @@
               <a:spcAft>
                 <a:spcPts val="0"/>
               </a:spcAft>
-              <a:buSzPts val="1400"/>
+              <a:buSzPts val="1867"/>
               <a:buNone/>
               <a:defRPr/>
             </a:lvl6pPr>
@@ -10159,7 +10159,7 @@
               <a:spcAft>
                 <a:spcPts val="0"/>
               </a:spcAft>
-              <a:buSzPts val="1400"/>
+              <a:buSzPts val="1867"/>
               <a:buNone/>
               <a:defRPr/>
             </a:lvl7pPr>
@@ -10170,7 +10170,7 @@
               <a:spcAft>
                 <a:spcPts val="0"/>
               </a:spcAft>
-              <a:buSzPts val="1400"/>
+              <a:buSzPts val="1867"/>
               <a:buNone/>
               <a:defRPr/>
             </a:lvl8pPr>
@@ -10181,7 +10181,7 @@
               <a:spcAft>
                 <a:spcPts val="0"/>
               </a:spcAft>
-              <a:buSzPts val="1400"/>
+              <a:buSzPts val="1867"/>
               <a:buNone/>
               <a:defRPr/>
             </a:lvl9pPr>
@@ -10199,8 +10199,8 @@
         </p:nvSpPr>
         <p:spPr>
           <a:xfrm>
-            <a:off x="2681287" y="204788"/>
-            <a:ext cx="3833813" cy="4389835"/>
+            <a:off x="3574960" y="273044"/>
+            <a:ext cx="5111623" cy="5852967"/>
           </a:xfrm>
           <a:prstGeom prst="rect">
             <a:avLst/>
@@ -10211,12 +10211,40 @@
           </a:ln>
         </p:spPr>
         <p:txBody>
-          <a:bodyPr anchorCtr="0" anchor="t" bIns="45700" lIns="91425" spcFirstLastPara="1" rIns="91425" wrap="square" tIns="45700">
+          <a:bodyPr anchorCtr="0" anchor="t" bIns="60932" lIns="121897" spcFirstLastPara="1" rIns="121897" wrap="square" tIns="60932">
             <a:normAutofit/>
           </a:bodyPr>
           <a:lstStyle>
             <a:lvl1pPr indent="-381000" lvl="0" marL="457200" algn="l">
               <a:spcBef>
+                <a:spcPts val="640"/>
+              </a:spcBef>
+              <a:spcAft>
+                <a:spcPts val="0"/>
+              </a:spcAft>
+              <a:buClr>
+                <a:schemeClr val="dk1"/>
+              </a:buClr>
+              <a:buSzPts val="3200"/>
+              <a:buChar char="•"/>
+              <a:defRPr sz="3200"/>
+            </a:lvl1pPr>
+            <a:lvl2pPr indent="-361950" lvl="1" marL="914400" algn="l">
+              <a:spcBef>
+                <a:spcPts val="560"/>
+              </a:spcBef>
+              <a:spcAft>
+                <a:spcPts val="0"/>
+              </a:spcAft>
+              <a:buClr>
+                <a:schemeClr val="dk1"/>
+              </a:buClr>
+              <a:buSzPts val="2800"/>
+              <a:buChar char="–"/>
+              <a:defRPr sz="2800"/>
+            </a:lvl2pPr>
+            <a:lvl3pPr indent="-342900" lvl="2" marL="1371600" algn="l">
+              <a:spcBef>
                 <a:spcPts val="480"/>
               </a:spcBef>
               <a:spcAft>
@@ -10228,38 +10256,10 @@
               <a:buSzPts val="2400"/>
               <a:buChar char="•"/>
               <a:defRPr sz="2400"/>
-            </a:lvl1pPr>
-            <a:lvl2pPr indent="-361950" lvl="1" marL="914400" algn="l">
-              <a:spcBef>
-                <a:spcPts val="420"/>
-              </a:spcBef>
-              <a:spcAft>
-                <a:spcPts val="0"/>
-              </a:spcAft>
-              <a:buClr>
-                <a:schemeClr val="dk1"/>
-              </a:buClr>
-              <a:buSzPts val="2100"/>
-              <a:buChar char="–"/>
-              <a:defRPr sz="2100"/>
-            </a:lvl2pPr>
-            <a:lvl3pPr indent="-342900" lvl="2" marL="1371600" algn="l">
-              <a:spcBef>
-                <a:spcPts val="360"/>
-              </a:spcBef>
-              <a:spcAft>
-                <a:spcPts val="0"/>
-              </a:spcAft>
-              <a:buClr>
-                <a:schemeClr val="dk1"/>
-              </a:buClr>
-              <a:buSzPts val="1800"/>
-              <a:buChar char="•"/>
-              <a:defRPr sz="1800"/>
             </a:lvl3pPr>
             <a:lvl4pPr indent="-323850" lvl="3" marL="1828800" algn="l">
               <a:spcBef>
-                <a:spcPts val="300"/>
+                <a:spcPts val="400"/>
               </a:spcBef>
               <a:spcAft>
                 <a:spcPts val="0"/>
@@ -10267,13 +10267,13 @@
               <a:buClr>
                 <a:schemeClr val="dk1"/>
               </a:buClr>
-              <a:buSzPts val="1500"/>
+              <a:buSzPts val="2000"/>
               <a:buChar char="–"/>
-              <a:defRPr sz="1500"/>
+              <a:defRPr sz="2000"/>
             </a:lvl4pPr>
             <a:lvl5pPr indent="-323850" lvl="4" marL="2286000" algn="l">
               <a:spcBef>
-                <a:spcPts val="300"/>
+                <a:spcPts val="400"/>
               </a:spcBef>
               <a:spcAft>
                 <a:spcPts val="0"/>
@@ -10281,13 +10281,13 @@
               <a:buClr>
                 <a:schemeClr val="dk1"/>
               </a:buClr>
-              <a:buSzPts val="1500"/>
+              <a:buSzPts val="2000"/>
               <a:buChar char="»"/>
-              <a:defRPr sz="1500"/>
+              <a:defRPr sz="2000"/>
             </a:lvl5pPr>
             <a:lvl6pPr indent="-323850" lvl="5" marL="2743200" algn="l">
               <a:spcBef>
-                <a:spcPts val="300"/>
+                <a:spcPts val="400"/>
               </a:spcBef>
               <a:spcAft>
                 <a:spcPts val="0"/>
@@ -10295,13 +10295,13 @@
               <a:buClr>
                 <a:schemeClr val="dk1"/>
               </a:buClr>
-              <a:buSzPts val="1500"/>
+              <a:buSzPts val="2000"/>
               <a:buChar char="•"/>
-              <a:defRPr sz="1500"/>
+              <a:defRPr sz="2000"/>
             </a:lvl6pPr>
             <a:lvl7pPr indent="-323850" lvl="6" marL="3200400" algn="l">
               <a:spcBef>
-                <a:spcPts val="300"/>
+                <a:spcPts val="400"/>
               </a:spcBef>
               <a:spcAft>
                 <a:spcPts val="0"/>
@@ -10309,13 +10309,13 @@
               <a:buClr>
                 <a:schemeClr val="dk1"/>
               </a:buClr>
-              <a:buSzPts val="1500"/>
+              <a:buSzPts val="2000"/>
               <a:buChar char="•"/>
-              <a:defRPr sz="1500"/>
+              <a:defRPr sz="2000"/>
             </a:lvl7pPr>
             <a:lvl8pPr indent="-323850" lvl="7" marL="3657600" algn="l">
               <a:spcBef>
-                <a:spcPts val="300"/>
+                <a:spcPts val="400"/>
               </a:spcBef>
               <a:spcAft>
                 <a:spcPts val="0"/>
@@ -10323,13 +10323,13 @@
               <a:buClr>
                 <a:schemeClr val="dk1"/>
               </a:buClr>
-              <a:buSzPts val="1500"/>
+              <a:buSzPts val="2000"/>
               <a:buChar char="•"/>
-              <a:defRPr sz="1500"/>
+              <a:defRPr sz="2000"/>
             </a:lvl8pPr>
             <a:lvl9pPr indent="-323850" lvl="8" marL="4114800" algn="l">
               <a:spcBef>
-                <a:spcPts val="300"/>
+                <a:spcPts val="400"/>
               </a:spcBef>
               <a:spcAft>
                 <a:spcPts val="0"/>
@@ -10337,9 +10337,9 @@
               <a:buClr>
                 <a:schemeClr val="dk1"/>
               </a:buClr>
-              <a:buSzPts val="1500"/>
+              <a:buSzPts val="2000"/>
               <a:buChar char="•"/>
-              <a:defRPr sz="1500"/>
+              <a:defRPr sz="2000"/>
             </a:lvl9pPr>
           </a:lstStyle>
           <a:p/>
@@ -10355,8 +10355,8 @@
         </p:nvSpPr>
         <p:spPr>
           <a:xfrm>
-            <a:off x="342900" y="1076326"/>
-            <a:ext cx="2256235" cy="3518297"/>
+            <a:off x="457189" y="1435065"/>
+            <a:ext cx="3008238" cy="4690945"/>
           </a:xfrm>
           <a:prstGeom prst="rect">
             <a:avLst/>
@@ -10367,13 +10367,13 @@
           </a:ln>
         </p:spPr>
         <p:txBody>
-          <a:bodyPr anchorCtr="0" anchor="t" bIns="45700" lIns="91425" spcFirstLastPara="1" rIns="91425" wrap="square" tIns="45700">
+          <a:bodyPr anchorCtr="0" anchor="t" bIns="60932" lIns="121897" spcFirstLastPara="1" rIns="121897" wrap="square" tIns="60932">
             <a:normAutofit/>
           </a:bodyPr>
           <a:lstStyle>
             <a:lvl1pPr indent="-228600" lvl="0" marL="457200" algn="l">
               <a:spcBef>
-                <a:spcPts val="210"/>
+                <a:spcPts val="280"/>
               </a:spcBef>
               <a:spcAft>
                 <a:spcPts val="0"/>
@@ -10381,13 +10381,13 @@
               <a:buClr>
                 <a:schemeClr val="dk1"/>
               </a:buClr>
-              <a:buSzPts val="1050"/>
-              <a:buNone/>
-              <a:defRPr sz="1050"/>
+              <a:buSzPts val="1400"/>
+              <a:buNone/>
+              <a:defRPr sz="1400"/>
             </a:lvl1pPr>
             <a:lvl2pPr indent="-228600" lvl="1" marL="914400" algn="l">
               <a:spcBef>
-                <a:spcPts val="180"/>
+                <a:spcPts val="240"/>
               </a:spcBef>
               <a:spcAft>
                 <a:spcPts val="0"/>
@@ -10395,13 +10395,13 @@
               <a:buClr>
                 <a:schemeClr val="dk1"/>
               </a:buClr>
-              <a:buSzPts val="900"/>
-              <a:buNone/>
-              <a:defRPr sz="900"/>
+              <a:buSzPts val="1200"/>
+              <a:buNone/>
+              <a:defRPr sz="1200"/>
             </a:lvl2pPr>
             <a:lvl3pPr indent="-228600" lvl="2" marL="1371600" algn="l">
               <a:spcBef>
-                <a:spcPts val="150"/>
+                <a:spcPts val="200"/>
               </a:spcBef>
               <a:spcAft>
                 <a:spcPts val="0"/>
@@ -10409,13 +10409,13 @@
               <a:buClr>
                 <a:schemeClr val="dk1"/>
               </a:buClr>
-              <a:buSzPts val="750"/>
-              <a:buNone/>
-              <a:defRPr sz="750"/>
+              <a:buSzPts val="1000"/>
+              <a:buNone/>
+              <a:defRPr sz="1000"/>
             </a:lvl3pPr>
             <a:lvl4pPr indent="-228600" lvl="3" marL="1828800" algn="l">
               <a:spcBef>
-                <a:spcPts val="135"/>
+                <a:spcPts val="180"/>
               </a:spcBef>
               <a:spcAft>
                 <a:spcPts val="0"/>
@@ -10423,13 +10423,13 @@
               <a:buClr>
                 <a:schemeClr val="dk1"/>
               </a:buClr>
-              <a:buSzPts val="675"/>
-              <a:buNone/>
-              <a:defRPr sz="675"/>
+              <a:buSzPts val="900"/>
+              <a:buNone/>
+              <a:defRPr sz="900"/>
             </a:lvl4pPr>
             <a:lvl5pPr indent="-228600" lvl="4" marL="2286000" algn="l">
               <a:spcBef>
-                <a:spcPts val="135"/>
+                <a:spcPts val="180"/>
               </a:spcBef>
               <a:spcAft>
                 <a:spcPts val="0"/>
@@ -10437,13 +10437,13 @@
               <a:buClr>
                 <a:schemeClr val="dk1"/>
               </a:buClr>
-              <a:buSzPts val="675"/>
-              <a:buNone/>
-              <a:defRPr sz="675"/>
+              <a:buSzPts val="900"/>
+              <a:buNone/>
+              <a:defRPr sz="900"/>
             </a:lvl5pPr>
             <a:lvl6pPr indent="-228600" lvl="5" marL="2743200" algn="l">
               <a:spcBef>
-                <a:spcPts val="135"/>
+                <a:spcPts val="180"/>
               </a:spcBef>
               <a:spcAft>
                 <a:spcPts val="0"/>
@@ -10451,13 +10451,13 @@
               <a:buClr>
                 <a:schemeClr val="dk1"/>
               </a:buClr>
-              <a:buSzPts val="675"/>
-              <a:buNone/>
-              <a:defRPr sz="675"/>
+              <a:buSzPts val="900"/>
+              <a:buNone/>
+              <a:defRPr sz="900"/>
             </a:lvl6pPr>
             <a:lvl7pPr indent="-228600" lvl="6" marL="3200400" algn="l">
               <a:spcBef>
-                <a:spcPts val="135"/>
+                <a:spcPts val="180"/>
               </a:spcBef>
               <a:spcAft>
                 <a:spcPts val="0"/>
@@ -10465,13 +10465,13 @@
               <a:buClr>
                 <a:schemeClr val="dk1"/>
               </a:buClr>
-              <a:buSzPts val="675"/>
-              <a:buNone/>
-              <a:defRPr sz="675"/>
+              <a:buSzPts val="900"/>
+              <a:buNone/>
+              <a:defRPr sz="900"/>
             </a:lvl7pPr>
             <a:lvl8pPr indent="-228600" lvl="7" marL="3657600" algn="l">
               <a:spcBef>
-                <a:spcPts val="135"/>
+                <a:spcPts val="180"/>
               </a:spcBef>
               <a:spcAft>
                 <a:spcPts val="0"/>
@@ -10479,13 +10479,13 @@
               <a:buClr>
                 <a:schemeClr val="dk1"/>
               </a:buClr>
-              <a:buSzPts val="675"/>
-              <a:buNone/>
-              <a:defRPr sz="675"/>
+              <a:buSzPts val="900"/>
+              <a:buNone/>
+              <a:defRPr sz="900"/>
             </a:lvl8pPr>
             <a:lvl9pPr indent="-228600" lvl="8" marL="4114800" algn="l">
               <a:spcBef>
-                <a:spcPts val="135"/>
+                <a:spcPts val="180"/>
               </a:spcBef>
               <a:spcAft>
                 <a:spcPts val="0"/>
@@ -10493,9 +10493,9 @@
               <a:buClr>
                 <a:schemeClr val="dk1"/>
               </a:buClr>
-              <a:buSzPts val="675"/>
-              <a:buNone/>
-              <a:defRPr sz="675"/>
+              <a:buSzPts val="900"/>
+              <a:buNone/>
+              <a:defRPr sz="900"/>
             </a:lvl9pPr>
           </a:lstStyle>
           <a:p/>
@@ -10511,8 +10511,8 @@
         </p:nvSpPr>
         <p:spPr>
           <a:xfrm>
-            <a:off x="342900" y="4767263"/>
-            <a:ext cx="1600200" cy="273844"/>
+            <a:off x="457189" y="6356192"/>
+            <a:ext cx="2133547" cy="365116"/>
           </a:xfrm>
           <a:prstGeom prst="rect">
             <a:avLst/>
@@ -10523,7 +10523,7 @@
           </a:ln>
         </p:spPr>
         <p:txBody>
-          <a:bodyPr anchorCtr="0" anchor="ctr" bIns="45700" lIns="91425" spcFirstLastPara="1" rIns="91425" wrap="square" tIns="45700">
+          <a:bodyPr anchorCtr="0" anchor="ctr" bIns="60932" lIns="121897" spcFirstLastPara="1" rIns="121897" wrap="square" tIns="60932">
             <a:noAutofit/>
           </a:bodyPr>
           <a:lstStyle>
@@ -10540,7 +10540,7 @@
               <a:buClr>
                 <a:srgbClr val="888888"/>
               </a:buClr>
-              <a:buSzPts val="1800"/>
+              <a:buSzPts val="2400"/>
               <a:buNone/>
               <a:defRPr/>
             </a:lvl1pPr>
@@ -10557,7 +10557,7 @@
               <a:buClr>
                 <a:schemeClr val="accent2"/>
               </a:buClr>
-              <a:buSzPts val="1800"/>
+              <a:buSzPts val="2400"/>
               <a:buNone/>
               <a:defRPr/>
             </a:lvl2pPr>
@@ -10574,7 +10574,7 @@
               <a:buClr>
                 <a:schemeClr val="accent2"/>
               </a:buClr>
-              <a:buSzPts val="1800"/>
+              <a:buSzPts val="2400"/>
               <a:buNone/>
               <a:defRPr/>
             </a:lvl3pPr>
@@ -10591,7 +10591,7 @@
               <a:buClr>
                 <a:schemeClr val="accent2"/>
               </a:buClr>
-              <a:buSzPts val="1800"/>
+              <a:buSzPts val="2400"/>
               <a:buNone/>
               <a:defRPr/>
             </a:lvl4pPr>
@@ -10608,7 +10608,7 @@
               <a:buClr>
                 <a:schemeClr val="accent2"/>
               </a:buClr>
-              <a:buSzPts val="1800"/>
+              <a:buSzPts val="2400"/>
               <a:buNone/>
               <a:defRPr/>
             </a:lvl5pPr>
@@ -10625,7 +10625,7 @@
               <a:buClr>
                 <a:schemeClr val="accent2"/>
               </a:buClr>
-              <a:buSzPts val="1800"/>
+              <a:buSzPts val="2400"/>
               <a:buNone/>
               <a:defRPr/>
             </a:lvl6pPr>
@@ -10642,7 +10642,7 @@
               <a:buClr>
                 <a:schemeClr val="accent2"/>
               </a:buClr>
-              <a:buSzPts val="1800"/>
+              <a:buSzPts val="2400"/>
               <a:buNone/>
               <a:defRPr/>
             </a:lvl7pPr>
@@ -10659,7 +10659,7 @@
               <a:buClr>
                 <a:schemeClr val="accent2"/>
               </a:buClr>
-              <a:buSzPts val="1800"/>
+              <a:buSzPts val="2400"/>
               <a:buNone/>
               <a:defRPr/>
             </a:lvl8pPr>
@@ -10676,7 +10676,7 @@
               <a:buClr>
                 <a:schemeClr val="accent2"/>
               </a:buClr>
-              <a:buSzPts val="1800"/>
+              <a:buSzPts val="2400"/>
               <a:buNone/>
               <a:defRPr/>
             </a:lvl9pPr>
@@ -10694,8 +10694,8 @@
         </p:nvSpPr>
         <p:spPr>
           <a:xfrm>
-            <a:off x="2343150" y="4767263"/>
-            <a:ext cx="2171700" cy="273844"/>
+            <a:off x="3124122" y="6356192"/>
+            <a:ext cx="2895528" cy="365116"/>
           </a:xfrm>
           <a:prstGeom prst="rect">
             <a:avLst/>
@@ -10706,7 +10706,7 @@
           </a:ln>
         </p:spPr>
         <p:txBody>
-          <a:bodyPr anchorCtr="0" anchor="ctr" bIns="45700" lIns="91425" spcFirstLastPara="1" rIns="91425" wrap="square" tIns="45700">
+          <a:bodyPr anchorCtr="0" anchor="ctr" bIns="60932" lIns="121897" spcFirstLastPara="1" rIns="121897" wrap="square" tIns="60932">
             <a:noAutofit/>
           </a:bodyPr>
           <a:lstStyle>
@@ -10723,7 +10723,7 @@
               <a:buClr>
                 <a:srgbClr val="888888"/>
               </a:buClr>
-              <a:buSzPts val="1800"/>
+              <a:buSzPts val="2400"/>
               <a:buNone/>
               <a:defRPr/>
             </a:lvl1pPr>
@@ -10740,7 +10740,7 @@
               <a:buClr>
                 <a:schemeClr val="accent2"/>
               </a:buClr>
-              <a:buSzPts val="1800"/>
+              <a:buSzPts val="2400"/>
               <a:buNone/>
               <a:defRPr/>
             </a:lvl2pPr>
@@ -10757,7 +10757,7 @@
               <a:buClr>
                 <a:schemeClr val="accent2"/>
               </a:buClr>
-              <a:buSzPts val="1800"/>
+              <a:buSzPts val="2400"/>
               <a:buNone/>
               <a:defRPr/>
             </a:lvl3pPr>
@@ -10774,7 +10774,7 @@
               <a:buClr>
                 <a:schemeClr val="accent2"/>
               </a:buClr>
-              <a:buSzPts val="1800"/>
+              <a:buSzPts val="2400"/>
               <a:buNone/>
               <a:defRPr/>
             </a:lvl4pPr>
@@ -10791,7 +10791,7 @@
               <a:buClr>
                 <a:schemeClr val="accent2"/>
               </a:buClr>
-              <a:buSzPts val="1800"/>
+              <a:buSzPts val="2400"/>
               <a:buNone/>
               <a:defRPr/>
             </a:lvl5pPr>
@@ -10808,7 +10808,7 @@
               <a:buClr>
                 <a:schemeClr val="accent2"/>
               </a:buClr>
-              <a:buSzPts val="1800"/>
+              <a:buSzPts val="2400"/>
               <a:buNone/>
               <a:defRPr/>
             </a:lvl6pPr>
@@ -10825,7 +10825,7 @@
               <a:buClr>
                 <a:schemeClr val="accent2"/>
               </a:buClr>
-              <a:buSzPts val="1800"/>
+              <a:buSzPts val="2400"/>
               <a:buNone/>
               <a:defRPr/>
             </a:lvl7pPr>
@@ -10842,7 +10842,7 @@
               <a:buClr>
                 <a:schemeClr val="accent2"/>
               </a:buClr>
-              <a:buSzPts val="1800"/>
+              <a:buSzPts val="2400"/>
               <a:buNone/>
               <a:defRPr/>
             </a:lvl8pPr>
@@ -10859,7 +10859,7 @@
               <a:buClr>
                 <a:schemeClr val="accent2"/>
               </a:buClr>
-              <a:buSzPts val="1800"/>
+              <a:buSzPts val="2400"/>
               <a:buNone/>
               <a:defRPr/>
             </a:lvl9pPr>
@@ -10877,8 +10877,8 @@
         </p:nvSpPr>
         <p:spPr>
           <a:xfrm>
-            <a:off x="4914900" y="4767263"/>
-            <a:ext cx="1600200" cy="273844"/>
+            <a:off x="6553036" y="6356192"/>
+            <a:ext cx="2133547" cy="365116"/>
           </a:xfrm>
           <a:prstGeom prst="rect">
             <a:avLst/>
@@ -10889,7 +10889,7 @@
           </a:ln>
         </p:spPr>
         <p:txBody>
-          <a:bodyPr anchorCtr="0" anchor="ctr" bIns="45700" lIns="91425" spcFirstLastPara="1" rIns="91425" wrap="square" tIns="45700">
+          <a:bodyPr anchorCtr="0" anchor="ctr" bIns="60932" lIns="121897" spcFirstLastPara="1" rIns="121897" wrap="square" tIns="60932">
             <a:noAutofit/>
           </a:bodyPr>
           <a:lstStyle>
@@ -10906,7 +10906,7 @@
               <a:buClr>
                 <a:srgbClr val="888888"/>
               </a:buClr>
-              <a:buSzPts val="900"/>
+              <a:buSzPts val="1200"/>
               <a:buFont typeface="Calibri"/>
               <a:buNone/>
               <a:defRPr/>
@@ -10924,7 +10924,7 @@
               <a:buClr>
                 <a:srgbClr val="888888"/>
               </a:buClr>
-              <a:buSzPts val="900"/>
+              <a:buSzPts val="1200"/>
               <a:buFont typeface="Calibri"/>
               <a:buNone/>
               <a:defRPr/>
@@ -10942,7 +10942,7 @@
               <a:buClr>
                 <a:srgbClr val="888888"/>
               </a:buClr>
-              <a:buSzPts val="900"/>
+              <a:buSzPts val="1200"/>
               <a:buFont typeface="Calibri"/>
               <a:buNone/>
               <a:defRPr/>
@@ -10960,7 +10960,7 @@
               <a:buClr>
                 <a:srgbClr val="888888"/>
               </a:buClr>
-              <a:buSzPts val="900"/>
+              <a:buSzPts val="1200"/>
               <a:buFont typeface="Calibri"/>
               <a:buNone/>
               <a:defRPr/>
@@ -10978,7 +10978,7 @@
               <a:buClr>
                 <a:srgbClr val="888888"/>
               </a:buClr>
-              <a:buSzPts val="900"/>
+              <a:buSzPts val="1200"/>
               <a:buFont typeface="Calibri"/>
               <a:buNone/>
               <a:defRPr/>
@@ -10996,7 +10996,7 @@
               <a:buClr>
                 <a:srgbClr val="888888"/>
               </a:buClr>
-              <a:buSzPts val="900"/>
+              <a:buSzPts val="1200"/>
               <a:buFont typeface="Calibri"/>
               <a:buNone/>
               <a:defRPr/>
@@ -11014,7 +11014,7 @@
               <a:buClr>
                 <a:srgbClr val="888888"/>
               </a:buClr>
-              <a:buSzPts val="900"/>
+              <a:buSzPts val="1200"/>
               <a:buFont typeface="Calibri"/>
               <a:buNone/>
               <a:defRPr/>
@@ -11032,7 +11032,7 @@
               <a:buClr>
                 <a:srgbClr val="888888"/>
               </a:buClr>
-              <a:buSzPts val="900"/>
+              <a:buSzPts val="1200"/>
               <a:buFont typeface="Calibri"/>
               <a:buNone/>
               <a:defRPr/>
@@ -11050,7 +11050,7 @@
               <a:buClr>
                 <a:srgbClr val="888888"/>
               </a:buClr>
-              <a:buSzPts val="900"/>
+              <a:buSzPts val="1200"/>
               <a:buFont typeface="Calibri"/>
               <a:buNone/>
               <a:defRPr/>
@@ -13325,8 +13325,8 @@
         </p:nvSpPr>
         <p:spPr>
           <a:xfrm>
-            <a:off x="342900" y="205978"/>
-            <a:ext cx="6172200" cy="857250"/>
+            <a:off x="457189" y="274630"/>
+            <a:ext cx="8229394" cy="1142971"/>
           </a:xfrm>
           <a:prstGeom prst="rect">
             <a:avLst/>
@@ -13337,7 +13337,7 @@
           </a:ln>
         </p:spPr>
         <p:txBody>
-          <a:bodyPr anchorCtr="0" anchor="ctr" bIns="45700" lIns="91425" spcFirstLastPara="1" rIns="91425" wrap="square" tIns="45700">
+          <a:bodyPr anchorCtr="0" anchor="ctr" bIns="60932" lIns="121897" spcFirstLastPara="1" rIns="121897" wrap="square" tIns="60932">
             <a:normAutofit/>
           </a:bodyPr>
           <a:lstStyle>
@@ -13351,10 +13351,10 @@
               <a:buClr>
                 <a:schemeClr val="dk1"/>
               </a:buClr>
-              <a:buSzPts val="3300"/>
+              <a:buSzPts val="4400"/>
               <a:buFont typeface="Calibri"/>
               <a:buNone/>
-              <a:defRPr b="0" i="0" sz="3300" u="none" cap="none" strike="noStrike">
+              <a:defRPr b="0" i="0" sz="4400" u="none" cap="none" strike="noStrike">
                 <a:solidFill>
                   <a:schemeClr val="dk1"/>
                 </a:solidFill>
@@ -13371,9 +13371,9 @@
               <a:spcAft>
                 <a:spcPts val="0"/>
               </a:spcAft>
-              <a:buSzPts val="1400"/>
-              <a:buNone/>
-              <a:defRPr sz="1800"/>
+              <a:buSzPts val="1867"/>
+              <a:buNone/>
+              <a:defRPr sz="2400"/>
             </a:lvl2pPr>
             <a:lvl3pPr lvl="2">
               <a:spcBef>
@@ -13382,9 +13382,9 @@
               <a:spcAft>
                 <a:spcPts val="0"/>
               </a:spcAft>
-              <a:buSzPts val="1400"/>
-              <a:buNone/>
-              <a:defRPr sz="1800"/>
+              <a:buSzPts val="1867"/>
+              <a:buNone/>
+              <a:defRPr sz="2400"/>
             </a:lvl3pPr>
             <a:lvl4pPr lvl="3">
               <a:spcBef>
@@ -13393,9 +13393,9 @@
               <a:spcAft>
                 <a:spcPts val="0"/>
               </a:spcAft>
-              <a:buSzPts val="1400"/>
-              <a:buNone/>
-              <a:defRPr sz="1800"/>
+              <a:buSzPts val="1867"/>
+              <a:buNone/>
+              <a:defRPr sz="2400"/>
             </a:lvl4pPr>
             <a:lvl5pPr lvl="4">
               <a:spcBef>
@@ -13404,9 +13404,9 @@
               <a:spcAft>
                 <a:spcPts val="0"/>
               </a:spcAft>
-              <a:buSzPts val="1400"/>
-              <a:buNone/>
-              <a:defRPr sz="1800"/>
+              <a:buSzPts val="1867"/>
+              <a:buNone/>
+              <a:defRPr sz="2400"/>
             </a:lvl5pPr>
             <a:lvl6pPr lvl="5">
               <a:spcBef>
@@ -13415,9 +13415,9 @@
               <a:spcAft>
                 <a:spcPts val="0"/>
               </a:spcAft>
-              <a:buSzPts val="1400"/>
-              <a:buNone/>
-              <a:defRPr sz="1800"/>
+              <a:buSzPts val="1867"/>
+              <a:buNone/>
+              <a:defRPr sz="2400"/>
             </a:lvl6pPr>
             <a:lvl7pPr lvl="6">
               <a:spcBef>
@@ -13426,9 +13426,9 @@
               <a:spcAft>
                 <a:spcPts val="0"/>
               </a:spcAft>
-              <a:buSzPts val="1400"/>
-              <a:buNone/>
-              <a:defRPr sz="1800"/>
+              <a:buSzPts val="1867"/>
+              <a:buNone/>
+              <a:defRPr sz="2400"/>
             </a:lvl7pPr>
             <a:lvl8pPr lvl="7">
               <a:spcBef>
@@ -13437,9 +13437,9 @@
               <a:spcAft>
                 <a:spcPts val="0"/>
               </a:spcAft>
-              <a:buSzPts val="1400"/>
-              <a:buNone/>
-              <a:defRPr sz="1800"/>
+              <a:buSzPts val="1867"/>
+              <a:buNone/>
+              <a:defRPr sz="2400"/>
             </a:lvl8pPr>
             <a:lvl9pPr lvl="8">
               <a:spcBef>
@@ -13448,9 +13448,9 @@
               <a:spcAft>
                 <a:spcPts val="0"/>
               </a:spcAft>
-              <a:buSzPts val="1400"/>
-              <a:buNone/>
-              <a:defRPr sz="1800"/>
+              <a:buSzPts val="1867"/>
+              <a:buNone/>
+              <a:defRPr sz="2400"/>
             </a:lvl9pPr>
           </a:lstStyle>
           <a:p/>
@@ -13466,8 +13466,8 @@
         </p:nvSpPr>
         <p:spPr>
           <a:xfrm>
-            <a:off x="342900" y="1200151"/>
-            <a:ext cx="6172200" cy="3394472"/>
+            <a:off x="457189" y="1600161"/>
+            <a:ext cx="8229394" cy="4525849"/>
           </a:xfrm>
           <a:prstGeom prst="rect">
             <a:avLst/>
@@ -13478,11 +13478,57 @@
           </a:ln>
         </p:spPr>
         <p:txBody>
-          <a:bodyPr anchorCtr="0" anchor="t" bIns="45700" lIns="91425" spcFirstLastPara="1" rIns="91425" wrap="square" tIns="45700">
+          <a:bodyPr anchorCtr="0" anchor="t" bIns="60932" lIns="121897" spcFirstLastPara="1" rIns="121897" wrap="square" tIns="60932">
             <a:normAutofit/>
           </a:bodyPr>
           <a:lstStyle>
             <a:lvl1pPr indent="-381000" lvl="0" marL="457200" marR="0" rtl="0" algn="l">
+              <a:spcBef>
+                <a:spcPts val="640"/>
+              </a:spcBef>
+              <a:spcAft>
+                <a:spcPts val="0"/>
+              </a:spcAft>
+              <a:buClr>
+                <a:schemeClr val="dk1"/>
+              </a:buClr>
+              <a:buSzPts val="3200"/>
+              <a:buFont typeface="Arial"/>
+              <a:buChar char="•"/>
+              <a:defRPr b="0" i="0" sz="3200" u="none" cap="none" strike="noStrike">
+                <a:solidFill>
+                  <a:schemeClr val="dk1"/>
+                </a:solidFill>
+                <a:latin typeface="Calibri"/>
+                <a:ea typeface="Calibri"/>
+                <a:cs typeface="Calibri"/>
+                <a:sym typeface="Calibri"/>
+              </a:defRPr>
+            </a:lvl1pPr>
+            <a:lvl2pPr indent="-361950" lvl="1" marL="914400" marR="0" rtl="0" algn="l">
+              <a:spcBef>
+                <a:spcPts val="560"/>
+              </a:spcBef>
+              <a:spcAft>
+                <a:spcPts val="0"/>
+              </a:spcAft>
+              <a:buClr>
+                <a:schemeClr val="dk1"/>
+              </a:buClr>
+              <a:buSzPts val="2800"/>
+              <a:buFont typeface="Arial"/>
+              <a:buChar char="–"/>
+              <a:defRPr b="0" i="0" sz="2800" u="none" cap="none" strike="noStrike">
+                <a:solidFill>
+                  <a:schemeClr val="dk1"/>
+                </a:solidFill>
+                <a:latin typeface="Calibri"/>
+                <a:ea typeface="Calibri"/>
+                <a:cs typeface="Calibri"/>
+                <a:sym typeface="Calibri"/>
+              </a:defRPr>
+            </a:lvl2pPr>
+            <a:lvl3pPr indent="-342900" lvl="2" marL="1371600" marR="0" rtl="0" algn="l">
               <a:spcBef>
                 <a:spcPts val="480"/>
               </a:spcBef>
@@ -13504,10 +13550,10 @@
                 <a:cs typeface="Calibri"/>
                 <a:sym typeface="Calibri"/>
               </a:defRPr>
-            </a:lvl1pPr>
-            <a:lvl2pPr indent="-361950" lvl="1" marL="914400" marR="0" rtl="0" algn="l">
-              <a:spcBef>
-                <a:spcPts val="420"/>
+            </a:lvl3pPr>
+            <a:lvl4pPr indent="-323850" lvl="3" marL="1828800" marR="0" rtl="0" algn="l">
+              <a:spcBef>
+                <a:spcPts val="400"/>
               </a:spcBef>
               <a:spcAft>
                 <a:spcPts val="0"/>
@@ -13515,56 +13561,10 @@
               <a:buClr>
                 <a:schemeClr val="dk1"/>
               </a:buClr>
-              <a:buSzPts val="2100"/>
+              <a:buSzPts val="2000"/>
               <a:buFont typeface="Arial"/>
               <a:buChar char="–"/>
-              <a:defRPr b="0" i="0" sz="2100" u="none" cap="none" strike="noStrike">
-                <a:solidFill>
-                  <a:schemeClr val="dk1"/>
-                </a:solidFill>
-                <a:latin typeface="Calibri"/>
-                <a:ea typeface="Calibri"/>
-                <a:cs typeface="Calibri"/>
-                <a:sym typeface="Calibri"/>
-              </a:defRPr>
-            </a:lvl2pPr>
-            <a:lvl3pPr indent="-342900" lvl="2" marL="1371600" marR="0" rtl="0" algn="l">
-              <a:spcBef>
-                <a:spcPts val="360"/>
-              </a:spcBef>
-              <a:spcAft>
-                <a:spcPts val="0"/>
-              </a:spcAft>
-              <a:buClr>
-                <a:schemeClr val="dk1"/>
-              </a:buClr>
-              <a:buSzPts val="1800"/>
-              <a:buFont typeface="Arial"/>
-              <a:buChar char="•"/>
-              <a:defRPr b="0" i="0" sz="1800" u="none" cap="none" strike="noStrike">
-                <a:solidFill>
-                  <a:schemeClr val="dk1"/>
-                </a:solidFill>
-                <a:latin typeface="Calibri"/>
-                <a:ea typeface="Calibri"/>
-                <a:cs typeface="Calibri"/>
-                <a:sym typeface="Calibri"/>
-              </a:defRPr>
-            </a:lvl3pPr>
-            <a:lvl4pPr indent="-323850" lvl="3" marL="1828800" marR="0" rtl="0" algn="l">
-              <a:spcBef>
-                <a:spcPts val="300"/>
-              </a:spcBef>
-              <a:spcAft>
-                <a:spcPts val="0"/>
-              </a:spcAft>
-              <a:buClr>
-                <a:schemeClr val="dk1"/>
-              </a:buClr>
-              <a:buSzPts val="1500"/>
-              <a:buFont typeface="Arial"/>
-              <a:buChar char="–"/>
-              <a:defRPr b="0" i="0" sz="1500" u="none" cap="none" strike="noStrike">
+              <a:defRPr b="0" i="0" sz="2000" u="none" cap="none" strike="noStrike">
                 <a:solidFill>
                   <a:schemeClr val="dk1"/>
                 </a:solidFill>
@@ -13576,7 +13576,7 @@
             </a:lvl4pPr>
             <a:lvl5pPr indent="-323850" lvl="4" marL="2286000" marR="0" rtl="0" algn="l">
               <a:spcBef>
-                <a:spcPts val="300"/>
+                <a:spcPts val="400"/>
               </a:spcBef>
               <a:spcAft>
                 <a:spcPts val="0"/>
@@ -13584,10 +13584,10 @@
               <a:buClr>
                 <a:schemeClr val="dk1"/>
               </a:buClr>
-              <a:buSzPts val="1500"/>
+              <a:buSzPts val="2000"/>
               <a:buFont typeface="Arial"/>
               <a:buChar char="»"/>
-              <a:defRPr b="0" i="0" sz="1500" u="none" cap="none" strike="noStrike">
+              <a:defRPr b="0" i="0" sz="2000" u="none" cap="none" strike="noStrike">
                 <a:solidFill>
                   <a:schemeClr val="dk1"/>
                 </a:solidFill>
@@ -13599,7 +13599,7 @@
             </a:lvl5pPr>
             <a:lvl6pPr indent="-323850" lvl="5" marL="2743200" marR="0" rtl="0" algn="l">
               <a:spcBef>
-                <a:spcPts val="300"/>
+                <a:spcPts val="400"/>
               </a:spcBef>
               <a:spcAft>
                 <a:spcPts val="0"/>
@@ -13607,10 +13607,10 @@
               <a:buClr>
                 <a:schemeClr val="dk1"/>
               </a:buClr>
-              <a:buSzPts val="1500"/>
+              <a:buSzPts val="2000"/>
               <a:buFont typeface="Arial"/>
               <a:buChar char="•"/>
-              <a:defRPr b="0" i="0" sz="1500" u="none" cap="none" strike="noStrike">
+              <a:defRPr b="0" i="0" sz="2000" u="none" cap="none" strike="noStrike">
                 <a:solidFill>
                   <a:schemeClr val="dk1"/>
                 </a:solidFill>
@@ -13622,7 +13622,7 @@
             </a:lvl6pPr>
             <a:lvl7pPr indent="-323850" lvl="6" marL="3200400" marR="0" rtl="0" algn="l">
               <a:spcBef>
-                <a:spcPts val="300"/>
+                <a:spcPts val="400"/>
               </a:spcBef>
               <a:spcAft>
                 <a:spcPts val="0"/>
@@ -13630,10 +13630,10 @@
               <a:buClr>
                 <a:schemeClr val="dk1"/>
               </a:buClr>
-              <a:buSzPts val="1500"/>
+              <a:buSzPts val="2000"/>
               <a:buFont typeface="Arial"/>
               <a:buChar char="•"/>
-              <a:defRPr b="0" i="0" sz="1500" u="none" cap="none" strike="noStrike">
+              <a:defRPr b="0" i="0" sz="2000" u="none" cap="none" strike="noStrike">
                 <a:solidFill>
                   <a:schemeClr val="dk1"/>
                 </a:solidFill>
@@ -13645,7 +13645,7 @@
             </a:lvl7pPr>
             <a:lvl8pPr indent="-323850" lvl="7" marL="3657600" marR="0" rtl="0" algn="l">
               <a:spcBef>
-                <a:spcPts val="300"/>
+                <a:spcPts val="400"/>
               </a:spcBef>
               <a:spcAft>
                 <a:spcPts val="0"/>
@@ -13653,10 +13653,10 @@
               <a:buClr>
                 <a:schemeClr val="dk1"/>
               </a:buClr>
-              <a:buSzPts val="1500"/>
+              <a:buSzPts val="2000"/>
               <a:buFont typeface="Arial"/>
               <a:buChar char="•"/>
-              <a:defRPr b="0" i="0" sz="1500" u="none" cap="none" strike="noStrike">
+              <a:defRPr b="0" i="0" sz="2000" u="none" cap="none" strike="noStrike">
                 <a:solidFill>
                   <a:schemeClr val="dk1"/>
                 </a:solidFill>
@@ -13668,7 +13668,7 @@
             </a:lvl8pPr>
             <a:lvl9pPr indent="-323850" lvl="8" marL="4114800" marR="0" rtl="0" algn="l">
               <a:spcBef>
-                <a:spcPts val="300"/>
+                <a:spcPts val="400"/>
               </a:spcBef>
               <a:spcAft>
                 <a:spcPts val="0"/>
@@ -13676,10 +13676,10 @@
               <a:buClr>
                 <a:schemeClr val="dk1"/>
               </a:buClr>
-              <a:buSzPts val="1500"/>
+              <a:buSzPts val="2000"/>
               <a:buFont typeface="Arial"/>
               <a:buChar char="•"/>
-              <a:defRPr b="0" i="0" sz="1500" u="none" cap="none" strike="noStrike">
+              <a:defRPr b="0" i="0" sz="2000" u="none" cap="none" strike="noStrike">
                 <a:solidFill>
                   <a:schemeClr val="dk1"/>
                 </a:solidFill>
@@ -13703,8 +13703,8 @@
         </p:nvSpPr>
         <p:spPr>
           <a:xfrm>
-            <a:off x="342900" y="4767263"/>
-            <a:ext cx="1600200" cy="273844"/>
+            <a:off x="457189" y="6356192"/>
+            <a:ext cx="2133547" cy="365116"/>
           </a:xfrm>
           <a:prstGeom prst="rect">
             <a:avLst/>
@@ -13715,7 +13715,7 @@
           </a:ln>
         </p:spPr>
         <p:txBody>
-          <a:bodyPr anchorCtr="0" anchor="ctr" bIns="45700" lIns="91425" spcFirstLastPara="1" rIns="91425" wrap="square" tIns="45700">
+          <a:bodyPr anchorCtr="0" anchor="ctr" bIns="60932" lIns="121897" spcFirstLastPara="1" rIns="121897" wrap="square" tIns="60932">
             <a:noAutofit/>
           </a:bodyPr>
           <a:lstStyle>
@@ -13732,10 +13732,10 @@
               <a:buClr>
                 <a:srgbClr val="888888"/>
               </a:buClr>
-              <a:buSzPts val="900"/>
+              <a:buSzPts val="1200"/>
               <a:buFont typeface="Calibri"/>
               <a:buNone/>
-              <a:defRPr b="0" i="0" sz="900" u="none" cap="none" strike="noStrike">
+              <a:defRPr b="0" i="0" sz="1200" u="none" cap="none" strike="noStrike">
                 <a:solidFill>
                   <a:srgbClr val="888888"/>
                 </a:solidFill>
@@ -13758,10 +13758,10 @@
               <a:buClr>
                 <a:schemeClr val="accent2"/>
               </a:buClr>
-              <a:buSzPts val="1400"/>
+              <a:buSzPts val="1867"/>
               <a:buFont typeface="Calibri"/>
               <a:buNone/>
-              <a:defRPr b="0" i="0" sz="1400" u="none" cap="none" strike="noStrike">
+              <a:defRPr b="0" i="0" sz="1867" u="none" cap="none" strike="noStrike">
                 <a:solidFill>
                   <a:schemeClr val="accent2"/>
                 </a:solidFill>
@@ -13784,10 +13784,10 @@
               <a:buClr>
                 <a:schemeClr val="accent2"/>
               </a:buClr>
-              <a:buSzPts val="1400"/>
+              <a:buSzPts val="1867"/>
               <a:buFont typeface="Calibri"/>
               <a:buNone/>
-              <a:defRPr b="0" i="0" sz="1400" u="none" cap="none" strike="noStrike">
+              <a:defRPr b="0" i="0" sz="1867" u="none" cap="none" strike="noStrike">
                 <a:solidFill>
                   <a:schemeClr val="accent2"/>
                 </a:solidFill>
@@ -13810,10 +13810,10 @@
               <a:buClr>
                 <a:schemeClr val="accent2"/>
               </a:buClr>
-              <a:buSzPts val="1400"/>
+              <a:buSzPts val="1867"/>
               <a:buFont typeface="Calibri"/>
               <a:buNone/>
-              <a:defRPr b="0" i="0" sz="1400" u="none" cap="none" strike="noStrike">
+              <a:defRPr b="0" i="0" sz="1867" u="none" cap="none" strike="noStrike">
                 <a:solidFill>
                   <a:schemeClr val="accent2"/>
                 </a:solidFill>
@@ -13836,10 +13836,10 @@
               <a:buClr>
                 <a:schemeClr val="accent2"/>
               </a:buClr>
-              <a:buSzPts val="1400"/>
+              <a:buSzPts val="1867"/>
               <a:buFont typeface="Calibri"/>
               <a:buNone/>
-              <a:defRPr b="0" i="0" sz="1400" u="none" cap="none" strike="noStrike">
+              <a:defRPr b="0" i="0" sz="1867" u="none" cap="none" strike="noStrike">
                 <a:solidFill>
                   <a:schemeClr val="accent2"/>
                 </a:solidFill>
@@ -13862,10 +13862,10 @@
               <a:buClr>
                 <a:schemeClr val="accent2"/>
               </a:buClr>
-              <a:buSzPts val="1400"/>
+              <a:buSzPts val="1867"/>
               <a:buFont typeface="Calibri"/>
               <a:buNone/>
-              <a:defRPr b="0" i="0" sz="1400" u="none" cap="none" strike="noStrike">
+              <a:defRPr b="0" i="0" sz="1867" u="none" cap="none" strike="noStrike">
                 <a:solidFill>
                   <a:schemeClr val="accent2"/>
                 </a:solidFill>
@@ -13888,10 +13888,10 @@
               <a:buClr>
                 <a:schemeClr val="accent2"/>
               </a:buClr>
-              <a:buSzPts val="1400"/>
+              <a:buSzPts val="1867"/>
               <a:buFont typeface="Calibri"/>
               <a:buNone/>
-              <a:defRPr b="0" i="0" sz="1400" u="none" cap="none" strike="noStrike">
+              <a:defRPr b="0" i="0" sz="1867" u="none" cap="none" strike="noStrike">
                 <a:solidFill>
                   <a:schemeClr val="accent2"/>
                 </a:solidFill>
@@ -13914,10 +13914,10 @@
               <a:buClr>
                 <a:schemeClr val="accent2"/>
               </a:buClr>
-              <a:buSzPts val="1400"/>
+              <a:buSzPts val="1867"/>
               <a:buFont typeface="Calibri"/>
               <a:buNone/>
-              <a:defRPr b="0" i="0" sz="1400" u="none" cap="none" strike="noStrike">
+              <a:defRPr b="0" i="0" sz="1867" u="none" cap="none" strike="noStrike">
                 <a:solidFill>
                   <a:schemeClr val="accent2"/>
                 </a:solidFill>
@@ -13940,10 +13940,10 @@
               <a:buClr>
                 <a:schemeClr val="accent2"/>
               </a:buClr>
-              <a:buSzPts val="1400"/>
+              <a:buSzPts val="1867"/>
               <a:buFont typeface="Calibri"/>
               <a:buNone/>
-              <a:defRPr b="0" i="0" sz="1400" u="none" cap="none" strike="noStrike">
+              <a:defRPr b="0" i="0" sz="1867" u="none" cap="none" strike="noStrike">
                 <a:solidFill>
                   <a:schemeClr val="accent2"/>
                 </a:solidFill>
@@ -13967,8 +13967,8 @@
         </p:nvSpPr>
         <p:spPr>
           <a:xfrm>
-            <a:off x="2343150" y="4767263"/>
-            <a:ext cx="2171700" cy="273844"/>
+            <a:off x="3124122" y="6356192"/>
+            <a:ext cx="2895528" cy="365116"/>
           </a:xfrm>
           <a:prstGeom prst="rect">
             <a:avLst/>
@@ -13979,7 +13979,7 @@
           </a:ln>
         </p:spPr>
         <p:txBody>
-          <a:bodyPr anchorCtr="0" anchor="ctr" bIns="45700" lIns="91425" spcFirstLastPara="1" rIns="91425" wrap="square" tIns="45700">
+          <a:bodyPr anchorCtr="0" anchor="ctr" bIns="60932" lIns="121897" spcFirstLastPara="1" rIns="121897" wrap="square" tIns="60932">
             <a:noAutofit/>
           </a:bodyPr>
           <a:lstStyle>
@@ -13996,10 +13996,10 @@
               <a:buClr>
                 <a:srgbClr val="888888"/>
               </a:buClr>
-              <a:buSzPts val="900"/>
+              <a:buSzPts val="1200"/>
               <a:buFont typeface="Calibri"/>
               <a:buNone/>
-              <a:defRPr b="0" i="0" sz="900" u="none" cap="none" strike="noStrike">
+              <a:defRPr b="0" i="0" sz="1200" u="none" cap="none" strike="noStrike">
                 <a:solidFill>
                   <a:srgbClr val="888888"/>
                 </a:solidFill>
@@ -14022,10 +14022,10 @@
               <a:buClr>
                 <a:schemeClr val="accent2"/>
               </a:buClr>
-              <a:buSzPts val="1400"/>
+              <a:buSzPts val="1867"/>
               <a:buFont typeface="Calibri"/>
               <a:buNone/>
-              <a:defRPr b="0" i="0" sz="1400" u="none" cap="none" strike="noStrike">
+              <a:defRPr b="0" i="0" sz="1867" u="none" cap="none" strike="noStrike">
                 <a:solidFill>
                   <a:schemeClr val="accent2"/>
                 </a:solidFill>
@@ -14048,10 +14048,10 @@
               <a:buClr>
                 <a:schemeClr val="accent2"/>
               </a:buClr>
-              <a:buSzPts val="1400"/>
+              <a:buSzPts val="1867"/>
               <a:buFont typeface="Calibri"/>
               <a:buNone/>
-              <a:defRPr b="0" i="0" sz="1400" u="none" cap="none" strike="noStrike">
+              <a:defRPr b="0" i="0" sz="1867" u="none" cap="none" strike="noStrike">
                 <a:solidFill>
                   <a:schemeClr val="accent2"/>
                 </a:solidFill>
@@ -14074,10 +14074,10 @@
               <a:buClr>
                 <a:schemeClr val="accent2"/>
               </a:buClr>
-              <a:buSzPts val="1400"/>
+              <a:buSzPts val="1867"/>
               <a:buFont typeface="Calibri"/>
               <a:buNone/>
-              <a:defRPr b="0" i="0" sz="1400" u="none" cap="none" strike="noStrike">
+              <a:defRPr b="0" i="0" sz="1867" u="none" cap="none" strike="noStrike">
                 <a:solidFill>
                   <a:schemeClr val="accent2"/>
                 </a:solidFill>
@@ -14100,10 +14100,10 @@
               <a:buClr>
                 <a:schemeClr val="accent2"/>
               </a:buClr>
-              <a:buSzPts val="1400"/>
+              <a:buSzPts val="1867"/>
               <a:buFont typeface="Calibri"/>
               <a:buNone/>
-              <a:defRPr b="0" i="0" sz="1400" u="none" cap="none" strike="noStrike">
+              <a:defRPr b="0" i="0" sz="1867" u="none" cap="none" strike="noStrike">
                 <a:solidFill>
                   <a:schemeClr val="accent2"/>
                 </a:solidFill>
@@ -14126,10 +14126,10 @@
               <a:buClr>
                 <a:schemeClr val="accent2"/>
               </a:buClr>
-              <a:buSzPts val="1400"/>
+              <a:buSzPts val="1867"/>
               <a:buFont typeface="Calibri"/>
               <a:buNone/>
-              <a:defRPr b="0" i="0" sz="1400" u="none" cap="none" strike="noStrike">
+              <a:defRPr b="0" i="0" sz="1867" u="none" cap="none" strike="noStrike">
                 <a:solidFill>
                   <a:schemeClr val="accent2"/>
                 </a:solidFill>
@@ -14152,10 +14152,10 @@
               <a:buClr>
                 <a:schemeClr val="accent2"/>
               </a:buClr>
-              <a:buSzPts val="1400"/>
+              <a:buSzPts val="1867"/>
               <a:buFont typeface="Calibri"/>
               <a:buNone/>
-              <a:defRPr b="0" i="0" sz="1400" u="none" cap="none" strike="noStrike">
+              <a:defRPr b="0" i="0" sz="1867" u="none" cap="none" strike="noStrike">
                 <a:solidFill>
                   <a:schemeClr val="accent2"/>
                 </a:solidFill>
@@ -14178,10 +14178,10 @@
               <a:buClr>
                 <a:schemeClr val="accent2"/>
               </a:buClr>
-              <a:buSzPts val="1400"/>
+              <a:buSzPts val="1867"/>
               <a:buFont typeface="Calibri"/>
               <a:buNone/>
-              <a:defRPr b="0" i="0" sz="1400" u="none" cap="none" strike="noStrike">
+              <a:defRPr b="0" i="0" sz="1867" u="none" cap="none" strike="noStrike">
                 <a:solidFill>
                   <a:schemeClr val="accent2"/>
                 </a:solidFill>
@@ -14204,10 +14204,10 @@
               <a:buClr>
                 <a:schemeClr val="accent2"/>
               </a:buClr>
-              <a:buSzPts val="1400"/>
+              <a:buSzPts val="1867"/>
               <a:buFont typeface="Calibri"/>
               <a:buNone/>
-              <a:defRPr b="0" i="0" sz="1400" u="none" cap="none" strike="noStrike">
+              <a:defRPr b="0" i="0" sz="1867" u="none" cap="none" strike="noStrike">
                 <a:solidFill>
                   <a:schemeClr val="accent2"/>
                 </a:solidFill>
@@ -14231,8 +14231,8 @@
         </p:nvSpPr>
         <p:spPr>
           <a:xfrm>
-            <a:off x="4914900" y="4767263"/>
-            <a:ext cx="1600200" cy="273844"/>
+            <a:off x="6553036" y="6356192"/>
+            <a:ext cx="2133547" cy="365116"/>
           </a:xfrm>
           <a:prstGeom prst="rect">
             <a:avLst/>
@@ -14243,7 +14243,7 @@
           </a:ln>
         </p:spPr>
         <p:txBody>
-          <a:bodyPr anchorCtr="0" anchor="ctr" bIns="45700" lIns="91425" spcFirstLastPara="1" rIns="91425" wrap="square" tIns="45700">
+          <a:bodyPr anchorCtr="0" anchor="ctr" bIns="60932" lIns="121897" spcFirstLastPara="1" rIns="121897" wrap="square" tIns="60932">
             <a:noAutofit/>
           </a:bodyPr>
           <a:lstStyle>
@@ -14260,10 +14260,10 @@
               <a:buClr>
                 <a:srgbClr val="888888"/>
               </a:buClr>
-              <a:buSzPts val="900"/>
+              <a:buSzPts val="1200"/>
               <a:buFont typeface="Calibri"/>
               <a:buNone/>
-              <a:defRPr b="0" i="0" sz="900" u="none" cap="none" strike="noStrike">
+              <a:defRPr b="0" i="0" sz="1200" u="none" cap="none" strike="noStrike">
                 <a:solidFill>
                   <a:srgbClr val="888888"/>
                 </a:solidFill>
@@ -14286,10 +14286,10 @@
               <a:buClr>
                 <a:srgbClr val="888888"/>
               </a:buClr>
-              <a:buSzPts val="900"/>
+              <a:buSzPts val="1200"/>
               <a:buFont typeface="Calibri"/>
               <a:buNone/>
-              <a:defRPr b="0" i="0" sz="900" u="none" cap="none" strike="noStrike">
+              <a:defRPr b="0" i="0" sz="1200" u="none" cap="none" strike="noStrike">
                 <a:solidFill>
                   <a:srgbClr val="888888"/>
                 </a:solidFill>
@@ -14312,10 +14312,10 @@
               <a:buClr>
                 <a:srgbClr val="888888"/>
               </a:buClr>
-              <a:buSzPts val="900"/>
+              <a:buSzPts val="1200"/>
               <a:buFont typeface="Calibri"/>
               <a:buNone/>
-              <a:defRPr b="0" i="0" sz="900" u="none" cap="none" strike="noStrike">
+              <a:defRPr b="0" i="0" sz="1200" u="none" cap="none" strike="noStrike">
                 <a:solidFill>
                   <a:srgbClr val="888888"/>
                 </a:solidFill>
@@ -14338,10 +14338,10 @@
               <a:buClr>
                 <a:srgbClr val="888888"/>
               </a:buClr>
-              <a:buSzPts val="900"/>
+              <a:buSzPts val="1200"/>
               <a:buFont typeface="Calibri"/>
               <a:buNone/>
-              <a:defRPr b="0" i="0" sz="900" u="none" cap="none" strike="noStrike">
+              <a:defRPr b="0" i="0" sz="1200" u="none" cap="none" strike="noStrike">
                 <a:solidFill>
                   <a:srgbClr val="888888"/>
                 </a:solidFill>
@@ -14364,10 +14364,10 @@
               <a:buClr>
                 <a:srgbClr val="888888"/>
               </a:buClr>
-              <a:buSzPts val="900"/>
+              <a:buSzPts val="1200"/>
               <a:buFont typeface="Calibri"/>
               <a:buNone/>
-              <a:defRPr b="0" i="0" sz="900" u="none" cap="none" strike="noStrike">
+              <a:defRPr b="0" i="0" sz="1200" u="none" cap="none" strike="noStrike">
                 <a:solidFill>
                   <a:srgbClr val="888888"/>
                 </a:solidFill>
@@ -14390,10 +14390,10 @@
               <a:buClr>
                 <a:srgbClr val="888888"/>
               </a:buClr>
-              <a:buSzPts val="900"/>
+              <a:buSzPts val="1200"/>
               <a:buFont typeface="Calibri"/>
               <a:buNone/>
-              <a:defRPr b="0" i="0" sz="900" u="none" cap="none" strike="noStrike">
+              <a:defRPr b="0" i="0" sz="1200" u="none" cap="none" strike="noStrike">
                 <a:solidFill>
                   <a:srgbClr val="888888"/>
                 </a:solidFill>
@@ -14416,10 +14416,10 @@
               <a:buClr>
                 <a:srgbClr val="888888"/>
               </a:buClr>
-              <a:buSzPts val="900"/>
+              <a:buSzPts val="1200"/>
               <a:buFont typeface="Calibri"/>
               <a:buNone/>
-              <a:defRPr b="0" i="0" sz="900" u="none" cap="none" strike="noStrike">
+              <a:defRPr b="0" i="0" sz="1200" u="none" cap="none" strike="noStrike">
                 <a:solidFill>
                   <a:srgbClr val="888888"/>
                 </a:solidFill>
@@ -14442,10 +14442,10 @@
               <a:buClr>
                 <a:srgbClr val="888888"/>
               </a:buClr>
-              <a:buSzPts val="900"/>
+              <a:buSzPts val="1200"/>
               <a:buFont typeface="Calibri"/>
               <a:buNone/>
-              <a:defRPr b="0" i="0" sz="900" u="none" cap="none" strike="noStrike">
+              <a:defRPr b="0" i="0" sz="1200" u="none" cap="none" strike="noStrike">
                 <a:solidFill>
                   <a:srgbClr val="888888"/>
                 </a:solidFill>
@@ -14468,10 +14468,10 @@
               <a:buClr>
                 <a:srgbClr val="888888"/>
               </a:buClr>
-              <a:buSzPts val="900"/>
+              <a:buSzPts val="1200"/>
               <a:buFont typeface="Calibri"/>
               <a:buNone/>
-              <a:defRPr b="0" i="0" sz="900" u="none" cap="none" strike="noStrike">
+              <a:defRPr b="0" i="0" sz="1200" u="none" cap="none" strike="noStrike">
                 <a:solidFill>
                   <a:srgbClr val="888888"/>
                 </a:solidFill>
@@ -14545,7 +14545,7 @@
           <a:srgbClr val="000000"/>
         </a:buClr>
         <a:buFont typeface="Arial"/>
-        <a:defRPr b="0" i="0" sz="1400" u="none" cap="none" strike="noStrike">
+        <a:defRPr b="0" i="0" sz="1867" u="none" cap="none" strike="noStrike">
           <a:solidFill>
             <a:srgbClr val="000000"/>
           </a:solidFill>
@@ -14569,7 +14569,7 @@
           <a:srgbClr val="000000"/>
         </a:buClr>
         <a:buFont typeface="Arial"/>
-        <a:defRPr b="0" i="0" sz="1400" u="none" cap="none" strike="noStrike">
+        <a:defRPr b="0" i="0" sz="1867" u="none" cap="none" strike="noStrike">
           <a:solidFill>
             <a:srgbClr val="000000"/>
           </a:solidFill>
@@ -14593,7 +14593,7 @@
           <a:srgbClr val="000000"/>
         </a:buClr>
         <a:buFont typeface="Arial"/>
-        <a:defRPr b="0" i="0" sz="1400" u="none" cap="none" strike="noStrike">
+        <a:defRPr b="0" i="0" sz="1867" u="none" cap="none" strike="noStrike">
           <a:solidFill>
             <a:srgbClr val="000000"/>
           </a:solidFill>
@@ -14617,7 +14617,7 @@
           <a:srgbClr val="000000"/>
         </a:buClr>
         <a:buFont typeface="Arial"/>
-        <a:defRPr b="0" i="0" sz="1400" u="none" cap="none" strike="noStrike">
+        <a:defRPr b="0" i="0" sz="1867" u="none" cap="none" strike="noStrike">
           <a:solidFill>
             <a:srgbClr val="000000"/>
           </a:solidFill>
@@ -14641,7 +14641,7 @@
           <a:srgbClr val="000000"/>
         </a:buClr>
         <a:buFont typeface="Arial"/>
-        <a:defRPr b="0" i="0" sz="1400" u="none" cap="none" strike="noStrike">
+        <a:defRPr b="0" i="0" sz="1867" u="none" cap="none" strike="noStrike">
           <a:solidFill>
             <a:srgbClr val="000000"/>
           </a:solidFill>
@@ -14665,7 +14665,7 @@
           <a:srgbClr val="000000"/>
         </a:buClr>
         <a:buFont typeface="Arial"/>
-        <a:defRPr b="0" i="0" sz="1400" u="none" cap="none" strike="noStrike">
+        <a:defRPr b="0" i="0" sz="1867" u="none" cap="none" strike="noStrike">
           <a:solidFill>
             <a:srgbClr val="000000"/>
           </a:solidFill>
@@ -14689,7 +14689,7 @@
           <a:srgbClr val="000000"/>
         </a:buClr>
         <a:buFont typeface="Arial"/>
-        <a:defRPr b="0" i="0" sz="1400" u="none" cap="none" strike="noStrike">
+        <a:defRPr b="0" i="0" sz="1867" u="none" cap="none" strike="noStrike">
           <a:solidFill>
             <a:srgbClr val="000000"/>
           </a:solidFill>
@@ -14713,7 +14713,7 @@
           <a:srgbClr val="000000"/>
         </a:buClr>
         <a:buFont typeface="Arial"/>
-        <a:defRPr b="0" i="0" sz="1400" u="none" cap="none" strike="noStrike">
+        <a:defRPr b="0" i="0" sz="1867" u="none" cap="none" strike="noStrike">
           <a:solidFill>
             <a:srgbClr val="000000"/>
           </a:solidFill>
@@ -14737,7 +14737,7 @@
           <a:srgbClr val="000000"/>
         </a:buClr>
         <a:buFont typeface="Arial"/>
-        <a:defRPr b="0" i="0" sz="1400" u="none" cap="none" strike="noStrike">
+        <a:defRPr b="0" i="0" sz="1867" u="none" cap="none" strike="noStrike">
           <a:solidFill>
             <a:srgbClr val="000000"/>
           </a:solidFill>
@@ -14774,7 +14774,7 @@
           <a:srgbClr val="000000"/>
         </a:buClr>
         <a:buFont typeface="Arial"/>
-        <a:defRPr b="0" i="0" sz="1400" u="none" cap="none" strike="noStrike">
+        <a:defRPr b="0" i="0" sz="1867" u="none" cap="none" strike="noStrike">
           <a:solidFill>
             <a:srgbClr val="000000"/>
           </a:solidFill>
@@ -14798,7 +14798,7 @@
           <a:srgbClr val="000000"/>
         </a:buClr>
         <a:buFont typeface="Arial"/>
-        <a:defRPr b="0" i="0" sz="1400" u="none" cap="none" strike="noStrike">
+        <a:defRPr b="0" i="0" sz="1867" u="none" cap="none" strike="noStrike">
           <a:solidFill>
             <a:srgbClr val="000000"/>
           </a:solidFill>
@@ -14822,7 +14822,7 @@
           <a:srgbClr val="000000"/>
         </a:buClr>
         <a:buFont typeface="Arial"/>
-        <a:defRPr b="0" i="0" sz="1400" u="none" cap="none" strike="noStrike">
+        <a:defRPr b="0" i="0" sz="1867" u="none" cap="none" strike="noStrike">
           <a:solidFill>
             <a:srgbClr val="000000"/>
           </a:solidFill>
@@ -14846,7 +14846,7 @@
           <a:srgbClr val="000000"/>
         </a:buClr>
         <a:buFont typeface="Arial"/>
-        <a:defRPr b="0" i="0" sz="1400" u="none" cap="none" strike="noStrike">
+        <a:defRPr b="0" i="0" sz="1867" u="none" cap="none" strike="noStrike">
           <a:solidFill>
             <a:srgbClr val="000000"/>
           </a:solidFill>
@@ -14870,7 +14870,7 @@
           <a:srgbClr val="000000"/>
         </a:buClr>
         <a:buFont typeface="Arial"/>
-        <a:defRPr b="0" i="0" sz="1400" u="none" cap="none" strike="noStrike">
+        <a:defRPr b="0" i="0" sz="1867" u="none" cap="none" strike="noStrike">
           <a:solidFill>
             <a:srgbClr val="000000"/>
           </a:solidFill>
@@ -14894,7 +14894,7 @@
           <a:srgbClr val="000000"/>
         </a:buClr>
         <a:buFont typeface="Arial"/>
-        <a:defRPr b="0" i="0" sz="1400" u="none" cap="none" strike="noStrike">
+        <a:defRPr b="0" i="0" sz="1867" u="none" cap="none" strike="noStrike">
           <a:solidFill>
             <a:srgbClr val="000000"/>
           </a:solidFill>
@@ -14918,7 +14918,7 @@
           <a:srgbClr val="000000"/>
         </a:buClr>
         <a:buFont typeface="Arial"/>
-        <a:defRPr b="0" i="0" sz="1400" u="none" cap="none" strike="noStrike">
+        <a:defRPr b="0" i="0" sz="1867" u="none" cap="none" strike="noStrike">
           <a:solidFill>
             <a:srgbClr val="000000"/>
           </a:solidFill>
@@ -14942,7 +14942,7 @@
           <a:srgbClr val="000000"/>
         </a:buClr>
         <a:buFont typeface="Arial"/>
-        <a:defRPr b="0" i="0" sz="1400" u="none" cap="none" strike="noStrike">
+        <a:defRPr b="0" i="0" sz="1867" u="none" cap="none" strike="noStrike">
           <a:solidFill>
             <a:srgbClr val="000000"/>
           </a:solidFill>
@@ -14966,7 +14966,7 @@
           <a:srgbClr val="000000"/>
         </a:buClr>
         <a:buFont typeface="Arial"/>
-        <a:defRPr b="0" i="0" sz="1400" u="none" cap="none" strike="noStrike">
+        <a:defRPr b="0" i="0" sz="1867" u="none" cap="none" strike="noStrike">
           <a:solidFill>
             <a:srgbClr val="000000"/>
           </a:solidFill>
@@ -15003,7 +15003,7 @@
           <a:srgbClr val="000000"/>
         </a:buClr>
         <a:buFont typeface="Arial"/>
-        <a:defRPr b="0" i="0" sz="1400" u="none" cap="none" strike="noStrike">
+        <a:defRPr b="0" i="0" sz="1867" u="none" cap="none" strike="noStrike">
           <a:solidFill>
             <a:srgbClr val="000000"/>
           </a:solidFill>
@@ -15027,7 +15027,7 @@
           <a:srgbClr val="000000"/>
         </a:buClr>
         <a:buFont typeface="Arial"/>
-        <a:defRPr b="0" i="0" sz="1400" u="none" cap="none" strike="noStrike">
+        <a:defRPr b="0" i="0" sz="1867" u="none" cap="none" strike="noStrike">
           <a:solidFill>
             <a:srgbClr val="000000"/>
           </a:solidFill>
@@ -15051,7 +15051,7 @@
           <a:srgbClr val="000000"/>
         </a:buClr>
         <a:buFont typeface="Arial"/>
-        <a:defRPr b="0" i="0" sz="1400" u="none" cap="none" strike="noStrike">
+        <a:defRPr b="0" i="0" sz="1867" u="none" cap="none" strike="noStrike">
           <a:solidFill>
             <a:srgbClr val="000000"/>
           </a:solidFill>
@@ -15075,7 +15075,7 @@
           <a:srgbClr val="000000"/>
         </a:buClr>
         <a:buFont typeface="Arial"/>
-        <a:defRPr b="0" i="0" sz="1400" u="none" cap="none" strike="noStrike">
+        <a:defRPr b="0" i="0" sz="1867" u="none" cap="none" strike="noStrike">
           <a:solidFill>
             <a:srgbClr val="000000"/>
           </a:solidFill>
@@ -15099,7 +15099,7 @@
           <a:srgbClr val="000000"/>
         </a:buClr>
         <a:buFont typeface="Arial"/>
-        <a:defRPr b="0" i="0" sz="1400" u="none" cap="none" strike="noStrike">
+        <a:defRPr b="0" i="0" sz="1867" u="none" cap="none" strike="noStrike">
           <a:solidFill>
             <a:srgbClr val="000000"/>
           </a:solidFill>
@@ -15123,7 +15123,7 @@
           <a:srgbClr val="000000"/>
         </a:buClr>
         <a:buFont typeface="Arial"/>
-        <a:defRPr b="0" i="0" sz="1400" u="none" cap="none" strike="noStrike">
+        <a:defRPr b="0" i="0" sz="1867" u="none" cap="none" strike="noStrike">
           <a:solidFill>
             <a:srgbClr val="000000"/>
           </a:solidFill>
@@ -15147,7 +15147,7 @@
           <a:srgbClr val="000000"/>
         </a:buClr>
         <a:buFont typeface="Arial"/>
-        <a:defRPr b="0" i="0" sz="1400" u="none" cap="none" strike="noStrike">
+        <a:defRPr b="0" i="0" sz="1867" u="none" cap="none" strike="noStrike">
           <a:solidFill>
             <a:srgbClr val="000000"/>
           </a:solidFill>
@@ -15171,7 +15171,7 @@
           <a:srgbClr val="000000"/>
         </a:buClr>
         <a:buFont typeface="Arial"/>
-        <a:defRPr b="0" i="0" sz="1400" u="none" cap="none" strike="noStrike">
+        <a:defRPr b="0" i="0" sz="1867" u="none" cap="none" strike="noStrike">
           <a:solidFill>
             <a:srgbClr val="000000"/>
           </a:solidFill>
@@ -15195,7 +15195,7 @@
           <a:srgbClr val="000000"/>
         </a:buClr>
         <a:buFont typeface="Arial"/>
-        <a:defRPr b="0" i="0" sz="1400" u="none" cap="none" strike="noStrike">
+        <a:defRPr b="0" i="0" sz="1867" u="none" cap="none" strike="noStrike">
           <a:solidFill>
             <a:srgbClr val="000000"/>
           </a:solidFill>
@@ -15236,7 +15236,7 @@
         <p:spPr>
           <a:xfrm>
             <a:off x="0" y="0"/>
-            <a:ext cx="2468880" cy="5143500"/>
+            <a:ext cx="3291758" cy="6857828"/>
           </a:xfrm>
           <a:prstGeom prst="rect">
             <a:avLst/>
@@ -15249,7 +15249,7 @@
           </a:ln>
         </p:spPr>
         <p:txBody>
-          <a:bodyPr anchorCtr="0" anchor="ctr" bIns="45700" lIns="91425" spcFirstLastPara="1" rIns="91425" wrap="square" tIns="45700">
+          <a:bodyPr anchorCtr="0" anchor="ctr" bIns="60932" lIns="121897" spcFirstLastPara="1" rIns="121897" wrap="square" tIns="60932">
             <a:noAutofit/>
           </a:bodyPr>
           <a:lstStyle/>
@@ -15267,14 +15267,14 @@
               <a:buClr>
                 <a:srgbClr val="C0504D"/>
               </a:buClr>
-              <a:buSzPts val="1050"/>
+              <a:buSzPts val="1400"/>
               <a:buFont typeface="Calibri"/>
               <a:buNone/>
             </a:pPr>
             <a:r>
               <a:t/>
             </a:r>
-            <a:endParaRPr b="0" i="0" sz="1050" u="none" cap="none" strike="noStrike">
+            <a:endParaRPr b="0" i="0" sz="1400" u="none" cap="none" strike="noStrike">
               <a:solidFill>
                 <a:srgbClr val="FFFFFF"/>
               </a:solidFill>
@@ -15294,8 +15294,8 @@
         </p:nvSpPr>
         <p:spPr>
           <a:xfrm>
-            <a:off x="342900" y="685800"/>
-            <a:ext cx="1920240" cy="1721562"/>
+            <a:off x="457189" y="914377"/>
+            <a:ext cx="2560256" cy="2295359"/>
           </a:xfrm>
           <a:prstGeom prst="rect">
             <a:avLst/>
@@ -15324,12 +15324,12 @@
               <a:buClr>
                 <a:srgbClr val="FFFFFF"/>
               </a:buClr>
-              <a:buSzPts val="3600"/>
+              <a:buSzPts val="4800"/>
               <a:buFont typeface="Calibri"/>
               <a:buNone/>
             </a:pPr>
             <a:r>
-              <a:rPr b="1" i="0" lang="en" sz="3600" u="none" cap="none" strike="noStrike">
+              <a:rPr b="1" i="0" lang="en" sz="4800" u="none" cap="none" strike="noStrike">
                 <a:solidFill>
                   <a:srgbClr val="FFFFFF"/>
                 </a:solidFill>
@@ -15356,12 +15356,12 @@
               <a:buClr>
                 <a:srgbClr val="FFFFFF"/>
               </a:buClr>
-              <a:buSzPts val="3600"/>
+              <a:buSzPts val="4800"/>
               <a:buFont typeface="Calibri"/>
               <a:buNone/>
             </a:pPr>
             <a:r>
-              <a:rPr b="1" i="0" lang="en" sz="3600" u="none" cap="none" strike="noStrike">
+              <a:rPr b="1" i="0" lang="en" sz="4800" u="none" cap="none" strike="noStrike">
                 <a:solidFill>
                   <a:srgbClr val="FFFFFF"/>
                 </a:solidFill>
@@ -15384,8 +15384,8 @@
         </p:nvSpPr>
         <p:spPr>
           <a:xfrm>
-            <a:off x="342900" y="2194560"/>
-            <a:ext cx="1920240" cy="694485"/>
+            <a:off x="457189" y="2926007"/>
+            <a:ext cx="2560256" cy="925957"/>
           </a:xfrm>
           <a:prstGeom prst="rect">
             <a:avLst/>
@@ -15414,12 +15414,12 @@
               <a:buClr>
                 <a:srgbClr val="A2A0FF"/>
               </a:buClr>
-              <a:buSzPts val="825"/>
+              <a:buSzPts val="1100"/>
               <a:buFont typeface="Calibri"/>
               <a:buNone/>
             </a:pPr>
             <a:r>
-              <a:rPr b="0" i="0" lang="en" sz="825" u="none" cap="none" strike="noStrike">
+              <a:rPr b="0" i="0" lang="en" sz="1100" u="none" cap="none" strike="noStrike">
                 <a:solidFill>
                   <a:srgbClr val="A2A0FF"/>
                 </a:solidFill>
@@ -15446,12 +15446,12 @@
               <a:buClr>
                 <a:srgbClr val="A2A0FF"/>
               </a:buClr>
-              <a:buSzPts val="825"/>
+              <a:buSzPts val="1100"/>
               <a:buFont typeface="Calibri"/>
               <a:buNone/>
             </a:pPr>
             <a:r>
-              <a:rPr b="0" i="0" lang="en" sz="825" u="none" cap="none" strike="noStrike">
+              <a:rPr b="0" i="0" lang="en" sz="1100" u="none" cap="none" strike="noStrike">
                 <a:solidFill>
                   <a:srgbClr val="A2A0FF"/>
                 </a:solidFill>
@@ -15478,12 +15478,12 @@
               <a:buClr>
                 <a:srgbClr val="A2A0FF"/>
               </a:buClr>
-              <a:buSzPts val="825"/>
+              <a:buSzPts val="1100"/>
               <a:buFont typeface="Calibri"/>
               <a:buNone/>
             </a:pPr>
             <a:r>
-              <a:rPr b="0" i="0" lang="en" sz="825" u="none" cap="none" strike="noStrike">
+              <a:rPr b="0" i="0" lang="en" sz="1100" u="none" cap="none" strike="noStrike">
                 <a:solidFill>
                   <a:srgbClr val="A2A0FF"/>
                 </a:solidFill>
@@ -15510,12 +15510,12 @@
               <a:buClr>
                 <a:srgbClr val="A2A0FF"/>
               </a:buClr>
-              <a:buSzPts val="825"/>
+              <a:buSzPts val="1100"/>
               <a:buFont typeface="Calibri"/>
               <a:buNone/>
             </a:pPr>
             <a:r>
-              <a:rPr b="0" i="0" lang="en" sz="825" u="none" cap="none" strike="noStrike">
+              <a:rPr b="0" i="0" lang="en" sz="1100" u="none" cap="none" strike="noStrike">
                 <a:solidFill>
                   <a:srgbClr val="A2A0FF"/>
                 </a:solidFill>
@@ -15538,8 +15538,8 @@
         </p:nvSpPr>
         <p:spPr>
           <a:xfrm>
-            <a:off x="342900" y="3497581"/>
-            <a:ext cx="1920240" cy="161263"/>
+            <a:off x="457189" y="4663325"/>
+            <a:ext cx="2560256" cy="215012"/>
           </a:xfrm>
           <a:prstGeom prst="rect">
             <a:avLst/>
@@ -15568,12 +15568,12 @@
               <a:buClr>
                 <a:srgbClr val="A2A0FF"/>
               </a:buClr>
-              <a:buSzPts val="825"/>
+              <a:buSzPts val="1100"/>
               <a:buFont typeface="Calibri"/>
               <a:buNone/>
             </a:pPr>
             <a:r>
-              <a:rPr b="0" i="0" lang="en" sz="825" u="none" cap="none" strike="noStrike">
+              <a:rPr b="0" i="0" lang="en" sz="1100" u="none" cap="none" strike="noStrike">
                 <a:solidFill>
                   <a:srgbClr val="A2A0FF"/>
                 </a:solidFill>
@@ -15596,8 +15596,8 @@
         </p:nvSpPr>
         <p:spPr>
           <a:xfrm>
-            <a:off x="2743200" y="480060"/>
-            <a:ext cx="1714500" cy="142218"/>
+            <a:off x="3657508" y="640064"/>
+            <a:ext cx="2285943" cy="189619"/>
           </a:xfrm>
           <a:prstGeom prst="rect">
             <a:avLst/>
@@ -15626,12 +15626,12 @@
               <a:buClr>
                 <a:srgbClr val="666666"/>
               </a:buClr>
-              <a:buSzPts val="825"/>
+              <a:buSzPts val="1100"/>
               <a:buFont typeface="Calibri"/>
               <a:buNone/>
             </a:pPr>
             <a:r>
-              <a:rPr b="0" i="0" lang="en" sz="825" u="none" cap="none" strike="noStrike">
+              <a:rPr b="0" i="0" lang="en" sz="1100" u="none" cap="none" strike="noStrike">
                 <a:solidFill>
                   <a:srgbClr val="666666"/>
                 </a:solidFill>
@@ -15654,8 +15654,8 @@
         </p:nvSpPr>
         <p:spPr>
           <a:xfrm>
-            <a:off x="2743200" y="994411"/>
-            <a:ext cx="1440180" cy="155107"/>
+            <a:off x="3657508" y="1325848"/>
+            <a:ext cx="1920192" cy="206804"/>
           </a:xfrm>
           <a:prstGeom prst="rect">
             <a:avLst/>
@@ -15684,12 +15684,12 @@
               <a:buClr>
                 <a:srgbClr val="735CFF"/>
               </a:buClr>
-              <a:buSzPts val="900"/>
+              <a:buSzPts val="1200"/>
               <a:buFont typeface="Calibri"/>
               <a:buNone/>
             </a:pPr>
             <a:r>
-              <a:rPr b="1" i="0" lang="en" sz="900" u="none" cap="none" strike="noStrike">
+              <a:rPr b="1" i="0" lang="en" sz="1200" u="none" cap="none" strike="noStrike">
                 <a:solidFill>
                   <a:srgbClr val="735CFF"/>
                 </a:solidFill>
@@ -15712,8 +15712,8 @@
         </p:nvSpPr>
         <p:spPr>
           <a:xfrm>
-            <a:off x="2743200" y="1303020"/>
-            <a:ext cx="1440180" cy="1583190"/>
+            <a:off x="3657508" y="1737317"/>
+            <a:ext cx="1920192" cy="2110867"/>
           </a:xfrm>
           <a:prstGeom prst="rect">
             <a:avLst/>
@@ -15742,12 +15742,12 @@
               <a:buClr>
                 <a:srgbClr val="1A1A2E"/>
               </a:buClr>
-              <a:buSzPts val="825"/>
+              <a:buSzPts val="1100"/>
               <a:buFont typeface="Calibri"/>
               <a:buNone/>
             </a:pPr>
             <a:r>
-              <a:rPr b="0" i="0" lang="en" sz="825" u="none" cap="none" strike="noStrike">
+              <a:rPr b="0" i="0" lang="en" sz="1100" u="none" cap="none" strike="noStrike">
                 <a:solidFill>
                   <a:srgbClr val="1A1A2E"/>
                 </a:solidFill>
@@ -15774,12 +15774,12 @@
               <a:buClr>
                 <a:srgbClr val="1A1A2E"/>
               </a:buClr>
-              <a:buSzPts val="825"/>
+              <a:buSzPts val="1100"/>
               <a:buFont typeface="Calibri"/>
               <a:buNone/>
             </a:pPr>
             <a:r>
-              <a:rPr b="0" i="0" lang="en" sz="825" u="none" cap="none" strike="noStrike">
+              <a:rPr b="0" i="0" lang="en" sz="1100" u="none" cap="none" strike="noStrike">
                 <a:solidFill>
                   <a:srgbClr val="1A1A2E"/>
                 </a:solidFill>
@@ -15806,12 +15806,12 @@
               <a:buClr>
                 <a:srgbClr val="1A1A2E"/>
               </a:buClr>
-              <a:buSzPts val="825"/>
+              <a:buSzPts val="1100"/>
               <a:buFont typeface="Calibri"/>
               <a:buNone/>
             </a:pPr>
             <a:r>
-              <a:rPr b="0" i="0" lang="en" sz="825" u="none" cap="none" strike="noStrike">
+              <a:rPr b="0" i="0" lang="en" sz="1100" u="none" cap="none" strike="noStrike">
                 <a:solidFill>
                   <a:srgbClr val="1A1A2E"/>
                 </a:solidFill>
@@ -15838,12 +15838,12 @@
               <a:buClr>
                 <a:srgbClr val="1A1A2E"/>
               </a:buClr>
-              <a:buSzPts val="825"/>
+              <a:buSzPts val="1100"/>
               <a:buFont typeface="Calibri"/>
               <a:buNone/>
             </a:pPr>
             <a:r>
-              <a:rPr b="0" i="0" lang="en" sz="825" u="none" cap="none" strike="noStrike">
+              <a:rPr b="0" i="0" lang="en" sz="1100" u="none" cap="none" strike="noStrike">
                 <a:solidFill>
                   <a:srgbClr val="1A1A2E"/>
                 </a:solidFill>
@@ -15870,12 +15870,12 @@
               <a:buClr>
                 <a:srgbClr val="1A1A2E"/>
               </a:buClr>
-              <a:buSzPts val="825"/>
+              <a:buSzPts val="1100"/>
               <a:buFont typeface="Calibri"/>
               <a:buNone/>
             </a:pPr>
             <a:r>
-              <a:rPr b="0" i="0" lang="en" sz="825" u="none" cap="none" strike="noStrike">
+              <a:rPr b="0" i="0" lang="en" sz="1100" u="none" cap="none" strike="noStrike">
                 <a:solidFill>
                   <a:srgbClr val="1A1A2E"/>
                 </a:solidFill>
@@ -15902,12 +15902,12 @@
               <a:buClr>
                 <a:srgbClr val="1A1A2E"/>
               </a:buClr>
-              <a:buSzPts val="825"/>
+              <a:buSzPts val="1100"/>
               <a:buFont typeface="Calibri"/>
               <a:buNone/>
             </a:pPr>
             <a:r>
-              <a:rPr b="0" i="0" lang="en" sz="825" u="none" cap="none" strike="noStrike">
+              <a:rPr b="0" i="0" lang="en" sz="1100" u="none" cap="none" strike="noStrike">
                 <a:solidFill>
                   <a:srgbClr val="1A1A2E"/>
                 </a:solidFill>
@@ -15934,12 +15934,12 @@
               <a:buClr>
                 <a:srgbClr val="1A1A2E"/>
               </a:buClr>
-              <a:buSzPts val="825"/>
+              <a:buSzPts val="1100"/>
               <a:buFont typeface="Calibri"/>
               <a:buNone/>
             </a:pPr>
             <a:r>
-              <a:rPr b="0" i="0" lang="en" sz="825" u="none" cap="none" strike="noStrike">
+              <a:rPr b="0" i="0" lang="en" sz="1100" u="none" cap="none" strike="noStrike">
                 <a:solidFill>
                   <a:srgbClr val="1A1A2E"/>
                 </a:solidFill>
@@ -15966,12 +15966,12 @@
               <a:buClr>
                 <a:srgbClr val="1A1A2E"/>
               </a:buClr>
-              <a:buSzPts val="825"/>
+              <a:buSzPts val="1100"/>
               <a:buFont typeface="Calibri"/>
               <a:buNone/>
             </a:pPr>
             <a:r>
-              <a:rPr b="0" i="0" lang="en" sz="825" u="none" cap="none" strike="noStrike">
+              <a:rPr b="0" i="0" lang="en" sz="1100" u="none" cap="none" strike="noStrike">
                 <a:solidFill>
                   <a:srgbClr val="1A1A2E"/>
                 </a:solidFill>
@@ -15982,7 +15982,7 @@
               </a:rPr>
               <a:t>Detroit, MI</a:t>
             </a:r>
-            <a:endParaRPr b="0" i="0" sz="825" u="none" cap="none" strike="noStrike">
+            <a:endParaRPr b="0" i="0" sz="1100" u="none" cap="none" strike="noStrike">
               <a:solidFill>
                 <a:srgbClr val="1A1A2E"/>
               </a:solidFill>
@@ -16006,12 +16006,12 @@
               <a:buClr>
                 <a:srgbClr val="1A1A2E"/>
               </a:buClr>
-              <a:buSzPts val="825"/>
+              <a:buSzPts val="1100"/>
               <a:buFont typeface="Calibri"/>
               <a:buNone/>
             </a:pPr>
             <a:r>
-              <a:rPr b="0" i="0" lang="en" sz="825" u="none" cap="none" strike="noStrike">
+              <a:rPr b="0" i="0" lang="en" sz="1100" u="none" cap="none" strike="noStrike">
                 <a:solidFill>
                   <a:srgbClr val="1A1A2E"/>
                 </a:solidFill>
@@ -16034,8 +16034,8 @@
         </p:nvSpPr>
         <p:spPr>
           <a:xfrm>
-            <a:off x="4251960" y="994411"/>
-            <a:ext cx="1440180" cy="155107"/>
+            <a:off x="5669138" y="1325848"/>
+            <a:ext cx="1920192" cy="206804"/>
           </a:xfrm>
           <a:prstGeom prst="rect">
             <a:avLst/>
@@ -16064,12 +16064,12 @@
               <a:buClr>
                 <a:srgbClr val="735CFF"/>
               </a:buClr>
-              <a:buSzPts val="900"/>
+              <a:buSzPts val="1200"/>
               <a:buFont typeface="Calibri"/>
               <a:buNone/>
             </a:pPr>
             <a:r>
-              <a:rPr b="1" i="0" lang="en" sz="900" u="none" cap="none" strike="noStrike">
+              <a:rPr b="1" i="0" lang="en" sz="1200" u="none" cap="none" strike="noStrike">
                 <a:solidFill>
                   <a:srgbClr val="735CFF"/>
                 </a:solidFill>
@@ -16092,8 +16092,8 @@
         </p:nvSpPr>
         <p:spPr>
           <a:xfrm>
-            <a:off x="4251960" y="1303020"/>
-            <a:ext cx="1440180" cy="694485"/>
+            <a:off x="5669138" y="1737317"/>
+            <a:ext cx="1920192" cy="925957"/>
           </a:xfrm>
           <a:prstGeom prst="rect">
             <a:avLst/>
@@ -16122,12 +16122,12 @@
               <a:buClr>
                 <a:srgbClr val="1A1A2E"/>
               </a:buClr>
-              <a:buSzPts val="825"/>
+              <a:buSzPts val="1100"/>
               <a:buFont typeface="Calibri"/>
               <a:buNone/>
             </a:pPr>
             <a:r>
-              <a:rPr b="0" i="0" lang="en" sz="825" u="none" cap="none" strike="noStrike">
+              <a:rPr b="0" i="0" lang="en" sz="1100" u="none" cap="none" strike="noStrike">
                 <a:solidFill>
                   <a:srgbClr val="1A1A2E"/>
                 </a:solidFill>
@@ -16138,7 +16138,7 @@
               </a:rPr>
               <a:t>CDMX, MX</a:t>
             </a:r>
-            <a:endParaRPr b="0" i="0" sz="825" u="none" cap="none" strike="noStrike">
+            <a:endParaRPr b="0" i="0" sz="1100" u="none" cap="none" strike="noStrike">
               <a:solidFill>
                 <a:srgbClr val="1A1A2E"/>
               </a:solidFill>
@@ -16162,12 +16162,12 @@
               <a:buClr>
                 <a:srgbClr val="1A1A2E"/>
               </a:buClr>
-              <a:buSzPts val="825"/>
+              <a:buSzPts val="1100"/>
               <a:buFont typeface="Calibri"/>
               <a:buNone/>
             </a:pPr>
             <a:r>
-              <a:rPr b="0" i="0" lang="en" sz="825" u="none" cap="none" strike="noStrike">
+              <a:rPr b="0" i="0" lang="en" sz="1100" u="none" cap="none" strike="noStrike">
                 <a:solidFill>
                   <a:srgbClr val="1A1A2E"/>
                 </a:solidFill>
@@ -16194,12 +16194,12 @@
               <a:buClr>
                 <a:srgbClr val="1A1A2E"/>
               </a:buClr>
-              <a:buSzPts val="825"/>
+              <a:buSzPts val="1100"/>
               <a:buFont typeface="Calibri"/>
               <a:buNone/>
             </a:pPr>
             <a:r>
-              <a:rPr b="0" i="0" lang="en" sz="825" u="none" cap="none" strike="noStrike">
+              <a:rPr b="0" i="0" lang="en" sz="1100" u="none" cap="none" strike="noStrike">
                 <a:solidFill>
                   <a:srgbClr val="1A1A2E"/>
                 </a:solidFill>
@@ -16210,7 +16210,7 @@
               </a:rPr>
               <a:t>Hermosillo, MX</a:t>
             </a:r>
-            <a:endParaRPr b="0" i="0" sz="825" u="none" cap="none" strike="noStrike">
+            <a:endParaRPr b="0" i="0" sz="1100" u="none" cap="none" strike="noStrike">
               <a:solidFill>
                 <a:srgbClr val="1A1A2E"/>
               </a:solidFill>
@@ -16234,12 +16234,12 @@
               <a:buClr>
                 <a:srgbClr val="1A1A2E"/>
               </a:buClr>
-              <a:buSzPts val="825"/>
+              <a:buSzPts val="1100"/>
               <a:buFont typeface="Calibri"/>
               <a:buNone/>
             </a:pPr>
             <a:r>
-              <a:rPr b="0" i="0" lang="en" sz="825" u="none" cap="none" strike="noStrike">
+              <a:rPr b="0" i="0" lang="en" sz="1100" u="none" cap="none" strike="noStrike">
                 <a:solidFill>
                   <a:srgbClr val="1A1A2E"/>
                 </a:solidFill>
@@ -16262,8 +16262,8 @@
         </p:nvSpPr>
         <p:spPr>
           <a:xfrm>
-            <a:off x="5760720" y="994411"/>
-            <a:ext cx="1440180" cy="155107"/>
+            <a:off x="7680768" y="1325848"/>
+            <a:ext cx="1920192" cy="206804"/>
           </a:xfrm>
           <a:prstGeom prst="rect">
             <a:avLst/>
@@ -16292,12 +16292,12 @@
               <a:buClr>
                 <a:srgbClr val="735CFF"/>
               </a:buClr>
-              <a:buSzPts val="900"/>
+              <a:buSzPts val="1200"/>
               <a:buFont typeface="Calibri"/>
               <a:buNone/>
             </a:pPr>
             <a:r>
-              <a:rPr b="1" i="0" lang="en" sz="900" u="none" cap="none" strike="noStrike">
+              <a:rPr b="1" i="0" lang="en" sz="1200" u="none" cap="none" strike="noStrike">
                 <a:solidFill>
                   <a:srgbClr val="735CFF"/>
                 </a:solidFill>
@@ -16320,8 +16320,8 @@
         </p:nvSpPr>
         <p:spPr>
           <a:xfrm>
-            <a:off x="5760720" y="1303020"/>
-            <a:ext cx="1440180" cy="1227708"/>
+            <a:off x="7680768" y="1737317"/>
+            <a:ext cx="1920192" cy="1636903"/>
           </a:xfrm>
           <a:prstGeom prst="rect">
             <a:avLst/>
@@ -16350,12 +16350,12 @@
               <a:buClr>
                 <a:srgbClr val="1A1A2E"/>
               </a:buClr>
-              <a:buSzPts val="825"/>
+              <a:buSzPts val="1100"/>
               <a:buFont typeface="Calibri"/>
               <a:buNone/>
             </a:pPr>
             <a:r>
-              <a:rPr b="0" i="0" lang="en" sz="825" u="none" cap="none" strike="noStrike">
+              <a:rPr b="0" i="0" lang="en" sz="1100" u="none" cap="none" strike="noStrike">
                 <a:solidFill>
                   <a:srgbClr val="1A1A2E"/>
                 </a:solidFill>
@@ -16366,7 +16366,7 @@
               </a:rPr>
               <a:t>Taipei, TW</a:t>
             </a:r>
-            <a:endParaRPr b="0" i="0" sz="825" u="none" cap="none" strike="noStrike">
+            <a:endParaRPr b="0" i="0" sz="1100" u="none" cap="none" strike="noStrike">
               <a:solidFill>
                 <a:srgbClr val="1A1A2E"/>
               </a:solidFill>
@@ -16390,12 +16390,12 @@
               <a:buClr>
                 <a:srgbClr val="1A1A2E"/>
               </a:buClr>
-              <a:buSzPts val="825"/>
+              <a:buSzPts val="1100"/>
               <a:buFont typeface="Calibri"/>
               <a:buNone/>
             </a:pPr>
             <a:r>
-              <a:rPr b="0" i="0" lang="en" sz="825" u="none" cap="none" strike="noStrike">
+              <a:rPr b="0" i="0" lang="en" sz="1100" u="none" cap="none" strike="noStrike">
                 <a:solidFill>
                   <a:srgbClr val="1A1A2E"/>
                 </a:solidFill>
@@ -16422,12 +16422,12 @@
               <a:buClr>
                 <a:srgbClr val="1A1A2E"/>
               </a:buClr>
-              <a:buSzPts val="825"/>
+              <a:buSzPts val="1100"/>
               <a:buFont typeface="Calibri"/>
               <a:buNone/>
             </a:pPr>
             <a:r>
-              <a:rPr b="0" i="0" lang="en" sz="825" u="none" cap="none" strike="noStrike">
+              <a:rPr b="0" i="0" lang="en" sz="1100" u="none" cap="none" strike="noStrike">
                 <a:solidFill>
                   <a:srgbClr val="1A1A2E"/>
                 </a:solidFill>
@@ -16454,12 +16454,12 @@
               <a:buClr>
                 <a:srgbClr val="1A1A2E"/>
               </a:buClr>
-              <a:buSzPts val="825"/>
+              <a:buSzPts val="1100"/>
               <a:buFont typeface="Calibri"/>
               <a:buNone/>
             </a:pPr>
             <a:r>
-              <a:rPr b="0" i="0" lang="en" sz="825" u="none" cap="none" strike="noStrike">
+              <a:rPr b="0" i="0" lang="en" sz="1100" u="none" cap="none" strike="noStrike">
                 <a:solidFill>
                   <a:srgbClr val="1A1A2E"/>
                 </a:solidFill>
@@ -16486,12 +16486,12 @@
               <a:buClr>
                 <a:srgbClr val="1A1A2E"/>
               </a:buClr>
-              <a:buSzPts val="825"/>
+              <a:buSzPts val="1100"/>
               <a:buFont typeface="Calibri"/>
               <a:buNone/>
             </a:pPr>
             <a:r>
-              <a:rPr b="0" i="0" lang="en" sz="825" u="none" cap="none" strike="noStrike">
+              <a:rPr b="0" i="0" lang="en" sz="1100" u="none" cap="none" strike="noStrike">
                 <a:solidFill>
                   <a:srgbClr val="1A1A2E"/>
                 </a:solidFill>
@@ -16518,12 +16518,12 @@
               <a:buClr>
                 <a:srgbClr val="1A1A2E"/>
               </a:buClr>
-              <a:buSzPts val="825"/>
+              <a:buSzPts val="1100"/>
               <a:buFont typeface="Calibri"/>
               <a:buNone/>
             </a:pPr>
             <a:r>
-              <a:rPr b="0" i="0" lang="en" sz="825" u="none" cap="none" strike="noStrike">
+              <a:rPr b="0" i="0" lang="en" sz="1100" u="none" cap="none" strike="noStrike">
                 <a:solidFill>
                   <a:srgbClr val="1A1A2E"/>
                 </a:solidFill>
@@ -16550,12 +16550,12 @@
               <a:buClr>
                 <a:srgbClr val="1A1A2E"/>
               </a:buClr>
-              <a:buSzPts val="825"/>
+              <a:buSzPts val="1100"/>
               <a:buFont typeface="Calibri"/>
               <a:buNone/>
             </a:pPr>
             <a:r>
-              <a:rPr b="0" i="0" lang="en" sz="825" u="none" cap="none" strike="noStrike">
+              <a:rPr b="0" i="0" lang="en" sz="1100" u="none" cap="none" strike="noStrike">
                 <a:solidFill>
                   <a:srgbClr val="1A1A2E"/>
                 </a:solidFill>
@@ -16566,7 +16566,7 @@
               </a:rPr>
               <a:t>Bengaluru, IN</a:t>
             </a:r>
-            <a:endParaRPr b="0" i="0" sz="825" u="none" cap="none" strike="noStrike">
+            <a:endParaRPr b="0" i="0" sz="1100" u="none" cap="none" strike="noStrike">
               <a:solidFill>
                 <a:srgbClr val="1A1A2E"/>
               </a:solidFill>
@@ -16586,8 +16586,8 @@
         </p:nvSpPr>
         <p:spPr>
           <a:xfrm>
-            <a:off x="7269480" y="994411"/>
-            <a:ext cx="1440180" cy="155107"/>
+            <a:off x="9692398" y="1325848"/>
+            <a:ext cx="1920192" cy="206804"/>
           </a:xfrm>
           <a:prstGeom prst="rect">
             <a:avLst/>
@@ -16616,12 +16616,12 @@
               <a:buClr>
                 <a:srgbClr val="735CFF"/>
               </a:buClr>
-              <a:buSzPts val="900"/>
+              <a:buSzPts val="1200"/>
               <a:buFont typeface="Calibri"/>
               <a:buNone/>
             </a:pPr>
             <a:r>
-              <a:rPr b="1" i="0" lang="en" sz="900" u="none" cap="none" strike="noStrike">
+              <a:rPr b="1" i="0" lang="en" sz="1200" u="none" cap="none" strike="noStrike">
                 <a:solidFill>
                   <a:srgbClr val="735CFF"/>
                 </a:solidFill>
@@ -16644,8 +16644,8 @@
         </p:nvSpPr>
         <p:spPr>
           <a:xfrm>
-            <a:off x="7269480" y="1303021"/>
-            <a:ext cx="1440180" cy="161263"/>
+            <a:off x="9692398" y="1737318"/>
+            <a:ext cx="1920192" cy="215012"/>
           </a:xfrm>
           <a:prstGeom prst="rect">
             <a:avLst/>
@@ -16674,12 +16674,12 @@
               <a:buClr>
                 <a:srgbClr val="1A1A2E"/>
               </a:buClr>
-              <a:buSzPts val="825"/>
+              <a:buSzPts val="1100"/>
               <a:buFont typeface="Calibri"/>
               <a:buNone/>
             </a:pPr>
             <a:r>
-              <a:rPr b="0" i="0" lang="en" sz="825" u="none" cap="none" strike="noStrike">
+              <a:rPr b="0" i="0" lang="en" sz="1100" u="none" cap="none" strike="noStrike">
                 <a:solidFill>
                   <a:srgbClr val="1A1A2E"/>
                 </a:solidFill>
@@ -16709,8 +16709,8 @@
         </p:blipFill>
         <p:spPr>
           <a:xfrm>
-            <a:off x="2743200" y="2478024"/>
-            <a:ext cx="6172200" cy="2959522"/>
+            <a:off x="3657508" y="3303949"/>
+            <a:ext cx="8229394" cy="3945931"/>
           </a:xfrm>
           <a:prstGeom prst="rect">
             <a:avLst/>
@@ -16736,8 +16736,8 @@
         </p:blipFill>
         <p:spPr>
           <a:xfrm>
-            <a:off x="7955280" y="240030"/>
-            <a:ext cx="960120" cy="203093"/>
+            <a:off x="10606775" y="320032"/>
+            <a:ext cx="1280128" cy="270784"/>
           </a:xfrm>
           <a:prstGeom prst="rect">
             <a:avLst/>
